--- a/landing-siempre-on/masterclass-27-octubre/pitch-comunidad-productiva.pptx
+++ b/landing-siempre-on/masterclass-27-octubre/pitch-comunidad-productiva.pptx
@@ -18,9 +18,12 @@
     <p:sldId id="266" r:id="rId12"/>
     <p:sldId id="267" r:id="rId13"/>
     <p:sldId id="268" r:id="rId14"/>
+    <p:sldId id="269" r:id="rId15"/>
+    <p:sldId id="270" r:id="rId16"/>
+    <p:sldId id="271" r:id="rId17"/>
   </p:sldIdLst>
   <p:notesMasterIdLst>
-    <p:notesMasterId r:id="rId15"/>
+    <p:notesMasterId r:id="rId18"/>
   </p:notesMasterIdLst>
   <p:sldSz cx="12192000" cy="6858000"/>
   <p:notesSz cx="6858000" cy="12192000"/>
@@ -119,41 +122,44 @@
   <p:extLst>
     <p:ext uri="{521415D9-36F7-43E2-AB2F-B90AF26B5E84}">
       <p14:sectionLst xmlns:p14="http://schemas.microsoft.com/office/powerpoint/2010/main">
-        <p14:section name="Puente" id="{9d37335b-2f75-2912-a46d-4995a549c6e9}">
+        <p14:section name="Antes del pitch" id="{3ea7fae6-4d26-ad60-debd-e782672bdd27}">
           <p14:sldIdLst>
             <p14:sldId id="256"/>
             <p14:sldId id="257"/>
           </p14:sldIdLst>
         </p14:section>
-        <p14:section name="Escalera" id="{2c8e7108-f319-0792-96b5-29ecd63e5d41}">
+        <p14:section name="Puente" id="{8be40ad8-4fc7-148d-8e11-7d5a2b3838f8}">
           <p14:sldIdLst>
             <p14:sldId id="258"/>
+            <p14:sldId id="259"/>
           </p14:sldIdLst>
         </p14:section>
-        <p14:section name="Oferta" id="{1d316f97-4355-a10e-fd25-62da172f77d3}">
+        <p14:section name="El primer paso" id="{b48fc1da-6963-a52b-c156-159f1e4b8ce1}">
           <p14:sldIdLst>
-            <p14:sldId id="259"/>
             <p14:sldId id="260"/>
             <p14:sldId id="261"/>
             <p14:sldId id="262"/>
           </p14:sldIdLst>
         </p14:section>
-        <p14:section name="Prueba" id="{1a7d2089-a5ce-0a2f-decb-2bdca23f47ea}">
+        <p14:section name="Prueba" id="{251cad7a-202f-4edb-1b76-864536e0067e}">
           <p14:sldIdLst>
             <p14:sldId id="263"/>
+            <p14:sldId id="264"/>
+            <p14:sldId id="265"/>
           </p14:sldIdLst>
         </p14:section>
-        <p14:section name="Precio" id="{01962c6c-1bb2-bf90-0a28-ceefe129fe7c}">
+        <p14:section name="Precio" id="{eed64ccc-7938-6425-703d-ff59c593dbc5}">
           <p14:sldIdLst>
-            <p14:sldId id="264"/>
-            <p14:sldId id="265"/>
             <p14:sldId id="266"/>
+            <p14:sldId id="267"/>
+            <p14:sldId id="268"/>
           </p14:sldIdLst>
         </p14:section>
-        <p14:section name="Cierre" id="{1eee581d-ce97-bbd9-aed3-fcdb5cd4bb86}">
+        <p14:section name="En vivo (se corta en el evergreen)" id="{7824f135-b975-2b34-3217-ad995d45fdc6}">
           <p14:sldIdLst>
-            <p14:sldId id="267"/>
-            <p14:sldId id="268"/>
+            <p14:sldId id="269"/>
+            <p14:sldId id="270"/>
+            <p14:sldId id="271"/>
           </p14:sldIdLst>
         </p14:section>
       </p14:sectionLst>
@@ -560,7 +566,7 @@
           <a:p>
             <a:r>
               <a:rPr lang="en-US" dirty="0"/>
-              <a:t>La bisagra entre la clase y la oferta, sin cambiar el tono. Contá en una frase lo que te costó a vos: te llevó 6 años armarlo solo. Pausa antes de pasar.</a:t>
+              <a:t>Bloque 5 · Lo que se vuelve posible. No lo apures: acá nacen las ganas. Describí cómo se ve la vida con la semana ordenada antes de mostrar nada.</a:t>
             </a:r>
             <a:endParaRPr lang="en-US" dirty="0"/>
           </a:p>
@@ -648,7 +654,7 @@
           <a:p>
             <a:r>
               <a:rPr lang="en-US" dirty="0"/>
-              <a:t>Preguntá en el chat cuánto les sale un café donde viven.</a:t>
+              <a:t>Bloque 10. «O seguís intentándolo solo, como venís haciendo, o lo hacés en conjunto. Esto no es para todos, porque no todos están dispuestos a accionar.» Nombrá las dos dudas aunque nadie las escriba: la segunda mata la venta en silencio.</a:t>
             </a:r>
             <a:endParaRPr lang="en-US" dirty="0"/>
           </a:p>
@@ -736,7 +742,7 @@
           <a:p>
             <a:r>
               <a:rPr lang="en-US" dirty="0"/>
-              <a:t>Las dos dudas: la del producto y la de uno mismo. Respondé las dos, aunque nadie las haya escrito en el chat.</a:t>
+              <a:t>Bloque 11. Es una suscripción mensual, como Netflix. Pedí que escriban en el chat cuántas pagan.</a:t>
             </a:r>
             <a:endParaRPr lang="en-US" dirty="0"/>
           </a:p>
@@ -824,7 +830,7 @@
           <a:p>
             <a:r>
               <a:rPr lang="en-US" dirty="0"/>
-              <a:t>Cada ENTRÉ en el chat: «¡Estás adentro, [nombre]!» en voz alta. Si tenés el conteo de los 20 lugares, decilo.</a:t>
+              <a:t>De un lado, lo que pagás sin que te sume. Del otro, lo que hace que tus cosas avancen. Hoy tus cosas reciben entre 0 y 2 horas por semana.</a:t>
             </a:r>
             <a:endParaRPr lang="en-US" dirty="0"/>
           </a:p>
@@ -912,7 +918,7 @@
           <a:p>
             <a:r>
               <a:rPr lang="en-US" dirty="0"/>
-              <a:t>Dejá esta slide en pantalla mientras respondés preguntas.</a:t>
+              <a:t>Preguntá en el chat cuánto les sale un café donde viven. Recién después, el precio.</a:t>
             </a:r>
             <a:endParaRPr lang="en-US" dirty="0"/>
           </a:p>
@@ -936,6 +942,270 @@
             <a:fld id="{F7021451-1387-4CA6-816F-3879F97B5CBC}" type="slidenum">
               <a:rPr lang="en-US"/>
               <a:t>13</a:t>
+            </a:fld>
+            <a:endParaRPr lang="en-US"/>
+          </a:p>
+        </p:txBody>
+      </p:sp>
+    </p:spTree>
+    <p:extLst>
+      <p:ext uri="{BB962C8B-B14F-4D97-AF65-F5344CB8AC3E}">
+        <p14:creationId xmlns:p14="http://schemas.microsoft.com/office/powerpoint/2010/main" val="1024086991"/>
+      </p:ext>
+    </p:extLst>
+  </p:cSld>
+  <p:clrMapOvr>
+    <a:masterClrMapping/>
+  </p:clrMapOvr>
+</p:notes>
+</file>
+
+<file path=ppt/notesSlides/notesSlide14.xml><?xml version="1.0" encoding="utf-8"?>
+<p:notes xmlns:a="http://schemas.openxmlformats.org/drawingml/2006/main" xmlns:r="http://schemas.openxmlformats.org/officeDocument/2006/relationships" xmlns:p="http://schemas.openxmlformats.org/presentationml/2006/main">
+  <p:cSld>
+    <p:spTree>
+      <p:nvGrpSpPr>
+        <p:cNvPr id="1" name=""/>
+        <p:cNvGrpSpPr/>
+        <p:nvPr/>
+      </p:nvGrpSpPr>
+      <p:grpSpPr>
+        <a:xfrm>
+          <a:off x="0" y="0"/>
+          <a:ext cx="0" cy="0"/>
+          <a:chOff x="0" y="0"/>
+          <a:chExt cx="0" cy="0"/>
+        </a:xfrm>
+      </p:grpSpPr>
+      <p:sp>
+        <p:nvSpPr>
+          <p:cNvPr id="2" name="Slide Image Placeholder 1"/>
+          <p:cNvSpPr>
+            <a:spLocks noGrp="1" noRot="1" noChangeAspect="1"/>
+          </p:cNvSpPr>
+          <p:nvPr>
+            <p:ph type="sldImg"/>
+          </p:nvPr>
+        </p:nvSpPr>
+        <p:spPr/>
+      </p:sp>
+      <p:sp>
+        <p:nvSpPr>
+          <p:cNvPr id="3" name="Notes Placeholder 2"/>
+          <p:cNvSpPr>
+            <a:spLocks noGrp="1"/>
+          </p:cNvSpPr>
+          <p:nvPr>
+            <p:ph type="body" idx="1"/>
+          </p:nvPr>
+        </p:nvSpPr>
+        <p:spPr/>
+        <p:txBody>
+          <a:bodyPr/>
+          <a:lstStyle/>
+          <a:p>
+            <a:r>
+              <a:rPr lang="en-US" dirty="0"/>
+              <a:t>Desde acá, todo se corta en la versión grabada. Decí el precio y hacé silencio tres segundos. [A CONFIRMAR: cupo de 20 a USD 35 y después USD 50; la garantía «si no te sirve, no renovás», a validar con Nico.]</a:t>
+            </a:r>
+            <a:endParaRPr lang="en-US" dirty="0"/>
+          </a:p>
+        </p:txBody>
+      </p:sp>
+      <p:sp>
+        <p:nvSpPr>
+          <p:cNvPr id="4" name="Slide Number Placeholder 3"/>
+          <p:cNvSpPr>
+            <a:spLocks noGrp="1"/>
+          </p:cNvSpPr>
+          <p:nvPr>
+            <p:ph type="sldNum" sz="quarter" idx="10"/>
+          </p:nvPr>
+        </p:nvSpPr>
+        <p:spPr/>
+        <p:txBody>
+          <a:bodyPr/>
+          <a:lstStyle/>
+          <a:p>
+            <a:fld id="{F7021451-1387-4CA6-816F-3879F97B5CBC}" type="slidenum">
+              <a:rPr lang="en-US"/>
+              <a:t>14</a:t>
+            </a:fld>
+            <a:endParaRPr lang="en-US"/>
+          </a:p>
+        </p:txBody>
+      </p:sp>
+    </p:spTree>
+    <p:extLst>
+      <p:ext uri="{BB962C8B-B14F-4D97-AF65-F5344CB8AC3E}">
+        <p14:creationId xmlns:p14="http://schemas.microsoft.com/office/powerpoint/2010/main" val="1024086991"/>
+      </p:ext>
+    </p:extLst>
+  </p:cSld>
+  <p:clrMapOvr>
+    <a:masterClrMapping/>
+  </p:clrMapOvr>
+</p:notes>
+</file>
+
+<file path=ppt/notesSlides/notesSlide15.xml><?xml version="1.0" encoding="utf-8"?>
+<p:notes xmlns:a="http://schemas.openxmlformats.org/drawingml/2006/main" xmlns:r="http://schemas.openxmlformats.org/officeDocument/2006/relationships" xmlns:p="http://schemas.openxmlformats.org/presentationml/2006/main">
+  <p:cSld>
+    <p:spTree>
+      <p:nvGrpSpPr>
+        <p:cNvPr id="1" name=""/>
+        <p:cNvGrpSpPr/>
+        <p:nvPr/>
+      </p:nvGrpSpPr>
+      <p:grpSpPr>
+        <a:xfrm>
+          <a:off x="0" y="0"/>
+          <a:ext cx="0" cy="0"/>
+          <a:chOff x="0" y="0"/>
+          <a:chExt cx="0" cy="0"/>
+        </a:xfrm>
+      </p:grpSpPr>
+      <p:sp>
+        <p:nvSpPr>
+          <p:cNvPr id="2" name="Slide Image Placeholder 1"/>
+          <p:cNvSpPr>
+            <a:spLocks noGrp="1" noRot="1" noChangeAspect="1"/>
+          </p:cNvSpPr>
+          <p:nvPr>
+            <p:ph type="sldImg"/>
+          </p:nvPr>
+        </p:nvSpPr>
+        <p:spPr/>
+      </p:sp>
+      <p:sp>
+        <p:nvSpPr>
+          <p:cNvPr id="3" name="Notes Placeholder 2"/>
+          <p:cNvSpPr>
+            <a:spLocks noGrp="1"/>
+          </p:cNvSpPr>
+          <p:nvPr>
+            <p:ph type="body" idx="1"/>
+          </p:nvPr>
+        </p:nvSpPr>
+        <p:spPr/>
+        <p:txBody>
+          <a:bodyPr/>
+          <a:lstStyle/>
+          <a:p>
+            <a:r>
+              <a:rPr lang="en-US" dirty="0"/>
+              <a:t>Una sola acción: el QR de su moneda. Cada ADENTRO en el chat, nombralo: «¡Estás adentro!». Mientras pagan, entra el caso de éxito que gestiona Esteban.</a:t>
+            </a:r>
+            <a:endParaRPr lang="en-US" dirty="0"/>
+          </a:p>
+        </p:txBody>
+      </p:sp>
+      <p:sp>
+        <p:nvSpPr>
+          <p:cNvPr id="4" name="Slide Number Placeholder 3"/>
+          <p:cNvSpPr>
+            <a:spLocks noGrp="1"/>
+          </p:cNvSpPr>
+          <p:nvPr>
+            <p:ph type="sldNum" sz="quarter" idx="10"/>
+          </p:nvPr>
+        </p:nvSpPr>
+        <p:spPr/>
+        <p:txBody>
+          <a:bodyPr/>
+          <a:lstStyle/>
+          <a:p>
+            <a:fld id="{F7021451-1387-4CA6-816F-3879F97B5CBC}" type="slidenum">
+              <a:rPr lang="en-US"/>
+              <a:t>15</a:t>
+            </a:fld>
+            <a:endParaRPr lang="en-US"/>
+          </a:p>
+        </p:txBody>
+      </p:sp>
+    </p:spTree>
+    <p:extLst>
+      <p:ext uri="{BB962C8B-B14F-4D97-AF65-F5344CB8AC3E}">
+        <p14:creationId xmlns:p14="http://schemas.microsoft.com/office/powerpoint/2010/main" val="1024086991"/>
+      </p:ext>
+    </p:extLst>
+  </p:cSld>
+  <p:clrMapOvr>
+    <a:masterClrMapping/>
+  </p:clrMapOvr>
+</p:notes>
+</file>
+
+<file path=ppt/notesSlides/notesSlide16.xml><?xml version="1.0" encoding="utf-8"?>
+<p:notes xmlns:a="http://schemas.openxmlformats.org/drawingml/2006/main" xmlns:r="http://schemas.openxmlformats.org/officeDocument/2006/relationships" xmlns:p="http://schemas.openxmlformats.org/presentationml/2006/main">
+  <p:cSld>
+    <p:spTree>
+      <p:nvGrpSpPr>
+        <p:cNvPr id="1" name=""/>
+        <p:cNvGrpSpPr/>
+        <p:nvPr/>
+      </p:nvGrpSpPr>
+      <p:grpSpPr>
+        <a:xfrm>
+          <a:off x="0" y="0"/>
+          <a:ext cx="0" cy="0"/>
+          <a:chOff x="0" y="0"/>
+          <a:chExt cx="0" cy="0"/>
+        </a:xfrm>
+      </p:grpSpPr>
+      <p:sp>
+        <p:nvSpPr>
+          <p:cNvPr id="2" name="Slide Image Placeholder 1"/>
+          <p:cNvSpPr>
+            <a:spLocks noGrp="1" noRot="1" noChangeAspect="1"/>
+          </p:cNvSpPr>
+          <p:nvPr>
+            <p:ph type="sldImg"/>
+          </p:nvPr>
+        </p:nvSpPr>
+        <p:spPr/>
+      </p:sp>
+      <p:sp>
+        <p:nvSpPr>
+          <p:cNvPr id="3" name="Notes Placeholder 2"/>
+          <p:cNvSpPr>
+            <a:spLocks noGrp="1"/>
+          </p:cNvSpPr>
+          <p:nvPr>
+            <p:ph type="body" idx="1"/>
+          </p:nvPr>
+        </p:nvSpPr>
+        <p:spPr/>
+        <p:txBody>
+          <a:bodyPr/>
+          <a:lstStyle/>
+          <a:p>
+            <a:r>
+              <a:rPr lang="en-US" dirty="0"/>
+              <a:t>Repitch y preguntas: los 3 pilares, el precio y el QR otra vez. Medio de pago primero. Dejá esta slide en pantalla.</a:t>
+            </a:r>
+            <a:endParaRPr lang="en-US" dirty="0"/>
+          </a:p>
+        </p:txBody>
+      </p:sp>
+      <p:sp>
+        <p:nvSpPr>
+          <p:cNvPr id="4" name="Slide Number Placeholder 3"/>
+          <p:cNvSpPr>
+            <a:spLocks noGrp="1"/>
+          </p:cNvSpPr>
+          <p:nvPr>
+            <p:ph type="sldNum" sz="quarter" idx="10"/>
+          </p:nvPr>
+        </p:nvSpPr>
+        <p:spPr/>
+        <p:txBody>
+          <a:bodyPr/>
+          <a:lstStyle/>
+          <a:p>
+            <a:fld id="{F7021451-1387-4CA6-816F-3879F97B5CBC}" type="slidenum">
+              <a:rPr lang="en-US"/>
+              <a:t>16</a:t>
             </a:fld>
             <a:endParaRPr lang="en-US"/>
           </a:p>
@@ -1000,7 +1270,7 @@
           <a:p>
             <a:r>
               <a:rPr lang="en-US" dirty="0"/>
-              <a:t>Esperá los SÍ y leé dos o tres nombres en voz alta.</a:t>
+              <a:t>Bloque 6. «Esto es todo lo que hay dentro del Instituto: clases grupales, coaches 1 a 1, nutrición, psicología y los niveles siguientes. Es integral, porque ningún sistema funciona si no mira tu vida entera. Pero hoy te quiero traer una solución concreta para que puedas accionar. Podés con todo, pero no con todo al mismo tiempo.» Señalá el primer escalón: «Es lo único que depende de vos. Todo lo demás lo hacemos juntos y te guiamos adentro.» El 1 a 1 está en los escalones de arriba, nunca en la Comunidad.</a:t>
             </a:r>
             <a:endParaRPr lang="en-US" dirty="0"/>
           </a:p>
@@ -1088,7 +1358,7 @@
           <a:p>
             <a:r>
               <a:rPr lang="en-US" dirty="0"/>
-              <a:t>No hace falta subir todo junto. Hoy es el primer escalón. Los otros dos existen y llegan cuando tengas las bases.</a:t>
+              <a:t>Bloque 7 · Puente, sin cambiar el tono. Dejá que cada uno se ubique solo en una de las dos.</a:t>
             </a:r>
             <a:endParaRPr lang="en-US" dirty="0"/>
           </a:p>
@@ -1176,7 +1446,7 @@
           <a:p>
             <a:r>
               <a:rPr lang="en-US" dirty="0"/>
-              <a:t>Es el lugar donde se hace lo de hoy, todas las semanas, con otros. La planificación la llevan los profesionales del equipo: no prometas tu presencia adentro.</a:t>
+              <a:t>Esperá los SÍ. En vivo podés leer algunos nombres; para la versión grabada alcanza con «veo que muchos me dicen que sí».</a:t>
             </a:r>
             <a:endParaRPr lang="en-US" dirty="0"/>
           </a:p>
@@ -1264,7 +1534,7 @@
           <a:p>
             <a:r>
               <a:rPr lang="en-US" dirty="0"/>
-              <a:t>Contalo como la semana de un miembro, cada cosa con su para qué. Cerrá con la regla.</a:t>
+              <a:t>Presentala como el primer escalón del Instituto: el lugar donde se hace todas las semanas lo que viste en la clase. La planificación la llevan los profesionales del equipo.</a:t>
             </a:r>
             <a:endParaRPr lang="en-US" dirty="0"/>
           </a:p>
@@ -1352,7 +1622,7 @@
           <a:p>
             <a:r>
               <a:rPr lang="en-US" dirty="0"/>
-              <a:t>El cerebro sostiene distinto cuando hay alguien al lado haciendo lo mismo. Si podés, mostrá una captura real del co-work de hoy.</a:t>
+              <a:t>Bloque 8. «Lo primero que necesitás para organizarte y concentrarte son estos tres pilares.» Cada uno por lo que te da. Cerrá con la regla: una semana en modo supervivencia se recupera. [A CONFIRMAR con David: qué incluyen exactamente los sábados.]</a:t>
             </a:r>
             <a:endParaRPr lang="en-US" dirty="0"/>
           </a:p>
@@ -1440,7 +1710,7 @@
           <a:p>
             <a:r>
               <a:rPr lang="en-US" dirty="0"/>
-              <a:t>Pasalos rápido, cada uno con su para qué en una frase.</a:t>
+              <a:t>Mostrá cómo es por dentro. El cerebro rinde distinto cuando hay alguien del otro lado haciendo lo mismo, como correr acompañado.</a:t>
             </a:r>
             <a:endParaRPr lang="en-US" dirty="0"/>
           </a:p>
@@ -1528,7 +1798,7 @@
           <a:p>
             <a:r>
               <a:rPr lang="en-US" dirty="0"/>
-              <a:t>Si Pierina está en la clase, dale el micrófono un par de minutos para que cuente cómo arrancó.</a:t>
+              <a:t>Si Pierina está, que cuente en un par de minutos cómo arrancó.</a:t>
             </a:r>
             <a:endParaRPr lang="en-US" dirty="0"/>
           </a:p>
@@ -1616,7 +1886,7 @@
           <a:p>
             <a:r>
               <a:rPr lang="en-US" dirty="0"/>
-              <a:t>Decí el precio y hacé silencio tres segundos.</a:t>
+              <a:t>Bloque 9. Perfiles distintos para que cada uno se vea en alguno. Los casos los define Esteban: no se inventan.</a:t>
             </a:r>
             <a:endParaRPr lang="en-US" dirty="0"/>
           </a:p>
@@ -2258,7 +2528,7 @@
         </p:nvSpPr>
         <p:spPr>
           <a:xfrm>
-            <a:off x="731520" y="1554480"/>
+            <a:off x="731520" y="1325880"/>
             <a:ext cx="10728655" cy="365760"/>
           </a:xfrm>
           <a:prstGeom prst="rect">
@@ -2297,8 +2567,8 @@
         </p:nvSpPr>
         <p:spPr>
           <a:xfrm>
-            <a:off x="1280160" y="2057400"/>
-            <a:ext cx="9631375" cy="1920240"/>
+            <a:off x="1280160" y="1828800"/>
+            <a:ext cx="9631375" cy="2331720"/>
           </a:xfrm>
           <a:prstGeom prst="rect">
             <a:avLst/>
@@ -2336,8 +2606,8 @@
         </p:nvSpPr>
         <p:spPr>
           <a:xfrm>
-            <a:off x="1645920" y="4114800"/>
-            <a:ext cx="8899855" cy="914400"/>
+            <a:off x="1645920" y="4297680"/>
+            <a:ext cx="8899855" cy="822960"/>
           </a:xfrm>
           <a:prstGeom prst="rect">
             <a:avLst/>
@@ -2739,7 +3009,7 @@
         </p:nvSpPr>
         <p:spPr>
           <a:xfrm>
-            <a:off x="731520" y="1554480"/>
+            <a:off x="731520" y="685800"/>
             <a:ext cx="10728655" cy="365760"/>
           </a:xfrm>
           <a:prstGeom prst="rect">
@@ -2752,7 +3022,7 @@
           <a:bodyPr wrap="square" lIns="0" tIns="0" rIns="0" bIns="0" rtlCol="0" anchor="ctr"/>
           <a:lstStyle/>
           <a:p>
-            <a:pPr algn="ctr" indent="0" marL="0">
+            <a:pPr indent="0" marL="0">
               <a:buNone/>
             </a:pPr>
             <a:r>
@@ -2761,7 +3031,7 @@
                   <a:schemeClr val="accent1"/>
                 </a:solidFill>
               </a:rPr>
-              <a:t>ANTES DE CERRAR</a:t>
+              <a:t>LO QUE SE VUELVE POSIBLE</a:t>
             </a:r>
             <a:endParaRPr lang="en-US" sz="1400" dirty="0"/>
           </a:p>
@@ -2777,8 +3047,326 @@
         </p:nvSpPr>
         <p:spPr>
           <a:xfrm>
-            <a:off x="1280160" y="2057400"/>
-            <a:ext cx="9631375" cy="1920240"/>
+            <a:off x="731520" y="1097280"/>
+            <a:ext cx="10728655" cy="1005840"/>
+          </a:xfrm>
+          <a:prstGeom prst="rect">
+            <a:avLst/>
+          </a:prstGeom>
+          <a:noFill/>
+          <a:ln/>
+        </p:spPr>
+        <p:txBody>
+          <a:bodyPr wrap="square" lIns="0" tIns="0" rIns="0" bIns="0" rtlCol="0" anchor="t"/>
+          <a:lstStyle/>
+          <a:p>
+            <a:pPr algn="l" indent="0" marL="0">
+              <a:buNone/>
+            </a:pPr>
+            <a:r>
+              <a:rPr lang="en-US" sz="4000" b="1" dirty="0">
+                <a:solidFill>
+                  <a:schemeClr val="tx1"/>
+                </a:solidFill>
+              </a:rPr>
+              <a:t>Imaginate tu semana ordenada</a:t>
+            </a:r>
+            <a:endParaRPr lang="en-US" sz="4000" dirty="0"/>
+          </a:p>
+        </p:txBody>
+      </p:sp>
+      <p:sp>
+        <p:nvSpPr>
+          <p:cNvPr id="4" name="Promesa"/>
+          <p:cNvSpPr txBox="1"/>
+          <p:nvPr/>
+        </p:nvSpPr>
+        <p:spPr>
+          <a:xfrm>
+            <a:off x="731520" y="2240280"/>
+            <a:ext cx="4206240" cy="1005840"/>
+          </a:xfrm>
+          <a:prstGeom prst="rect">
+            <a:avLst/>
+          </a:prstGeom>
+          <a:noFill/>
+          <a:ln/>
+        </p:spPr>
+        <p:txBody>
+          <a:bodyPr wrap="square" lIns="0" tIns="0" rIns="0" bIns="0" rtlCol="0" anchor="t"/>
+          <a:lstStyle/>
+          <a:p>
+            <a:pPr indent="0" marL="0">
+              <a:buNone/>
+            </a:pPr>
+            <a:r>
+              <a:rPr lang="en-US" sz="2400" b="1" dirty="0">
+                <a:solidFill>
+                  <a:schemeClr val="tx1"/>
+                </a:solidFill>
+                <a:latin typeface="Montserrat" pitchFamily="34" charset="0"/>
+                <a:ea typeface="Montserrat" pitchFamily="34" charset="-122"/>
+                <a:cs typeface="Montserrat" pitchFamily="34" charset="-120"/>
+              </a:rPr>
+              <a:t>Tres bloques por semana pensados para vos.</a:t>
+            </a:r>
+            <a:endParaRPr lang="en-US" sz="2400" dirty="0"/>
+          </a:p>
+        </p:txBody>
+      </p:sp>
+      <p:sp>
+        <p:nvSpPr>
+          <p:cNvPr id="5" name="Detalle"/>
+          <p:cNvSpPr txBox="1"/>
+          <p:nvPr/>
+        </p:nvSpPr>
+        <p:spPr>
+          <a:xfrm>
+            <a:off x="731520" y="3429000"/>
+            <a:ext cx="4206240" cy="1280160"/>
+          </a:xfrm>
+          <a:prstGeom prst="rect">
+            <a:avLst/>
+          </a:prstGeom>
+          <a:noFill/>
+          <a:ln/>
+        </p:spPr>
+        <p:txBody>
+          <a:bodyPr wrap="square" lIns="0" tIns="0" rIns="0" bIns="0" rtlCol="0" anchor="t"/>
+          <a:lstStyle/>
+          <a:p>
+            <a:pPr indent="0" marL="0">
+              <a:buNone/>
+            </a:pPr>
+            <a:r>
+              <a:rPr lang="en-US" sz="2000" dirty="0">
+                <a:solidFill>
+                  <a:schemeClr val="accent3"/>
+                </a:solidFill>
+              </a:rPr>
+              <a:t>Tu proyecto avanza. Y cerrás el día con tiempo para tu familia, sin culpa.</a:t>
+            </a:r>
+            <a:endParaRPr lang="en-US" sz="2000" dirty="0"/>
+          </a:p>
+        </p:txBody>
+      </p:sp>
+      <p:sp>
+        <p:nvSpPr>
+          <p:cNvPr id="6" name="Día LUN"/>
+          <p:cNvSpPr txBox="1"/>
+          <p:nvPr/>
+        </p:nvSpPr>
+        <p:spPr>
+          <a:xfrm>
+            <a:off x="5440680" y="2240280"/>
+            <a:ext cx="758952" cy="274320"/>
+          </a:xfrm>
+          <a:prstGeom prst="rect">
+            <a:avLst/>
+          </a:prstGeom>
+          <a:noFill/>
+          <a:ln/>
+        </p:spPr>
+        <p:txBody>
+          <a:bodyPr wrap="square" lIns="0" tIns="0" rIns="0" bIns="0" rtlCol="0" anchor="t"/>
+          <a:lstStyle/>
+          <a:p>
+            <a:pPr algn="ctr" indent="0" marL="0">
+              <a:buNone/>
+            </a:pPr>
+            <a:r>
+              <a:rPr lang="en-US" sz="1200" b="1" spc="100" kern="0" dirty="0">
+                <a:solidFill>
+                  <a:schemeClr val="accent3"/>
+                </a:solidFill>
+              </a:rPr>
+              <a:t>LUN</a:t>
+            </a:r>
+            <a:endParaRPr lang="en-US" sz="1200" dirty="0"/>
+          </a:p>
+        </p:txBody>
+      </p:sp>
+      <p:sp>
+        <p:nvSpPr>
+          <p:cNvPr id="7" name="Bloque LUN 1"/>
+          <p:cNvSpPr/>
+          <p:nvPr/>
+        </p:nvSpPr>
+        <p:spPr>
+          <a:xfrm>
+            <a:off x="5440680" y="2624328"/>
+            <a:ext cx="758952" cy="658368"/>
+          </a:xfrm>
+          <a:prstGeom prst="roundRect">
+            <a:avLst>
+              <a:gd name="adj" fmla="val 13889"/>
+            </a:avLst>
+          </a:prstGeom>
+          <a:solidFill>
+            <a:schemeClr val="accent4"/>
+          </a:solidFill>
+          <a:ln w="12700">
+            <a:solidFill>
+              <a:schemeClr val="accent4"/>
+            </a:solidFill>
+            <a:prstDash val="solid"/>
+          </a:ln>
+        </p:spPr>
+      </p:sp>
+      <p:sp>
+        <p:nvSpPr>
+          <p:cNvPr id="8" name="Bloque LUN 2"/>
+          <p:cNvSpPr/>
+          <p:nvPr/>
+        </p:nvSpPr>
+        <p:spPr>
+          <a:xfrm>
+            <a:off x="5440680" y="3374136"/>
+            <a:ext cx="758952" cy="658368"/>
+          </a:xfrm>
+          <a:prstGeom prst="roundRect">
+            <a:avLst>
+              <a:gd name="adj" fmla="val 13889"/>
+            </a:avLst>
+          </a:prstGeom>
+          <a:solidFill>
+            <a:schemeClr val="accent4"/>
+          </a:solidFill>
+          <a:ln w="12700">
+            <a:solidFill>
+              <a:schemeClr val="accent4"/>
+            </a:solidFill>
+            <a:prstDash val="solid"/>
+          </a:ln>
+        </p:spPr>
+      </p:sp>
+      <p:sp>
+        <p:nvSpPr>
+          <p:cNvPr id="9" name="Bloque LUN 3"/>
+          <p:cNvSpPr/>
+          <p:nvPr/>
+        </p:nvSpPr>
+        <p:spPr>
+          <a:xfrm>
+            <a:off x="5440680" y="4123944"/>
+            <a:ext cx="758952" cy="658368"/>
+          </a:xfrm>
+          <a:prstGeom prst="roundRect">
+            <a:avLst>
+              <a:gd name="adj" fmla="val 13889"/>
+            </a:avLst>
+          </a:prstGeom>
+          <a:solidFill>
+            <a:schemeClr val="accent4"/>
+          </a:solidFill>
+          <a:ln w="12700">
+            <a:solidFill>
+              <a:schemeClr val="accent4"/>
+            </a:solidFill>
+            <a:prstDash val="solid"/>
+          </a:ln>
+        </p:spPr>
+      </p:sp>
+      <p:sp>
+        <p:nvSpPr>
+          <p:cNvPr id="10" name="Bloque LUN 4"/>
+          <p:cNvSpPr/>
+          <p:nvPr/>
+        </p:nvSpPr>
+        <p:spPr>
+          <a:xfrm>
+            <a:off x="5440680" y="4873752"/>
+            <a:ext cx="758952" cy="658368"/>
+          </a:xfrm>
+          <a:prstGeom prst="roundRect">
+            <a:avLst>
+              <a:gd name="adj" fmla="val 13889"/>
+            </a:avLst>
+          </a:prstGeom>
+          <a:solidFill>
+            <a:schemeClr val="accent4"/>
+          </a:solidFill>
+          <a:ln w="12700">
+            <a:solidFill>
+              <a:schemeClr val="accent4"/>
+            </a:solidFill>
+            <a:prstDash val="solid"/>
+          </a:ln>
+        </p:spPr>
+      </p:sp>
+      <p:sp>
+        <p:nvSpPr>
+          <p:cNvPr id="11" name="Día MAR"/>
+          <p:cNvSpPr txBox="1"/>
+          <p:nvPr/>
+        </p:nvSpPr>
+        <p:spPr>
+          <a:xfrm>
+            <a:off x="6318504" y="2240280"/>
+            <a:ext cx="758952" cy="274320"/>
+          </a:xfrm>
+          <a:prstGeom prst="rect">
+            <a:avLst/>
+          </a:prstGeom>
+          <a:noFill/>
+          <a:ln/>
+        </p:spPr>
+        <p:txBody>
+          <a:bodyPr wrap="square" lIns="0" tIns="0" rIns="0" bIns="0" rtlCol="0" anchor="t"/>
+          <a:lstStyle/>
+          <a:p>
+            <a:pPr algn="ctr" indent="0" marL="0">
+              <a:buNone/>
+            </a:pPr>
+            <a:r>
+              <a:rPr lang="en-US" sz="1200" b="1" spc="100" kern="0" dirty="0">
+                <a:solidFill>
+                  <a:schemeClr val="accent3"/>
+                </a:solidFill>
+              </a:rPr>
+              <a:t>MAR</a:t>
+            </a:r>
+            <a:endParaRPr lang="en-US" sz="1200" dirty="0"/>
+          </a:p>
+        </p:txBody>
+      </p:sp>
+      <p:sp>
+        <p:nvSpPr>
+          <p:cNvPr id="12" name="Bloque MAR 1"/>
+          <p:cNvSpPr/>
+          <p:nvPr/>
+        </p:nvSpPr>
+        <p:spPr>
+          <a:xfrm>
+            <a:off x="6318504" y="2624328"/>
+            <a:ext cx="758952" cy="658368"/>
+          </a:xfrm>
+          <a:prstGeom prst="roundRect">
+            <a:avLst>
+              <a:gd name="adj" fmla="val 13889"/>
+            </a:avLst>
+          </a:prstGeom>
+          <a:solidFill>
+            <a:schemeClr val="accent1"/>
+          </a:solidFill>
+          <a:ln w="12700">
+            <a:solidFill>
+              <a:schemeClr val="accent1"/>
+            </a:solidFill>
+            <a:prstDash val="solid"/>
+          </a:ln>
+        </p:spPr>
+      </p:sp>
+      <p:sp>
+        <p:nvSpPr>
+          <p:cNvPr id="13" name="Bloque MAR 1 texto"/>
+          <p:cNvSpPr txBox="1"/>
+          <p:nvPr/>
+        </p:nvSpPr>
+        <p:spPr>
+          <a:xfrm>
+            <a:off x="6318504" y="2624328"/>
+            <a:ext cx="758952" cy="658368"/>
           </a:xfrm>
           <a:prstGeom prst="rect">
             <a:avLst/>
@@ -2794,29 +3382,122 @@
               <a:buNone/>
             </a:pPr>
             <a:r>
-              <a:rPr lang="en-US" sz="4800" b="1" dirty="0">
+              <a:rPr lang="en-US" sz="1000" b="1" dirty="0">
                 <a:solidFill>
                   <a:schemeClr val="bg1"/>
                 </a:solidFill>
               </a:rPr>
-              <a:t>Ahora ya lo sabés</a:t>
-            </a:r>
-            <a:endParaRPr lang="en-US" sz="4800" dirty="0"/>
-          </a:p>
-        </p:txBody>
-      </p:sp>
-      <p:sp>
-        <p:nvSpPr>
-          <p:cNvPr id="4" name="Text 0"/>
-          <p:cNvSpPr/>
-          <p:nvPr>
-            <p:ph idx="102" type="body" hasCustomPrompt="1"/>
-          </p:nvPr>
-        </p:nvSpPr>
-        <p:spPr>
-          <a:xfrm>
-            <a:off x="1645920" y="4114800"/>
-            <a:ext cx="8899855" cy="914400"/>
+              <a:t>PARA</a:t>
+            </a:r>
+            <a:endParaRPr lang="en-US" sz="1000" dirty="0"/>
+          </a:p>
+          <a:p>
+            <a:pPr algn="ctr" indent="0" marL="0">
+              <a:buNone/>
+            </a:pPr>
+            <a:r>
+              <a:rPr lang="en-US" sz="1000" b="1" dirty="0">
+                <a:solidFill>
+                  <a:schemeClr val="bg1"/>
+                </a:solidFill>
+              </a:rPr>
+              <a:t>VOS</a:t>
+            </a:r>
+            <a:endParaRPr lang="en-US" sz="1000" dirty="0"/>
+          </a:p>
+        </p:txBody>
+      </p:sp>
+      <p:sp>
+        <p:nvSpPr>
+          <p:cNvPr id="14" name="Bloque MAR 2"/>
+          <p:cNvSpPr/>
+          <p:nvPr/>
+        </p:nvSpPr>
+        <p:spPr>
+          <a:xfrm>
+            <a:off x="6318504" y="3374136"/>
+            <a:ext cx="758952" cy="658368"/>
+          </a:xfrm>
+          <a:prstGeom prst="roundRect">
+            <a:avLst>
+              <a:gd name="adj" fmla="val 13889"/>
+            </a:avLst>
+          </a:prstGeom>
+          <a:solidFill>
+            <a:schemeClr val="accent4"/>
+          </a:solidFill>
+          <a:ln w="12700">
+            <a:solidFill>
+              <a:schemeClr val="accent4"/>
+            </a:solidFill>
+            <a:prstDash val="solid"/>
+          </a:ln>
+        </p:spPr>
+      </p:sp>
+      <p:sp>
+        <p:nvSpPr>
+          <p:cNvPr id="15" name="Bloque MAR 3"/>
+          <p:cNvSpPr/>
+          <p:nvPr/>
+        </p:nvSpPr>
+        <p:spPr>
+          <a:xfrm>
+            <a:off x="6318504" y="4123944"/>
+            <a:ext cx="758952" cy="658368"/>
+          </a:xfrm>
+          <a:prstGeom prst="roundRect">
+            <a:avLst>
+              <a:gd name="adj" fmla="val 13889"/>
+            </a:avLst>
+          </a:prstGeom>
+          <a:solidFill>
+            <a:schemeClr val="accent4"/>
+          </a:solidFill>
+          <a:ln w="12700">
+            <a:solidFill>
+              <a:schemeClr val="accent4"/>
+            </a:solidFill>
+            <a:prstDash val="solid"/>
+          </a:ln>
+        </p:spPr>
+      </p:sp>
+      <p:sp>
+        <p:nvSpPr>
+          <p:cNvPr id="16" name="Bloque MAR 4"/>
+          <p:cNvSpPr/>
+          <p:nvPr/>
+        </p:nvSpPr>
+        <p:spPr>
+          <a:xfrm>
+            <a:off x="6318504" y="4873752"/>
+            <a:ext cx="758952" cy="658368"/>
+          </a:xfrm>
+          <a:prstGeom prst="roundRect">
+            <a:avLst>
+              <a:gd name="adj" fmla="val 13889"/>
+            </a:avLst>
+          </a:prstGeom>
+          <a:solidFill>
+            <a:schemeClr val="accent4"/>
+          </a:solidFill>
+          <a:ln w="12700">
+            <a:solidFill>
+              <a:schemeClr val="accent4"/>
+            </a:solidFill>
+            <a:prstDash val="solid"/>
+          </a:ln>
+        </p:spPr>
+      </p:sp>
+      <p:sp>
+        <p:nvSpPr>
+          <p:cNvPr id="17" name="Día MIÉ"/>
+          <p:cNvSpPr txBox="1"/>
+          <p:nvPr/>
+        </p:nvSpPr>
+        <p:spPr>
+          <a:xfrm>
+            <a:off x="7196328" y="2240280"/>
+            <a:ext cx="758952" cy="274320"/>
           </a:xfrm>
           <a:prstGeom prst="rect">
             <a:avLst/>
@@ -2832,16 +3513,665 @@
               <a:buNone/>
             </a:pPr>
             <a:r>
-              <a:rPr lang="en-US" sz="2200" dirty="0">
-                <a:solidFill>
-                  <a:schemeClr val="accent2"/>
-                </a:solidFill>
-              </a:rPr>
-              <a:t>Y con los años me di cuenta de que saberlo no alcanza.</a:t>
-            </a:r>
-            <a:endParaRPr lang="en-US" sz="2200" dirty="0"/>
-          </a:p>
-        </p:txBody>
+              <a:rPr lang="en-US" sz="1200" b="1" spc="100" kern="0" dirty="0">
+                <a:solidFill>
+                  <a:schemeClr val="accent3"/>
+                </a:solidFill>
+              </a:rPr>
+              <a:t>MIÉ</a:t>
+            </a:r>
+            <a:endParaRPr lang="en-US" sz="1200" dirty="0"/>
+          </a:p>
+        </p:txBody>
+      </p:sp>
+      <p:sp>
+        <p:nvSpPr>
+          <p:cNvPr id="18" name="Bloque MIÉ 1"/>
+          <p:cNvSpPr/>
+          <p:nvPr/>
+        </p:nvSpPr>
+        <p:spPr>
+          <a:xfrm>
+            <a:off x="7196328" y="2624328"/>
+            <a:ext cx="758952" cy="658368"/>
+          </a:xfrm>
+          <a:prstGeom prst="roundRect">
+            <a:avLst>
+              <a:gd name="adj" fmla="val 13889"/>
+            </a:avLst>
+          </a:prstGeom>
+          <a:solidFill>
+            <a:schemeClr val="accent4"/>
+          </a:solidFill>
+          <a:ln w="12700">
+            <a:solidFill>
+              <a:schemeClr val="accent4"/>
+            </a:solidFill>
+            <a:prstDash val="solid"/>
+          </a:ln>
+        </p:spPr>
+      </p:sp>
+      <p:sp>
+        <p:nvSpPr>
+          <p:cNvPr id="19" name="Bloque MIÉ 2"/>
+          <p:cNvSpPr/>
+          <p:nvPr/>
+        </p:nvSpPr>
+        <p:spPr>
+          <a:xfrm>
+            <a:off x="7196328" y="3374136"/>
+            <a:ext cx="758952" cy="658368"/>
+          </a:xfrm>
+          <a:prstGeom prst="roundRect">
+            <a:avLst>
+              <a:gd name="adj" fmla="val 13889"/>
+            </a:avLst>
+          </a:prstGeom>
+          <a:solidFill>
+            <a:schemeClr val="accent4"/>
+          </a:solidFill>
+          <a:ln w="12700">
+            <a:solidFill>
+              <a:schemeClr val="accent4"/>
+            </a:solidFill>
+            <a:prstDash val="solid"/>
+          </a:ln>
+        </p:spPr>
+      </p:sp>
+      <p:sp>
+        <p:nvSpPr>
+          <p:cNvPr id="20" name="Bloque MIÉ 3"/>
+          <p:cNvSpPr/>
+          <p:nvPr/>
+        </p:nvSpPr>
+        <p:spPr>
+          <a:xfrm>
+            <a:off x="7196328" y="4123944"/>
+            <a:ext cx="758952" cy="658368"/>
+          </a:xfrm>
+          <a:prstGeom prst="roundRect">
+            <a:avLst>
+              <a:gd name="adj" fmla="val 13889"/>
+            </a:avLst>
+          </a:prstGeom>
+          <a:solidFill>
+            <a:schemeClr val="accent4"/>
+          </a:solidFill>
+          <a:ln w="12700">
+            <a:solidFill>
+              <a:schemeClr val="accent4"/>
+            </a:solidFill>
+            <a:prstDash val="solid"/>
+          </a:ln>
+        </p:spPr>
+      </p:sp>
+      <p:sp>
+        <p:nvSpPr>
+          <p:cNvPr id="21" name="Bloque MIÉ 4"/>
+          <p:cNvSpPr/>
+          <p:nvPr/>
+        </p:nvSpPr>
+        <p:spPr>
+          <a:xfrm>
+            <a:off x="7196328" y="4873752"/>
+            <a:ext cx="758952" cy="658368"/>
+          </a:xfrm>
+          <a:prstGeom prst="roundRect">
+            <a:avLst>
+              <a:gd name="adj" fmla="val 13889"/>
+            </a:avLst>
+          </a:prstGeom>
+          <a:solidFill>
+            <a:schemeClr val="accent4"/>
+          </a:solidFill>
+          <a:ln w="12700">
+            <a:solidFill>
+              <a:schemeClr val="accent4"/>
+            </a:solidFill>
+            <a:prstDash val="solid"/>
+          </a:ln>
+        </p:spPr>
+      </p:sp>
+      <p:sp>
+        <p:nvSpPr>
+          <p:cNvPr id="22" name="Día JUE"/>
+          <p:cNvSpPr txBox="1"/>
+          <p:nvPr/>
+        </p:nvSpPr>
+        <p:spPr>
+          <a:xfrm>
+            <a:off x="8074152" y="2240280"/>
+            <a:ext cx="758952" cy="274320"/>
+          </a:xfrm>
+          <a:prstGeom prst="rect">
+            <a:avLst/>
+          </a:prstGeom>
+          <a:noFill/>
+          <a:ln/>
+        </p:spPr>
+        <p:txBody>
+          <a:bodyPr wrap="square" lIns="0" tIns="0" rIns="0" bIns="0" rtlCol="0" anchor="t"/>
+          <a:lstStyle/>
+          <a:p>
+            <a:pPr algn="ctr" indent="0" marL="0">
+              <a:buNone/>
+            </a:pPr>
+            <a:r>
+              <a:rPr lang="en-US" sz="1200" b="1" spc="100" kern="0" dirty="0">
+                <a:solidFill>
+                  <a:schemeClr val="accent3"/>
+                </a:solidFill>
+              </a:rPr>
+              <a:t>JUE</a:t>
+            </a:r>
+            <a:endParaRPr lang="en-US" sz="1200" dirty="0"/>
+          </a:p>
+        </p:txBody>
+      </p:sp>
+      <p:sp>
+        <p:nvSpPr>
+          <p:cNvPr id="23" name="Bloque JUE 1"/>
+          <p:cNvSpPr/>
+          <p:nvPr/>
+        </p:nvSpPr>
+        <p:spPr>
+          <a:xfrm>
+            <a:off x="8074152" y="2624328"/>
+            <a:ext cx="758952" cy="658368"/>
+          </a:xfrm>
+          <a:prstGeom prst="roundRect">
+            <a:avLst>
+              <a:gd name="adj" fmla="val 13889"/>
+            </a:avLst>
+          </a:prstGeom>
+          <a:solidFill>
+            <a:schemeClr val="accent4"/>
+          </a:solidFill>
+          <a:ln w="12700">
+            <a:solidFill>
+              <a:schemeClr val="accent4"/>
+            </a:solidFill>
+            <a:prstDash val="solid"/>
+          </a:ln>
+        </p:spPr>
+      </p:sp>
+      <p:sp>
+        <p:nvSpPr>
+          <p:cNvPr id="24" name="Bloque JUE 2"/>
+          <p:cNvSpPr/>
+          <p:nvPr/>
+        </p:nvSpPr>
+        <p:spPr>
+          <a:xfrm>
+            <a:off x="8074152" y="3374136"/>
+            <a:ext cx="758952" cy="658368"/>
+          </a:xfrm>
+          <a:prstGeom prst="roundRect">
+            <a:avLst>
+              <a:gd name="adj" fmla="val 13889"/>
+            </a:avLst>
+          </a:prstGeom>
+          <a:solidFill>
+            <a:schemeClr val="accent4"/>
+          </a:solidFill>
+          <a:ln w="12700">
+            <a:solidFill>
+              <a:schemeClr val="accent4"/>
+            </a:solidFill>
+            <a:prstDash val="solid"/>
+          </a:ln>
+        </p:spPr>
+      </p:sp>
+      <p:sp>
+        <p:nvSpPr>
+          <p:cNvPr id="25" name="Bloque JUE 3"/>
+          <p:cNvSpPr/>
+          <p:nvPr/>
+        </p:nvSpPr>
+        <p:spPr>
+          <a:xfrm>
+            <a:off x="8074152" y="4123944"/>
+            <a:ext cx="758952" cy="658368"/>
+          </a:xfrm>
+          <a:prstGeom prst="roundRect">
+            <a:avLst>
+              <a:gd name="adj" fmla="val 13889"/>
+            </a:avLst>
+          </a:prstGeom>
+          <a:solidFill>
+            <a:schemeClr val="accent4"/>
+          </a:solidFill>
+          <a:ln w="12700">
+            <a:solidFill>
+              <a:schemeClr val="accent4"/>
+            </a:solidFill>
+            <a:prstDash val="solid"/>
+          </a:ln>
+        </p:spPr>
+      </p:sp>
+      <p:sp>
+        <p:nvSpPr>
+          <p:cNvPr id="26" name="Bloque JUE 4"/>
+          <p:cNvSpPr/>
+          <p:nvPr/>
+        </p:nvSpPr>
+        <p:spPr>
+          <a:xfrm>
+            <a:off x="8074152" y="4873752"/>
+            <a:ext cx="758952" cy="658368"/>
+          </a:xfrm>
+          <a:prstGeom prst="roundRect">
+            <a:avLst>
+              <a:gd name="adj" fmla="val 13889"/>
+            </a:avLst>
+          </a:prstGeom>
+          <a:solidFill>
+            <a:schemeClr val="accent1"/>
+          </a:solidFill>
+          <a:ln w="12700">
+            <a:solidFill>
+              <a:schemeClr val="accent1"/>
+            </a:solidFill>
+            <a:prstDash val="solid"/>
+          </a:ln>
+        </p:spPr>
+      </p:sp>
+      <p:sp>
+        <p:nvSpPr>
+          <p:cNvPr id="27" name="Bloque JUE 4 texto"/>
+          <p:cNvSpPr txBox="1"/>
+          <p:nvPr/>
+        </p:nvSpPr>
+        <p:spPr>
+          <a:xfrm>
+            <a:off x="8074152" y="4873752"/>
+            <a:ext cx="758952" cy="658368"/>
+          </a:xfrm>
+          <a:prstGeom prst="rect">
+            <a:avLst/>
+          </a:prstGeom>
+          <a:noFill/>
+          <a:ln/>
+        </p:spPr>
+        <p:txBody>
+          <a:bodyPr wrap="square" lIns="0" tIns="0" rIns="0" bIns="0" rtlCol="0" anchor="ctr"/>
+          <a:lstStyle/>
+          <a:p>
+            <a:pPr algn="ctr" indent="0" marL="0">
+              <a:buNone/>
+            </a:pPr>
+            <a:r>
+              <a:rPr lang="en-US" sz="1000" b="1" dirty="0">
+                <a:solidFill>
+                  <a:schemeClr val="bg1"/>
+                </a:solidFill>
+              </a:rPr>
+              <a:t>PARA</a:t>
+            </a:r>
+            <a:endParaRPr lang="en-US" sz="1000" dirty="0"/>
+          </a:p>
+          <a:p>
+            <a:pPr algn="ctr" indent="0" marL="0">
+              <a:buNone/>
+            </a:pPr>
+            <a:r>
+              <a:rPr lang="en-US" sz="1000" b="1" dirty="0">
+                <a:solidFill>
+                  <a:schemeClr val="bg1"/>
+                </a:solidFill>
+              </a:rPr>
+              <a:t>VOS</a:t>
+            </a:r>
+            <a:endParaRPr lang="en-US" sz="1000" dirty="0"/>
+          </a:p>
+        </p:txBody>
+      </p:sp>
+      <p:sp>
+        <p:nvSpPr>
+          <p:cNvPr id="28" name="Día VIE"/>
+          <p:cNvSpPr txBox="1"/>
+          <p:nvPr/>
+        </p:nvSpPr>
+        <p:spPr>
+          <a:xfrm>
+            <a:off x="8951976" y="2240280"/>
+            <a:ext cx="758952" cy="274320"/>
+          </a:xfrm>
+          <a:prstGeom prst="rect">
+            <a:avLst/>
+          </a:prstGeom>
+          <a:noFill/>
+          <a:ln/>
+        </p:spPr>
+        <p:txBody>
+          <a:bodyPr wrap="square" lIns="0" tIns="0" rIns="0" bIns="0" rtlCol="0" anchor="t"/>
+          <a:lstStyle/>
+          <a:p>
+            <a:pPr algn="ctr" indent="0" marL="0">
+              <a:buNone/>
+            </a:pPr>
+            <a:r>
+              <a:rPr lang="en-US" sz="1200" b="1" spc="100" kern="0" dirty="0">
+                <a:solidFill>
+                  <a:schemeClr val="accent3"/>
+                </a:solidFill>
+              </a:rPr>
+              <a:t>VIE</a:t>
+            </a:r>
+            <a:endParaRPr lang="en-US" sz="1200" dirty="0"/>
+          </a:p>
+        </p:txBody>
+      </p:sp>
+      <p:sp>
+        <p:nvSpPr>
+          <p:cNvPr id="29" name="Bloque VIE 1"/>
+          <p:cNvSpPr/>
+          <p:nvPr/>
+        </p:nvSpPr>
+        <p:spPr>
+          <a:xfrm>
+            <a:off x="8951976" y="2624328"/>
+            <a:ext cx="758952" cy="658368"/>
+          </a:xfrm>
+          <a:prstGeom prst="roundRect">
+            <a:avLst>
+              <a:gd name="adj" fmla="val 13889"/>
+            </a:avLst>
+          </a:prstGeom>
+          <a:solidFill>
+            <a:schemeClr val="accent4"/>
+          </a:solidFill>
+          <a:ln w="12700">
+            <a:solidFill>
+              <a:schemeClr val="accent4"/>
+            </a:solidFill>
+            <a:prstDash val="solid"/>
+          </a:ln>
+        </p:spPr>
+      </p:sp>
+      <p:sp>
+        <p:nvSpPr>
+          <p:cNvPr id="30" name="Bloque VIE 2"/>
+          <p:cNvSpPr/>
+          <p:nvPr/>
+        </p:nvSpPr>
+        <p:spPr>
+          <a:xfrm>
+            <a:off x="8951976" y="3374136"/>
+            <a:ext cx="758952" cy="658368"/>
+          </a:xfrm>
+          <a:prstGeom prst="roundRect">
+            <a:avLst>
+              <a:gd name="adj" fmla="val 13889"/>
+            </a:avLst>
+          </a:prstGeom>
+          <a:solidFill>
+            <a:schemeClr val="accent4"/>
+          </a:solidFill>
+          <a:ln w="12700">
+            <a:solidFill>
+              <a:schemeClr val="accent4"/>
+            </a:solidFill>
+            <a:prstDash val="solid"/>
+          </a:ln>
+        </p:spPr>
+      </p:sp>
+      <p:sp>
+        <p:nvSpPr>
+          <p:cNvPr id="31" name="Bloque VIE 3"/>
+          <p:cNvSpPr/>
+          <p:nvPr/>
+        </p:nvSpPr>
+        <p:spPr>
+          <a:xfrm>
+            <a:off x="8951976" y="4123944"/>
+            <a:ext cx="758952" cy="658368"/>
+          </a:xfrm>
+          <a:prstGeom prst="roundRect">
+            <a:avLst>
+              <a:gd name="adj" fmla="val 13889"/>
+            </a:avLst>
+          </a:prstGeom>
+          <a:solidFill>
+            <a:schemeClr val="accent4"/>
+          </a:solidFill>
+          <a:ln w="12700">
+            <a:solidFill>
+              <a:schemeClr val="accent4"/>
+            </a:solidFill>
+            <a:prstDash val="solid"/>
+          </a:ln>
+        </p:spPr>
+      </p:sp>
+      <p:sp>
+        <p:nvSpPr>
+          <p:cNvPr id="32" name="Bloque VIE 4"/>
+          <p:cNvSpPr/>
+          <p:nvPr/>
+        </p:nvSpPr>
+        <p:spPr>
+          <a:xfrm>
+            <a:off x="8951976" y="4873752"/>
+            <a:ext cx="758952" cy="658368"/>
+          </a:xfrm>
+          <a:prstGeom prst="roundRect">
+            <a:avLst>
+              <a:gd name="adj" fmla="val 13889"/>
+            </a:avLst>
+          </a:prstGeom>
+          <a:solidFill>
+            <a:schemeClr val="accent4"/>
+          </a:solidFill>
+          <a:ln w="12700">
+            <a:solidFill>
+              <a:schemeClr val="accent4"/>
+            </a:solidFill>
+            <a:prstDash val="solid"/>
+          </a:ln>
+        </p:spPr>
+      </p:sp>
+      <p:sp>
+        <p:nvSpPr>
+          <p:cNvPr id="33" name="Día SÁB"/>
+          <p:cNvSpPr txBox="1"/>
+          <p:nvPr/>
+        </p:nvSpPr>
+        <p:spPr>
+          <a:xfrm>
+            <a:off x="9829800" y="2240280"/>
+            <a:ext cx="758952" cy="274320"/>
+          </a:xfrm>
+          <a:prstGeom prst="rect">
+            <a:avLst/>
+          </a:prstGeom>
+          <a:noFill/>
+          <a:ln/>
+        </p:spPr>
+        <p:txBody>
+          <a:bodyPr wrap="square" lIns="0" tIns="0" rIns="0" bIns="0" rtlCol="0" anchor="t"/>
+          <a:lstStyle/>
+          <a:p>
+            <a:pPr algn="ctr" indent="0" marL="0">
+              <a:buNone/>
+            </a:pPr>
+            <a:r>
+              <a:rPr lang="en-US" sz="1200" b="1" spc="100" kern="0" dirty="0">
+                <a:solidFill>
+                  <a:schemeClr val="accent3"/>
+                </a:solidFill>
+              </a:rPr>
+              <a:t>SÁB</a:t>
+            </a:r>
+            <a:endParaRPr lang="en-US" sz="1200" dirty="0"/>
+          </a:p>
+        </p:txBody>
+      </p:sp>
+      <p:sp>
+        <p:nvSpPr>
+          <p:cNvPr id="34" name="Bloque SÁB 1"/>
+          <p:cNvSpPr/>
+          <p:nvPr/>
+        </p:nvSpPr>
+        <p:spPr>
+          <a:xfrm>
+            <a:off x="9829800" y="2624328"/>
+            <a:ext cx="758952" cy="658368"/>
+          </a:xfrm>
+          <a:prstGeom prst="roundRect">
+            <a:avLst>
+              <a:gd name="adj" fmla="val 13889"/>
+            </a:avLst>
+          </a:prstGeom>
+          <a:solidFill>
+            <a:schemeClr val="accent4"/>
+          </a:solidFill>
+          <a:ln w="12700">
+            <a:solidFill>
+              <a:schemeClr val="accent4"/>
+            </a:solidFill>
+            <a:prstDash val="solid"/>
+          </a:ln>
+        </p:spPr>
+      </p:sp>
+      <p:sp>
+        <p:nvSpPr>
+          <p:cNvPr id="35" name="Bloque SÁB 2"/>
+          <p:cNvSpPr/>
+          <p:nvPr/>
+        </p:nvSpPr>
+        <p:spPr>
+          <a:xfrm>
+            <a:off x="9829800" y="3374136"/>
+            <a:ext cx="758952" cy="658368"/>
+          </a:xfrm>
+          <a:prstGeom prst="roundRect">
+            <a:avLst>
+              <a:gd name="adj" fmla="val 13889"/>
+            </a:avLst>
+          </a:prstGeom>
+          <a:solidFill>
+            <a:schemeClr val="accent1"/>
+          </a:solidFill>
+          <a:ln w="12700">
+            <a:solidFill>
+              <a:schemeClr val="accent1"/>
+            </a:solidFill>
+            <a:prstDash val="solid"/>
+          </a:ln>
+        </p:spPr>
+      </p:sp>
+      <p:sp>
+        <p:nvSpPr>
+          <p:cNvPr id="36" name="Bloque SÁB 2 texto"/>
+          <p:cNvSpPr txBox="1"/>
+          <p:nvPr/>
+        </p:nvSpPr>
+        <p:spPr>
+          <a:xfrm>
+            <a:off x="9829800" y="3374136"/>
+            <a:ext cx="758952" cy="658368"/>
+          </a:xfrm>
+          <a:prstGeom prst="rect">
+            <a:avLst/>
+          </a:prstGeom>
+          <a:noFill/>
+          <a:ln/>
+        </p:spPr>
+        <p:txBody>
+          <a:bodyPr wrap="square" lIns="0" tIns="0" rIns="0" bIns="0" rtlCol="0" anchor="ctr"/>
+          <a:lstStyle/>
+          <a:p>
+            <a:pPr algn="ctr" indent="0" marL="0">
+              <a:buNone/>
+            </a:pPr>
+            <a:r>
+              <a:rPr lang="en-US" sz="1000" b="1" dirty="0">
+                <a:solidFill>
+                  <a:schemeClr val="bg1"/>
+                </a:solidFill>
+              </a:rPr>
+              <a:t>PARA</a:t>
+            </a:r>
+            <a:endParaRPr lang="en-US" sz="1000" dirty="0"/>
+          </a:p>
+          <a:p>
+            <a:pPr algn="ctr" indent="0" marL="0">
+              <a:buNone/>
+            </a:pPr>
+            <a:r>
+              <a:rPr lang="en-US" sz="1000" b="1" dirty="0">
+                <a:solidFill>
+                  <a:schemeClr val="bg1"/>
+                </a:solidFill>
+              </a:rPr>
+              <a:t>VOS</a:t>
+            </a:r>
+            <a:endParaRPr lang="en-US" sz="1000" dirty="0"/>
+          </a:p>
+        </p:txBody>
+      </p:sp>
+      <p:sp>
+        <p:nvSpPr>
+          <p:cNvPr id="37" name="Día DOM"/>
+          <p:cNvSpPr txBox="1"/>
+          <p:nvPr/>
+        </p:nvSpPr>
+        <p:spPr>
+          <a:xfrm>
+            <a:off x="10707624" y="2240280"/>
+            <a:ext cx="758952" cy="274320"/>
+          </a:xfrm>
+          <a:prstGeom prst="rect">
+            <a:avLst/>
+          </a:prstGeom>
+          <a:noFill/>
+          <a:ln/>
+        </p:spPr>
+        <p:txBody>
+          <a:bodyPr wrap="square" lIns="0" tIns="0" rIns="0" bIns="0" rtlCol="0" anchor="t"/>
+          <a:lstStyle/>
+          <a:p>
+            <a:pPr algn="ctr" indent="0" marL="0">
+              <a:buNone/>
+            </a:pPr>
+            <a:r>
+              <a:rPr lang="en-US" sz="1200" b="1" spc="100" kern="0" dirty="0">
+                <a:solidFill>
+                  <a:schemeClr val="accent3"/>
+                </a:solidFill>
+              </a:rPr>
+              <a:t>DOM</a:t>
+            </a:r>
+            <a:endParaRPr lang="en-US" sz="1200" dirty="0"/>
+          </a:p>
+        </p:txBody>
+      </p:sp>
+      <p:sp>
+        <p:nvSpPr>
+          <p:cNvPr id="38" name="Bloque DOM 1"/>
+          <p:cNvSpPr/>
+          <p:nvPr/>
+        </p:nvSpPr>
+        <p:spPr>
+          <a:xfrm>
+            <a:off x="10707624" y="2624328"/>
+            <a:ext cx="758952" cy="658368"/>
+          </a:xfrm>
+          <a:prstGeom prst="roundRect">
+            <a:avLst>
+              <a:gd name="adj" fmla="val 13889"/>
+            </a:avLst>
+          </a:prstGeom>
+          <a:solidFill>
+            <a:schemeClr val="accent4"/>
+          </a:solidFill>
+          <a:ln w="12700">
+            <a:solidFill>
+              <a:schemeClr val="accent4"/>
+            </a:solidFill>
+            <a:prstDash val="solid"/>
+          </a:ln>
+        </p:spPr>
       </p:sp>
     </p:spTree>
   </p:cSld>
@@ -2900,7 +4230,7 @@
                   <a:schemeClr val="accent1"/>
                 </a:solidFill>
               </a:rPr>
-              <a:t>HAGAMOS LA CUENTA</a:t>
+              <a:t>ANTES DE DECIDIR</a:t>
             </a:r>
             <a:endParaRPr lang="en-US" sz="1400" dirty="0"/>
           </a:p>
@@ -2908,30 +4238,95 @@
       </p:sp>
       <p:sp>
         <p:nvSpPr>
-          <p:cNvPr id="3" name="Cuenta"/>
+          <p:cNvPr id="3" name="Text 0"/>
+          <p:cNvSpPr/>
+          <p:nvPr>
+            <p:ph idx="101" type="title" hasCustomPrompt="1"/>
+          </p:nvPr>
+        </p:nvSpPr>
+        <p:spPr>
+          <a:xfrm>
+            <a:off x="731520" y="1097280"/>
+            <a:ext cx="10728655" cy="1005840"/>
+          </a:xfrm>
+          <a:prstGeom prst="rect">
+            <a:avLst/>
+          </a:prstGeom>
+          <a:noFill/>
+          <a:ln/>
+        </p:spPr>
+        <p:txBody>
+          <a:bodyPr wrap="square" lIns="0" tIns="0" rIns="0" bIns="0" rtlCol="0" anchor="t"/>
+          <a:lstStyle/>
+          <a:p>
+            <a:pPr algn="l" indent="0" marL="0">
+              <a:buNone/>
+            </a:pPr>
+            <a:r>
+              <a:rPr lang="en-US" sz="4000" b="1" dirty="0">
+                <a:solidFill>
+                  <a:schemeClr val="tx1"/>
+                </a:solidFill>
+              </a:rPr>
+              <a:t>Las dos dudas de siempre</a:t>
+            </a:r>
+            <a:endParaRPr lang="en-US" sz="4000" dirty="0"/>
+          </a:p>
+        </p:txBody>
+      </p:sp>
+      <p:sp>
+        <p:nvSpPr>
+          <p:cNvPr id="4" name="Duda 1"/>
+          <p:cNvSpPr/>
+          <p:nvPr/>
+        </p:nvSpPr>
+        <p:spPr>
+          <a:xfrm>
+            <a:off x="731520" y="2240280"/>
+            <a:ext cx="5181448" cy="3108960"/>
+          </a:xfrm>
+          <a:prstGeom prst="roundRect">
+            <a:avLst>
+              <a:gd name="adj" fmla="val 5294"/>
+            </a:avLst>
+          </a:prstGeom>
+          <a:solidFill>
+            <a:schemeClr val="bg2"/>
+          </a:solidFill>
+          <a:ln w="12700">
+            <a:solidFill>
+              <a:schemeClr val="bg2"/>
+            </a:solidFill>
+            <a:prstDash val="solid"/>
+          </a:ln>
+        </p:spPr>
+      </p:sp>
+      <p:sp>
+        <p:nvSpPr>
+          <p:cNvPr id="5" name="Duda 1 pregunta"/>
           <p:cNvSpPr txBox="1"/>
           <p:nvPr/>
         </p:nvSpPr>
         <p:spPr>
           <a:xfrm>
-            <a:off x="731520" y="1417320"/>
-            <a:ext cx="6766560" cy="2194560"/>
-          </a:xfrm>
-          <a:prstGeom prst="rect">
-            <a:avLst/>
-          </a:prstGeom>
-          <a:noFill/>
-          <a:ln/>
-        </p:spPr>
-        <p:txBody>
-          <a:bodyPr wrap="square" lIns="0" tIns="0" rIns="0" bIns="0" rtlCol="0" anchor="ctr"/>
+            <a:off x="1143000" y="2651760"/>
+            <a:ext cx="4358488" cy="1188720"/>
+          </a:xfrm>
+          <a:prstGeom prst="rect">
+            <a:avLst/>
+          </a:prstGeom>
+          <a:noFill/>
+          <a:ln/>
+        </p:spPr>
+        <p:txBody>
+          <a:bodyPr wrap="square" lIns="0" tIns="0" rIns="0" bIns="0" rtlCol="0" anchor="t"/>
           <a:lstStyle/>
           <a:p>
             <a:pPr indent="0" marL="0">
               <a:buNone/>
             </a:pPr>
             <a:r>
-              <a:rPr lang="en-US" sz="4800" b="1" dirty="0">
+              <a:rPr lang="en-US" sz="2600" b="1" dirty="0">
                 <a:solidFill>
                   <a:schemeClr val="tx1"/>
                 </a:solidFill>
@@ -2939,39 +4334,124 @@
                 <a:ea typeface="Montserrat" pitchFamily="34" charset="-122"/>
                 <a:cs typeface="Montserrat" pitchFamily="34" charset="-120"/>
               </a:rPr>
-              <a:t>USD 35 ÷ 30 días</a:t>
-            </a:r>
-            <a:endParaRPr lang="en-US" sz="4800" dirty="0"/>
-          </a:p>
+              <a:t>¿Otro curso más que no voy a usar?</a:t>
+            </a:r>
+            <a:endParaRPr lang="en-US" sz="2600" dirty="0"/>
+          </a:p>
+        </p:txBody>
+      </p:sp>
+      <p:sp>
+        <p:nvSpPr>
+          <p:cNvPr id="6" name="Duda 1 respuesta"/>
+          <p:cNvSpPr txBox="1"/>
+          <p:nvPr/>
+        </p:nvSpPr>
+        <p:spPr>
+          <a:xfrm>
+            <a:off x="1143000" y="3931920"/>
+            <a:ext cx="4358488" cy="1188720"/>
+          </a:xfrm>
+          <a:prstGeom prst="rect">
+            <a:avLst/>
+          </a:prstGeom>
+          <a:noFill/>
+          <a:ln/>
+        </p:spPr>
+        <p:txBody>
+          <a:bodyPr wrap="square" lIns="0" tIns="0" rIns="0" bIns="0" rtlCol="0" anchor="t"/>
+          <a:lstStyle/>
           <a:p>
             <a:pPr indent="0" marL="0">
               <a:buNone/>
             </a:pPr>
             <a:r>
-              <a:rPr lang="en-US" sz="4800" b="1" dirty="0">
-                <a:solidFill>
-                  <a:schemeClr val="accent1"/>
+              <a:rPr lang="en-US" sz="1900" dirty="0">
+                <a:solidFill>
+                  <a:schemeClr val="tx1"/>
+                </a:solidFill>
+              </a:rPr>
+              <a:t>Es un ritmo semanal en vivo, con gente, todos los sábados.</a:t>
+            </a:r>
+            <a:endParaRPr lang="en-US" sz="1900" dirty="0"/>
+          </a:p>
+        </p:txBody>
+      </p:sp>
+      <p:sp>
+        <p:nvSpPr>
+          <p:cNvPr id="7" name="Duda 2"/>
+          <p:cNvSpPr/>
+          <p:nvPr/>
+        </p:nvSpPr>
+        <p:spPr>
+          <a:xfrm>
+            <a:off x="6278728" y="2240280"/>
+            <a:ext cx="5181448" cy="3108960"/>
+          </a:xfrm>
+          <a:prstGeom prst="roundRect">
+            <a:avLst>
+              <a:gd name="adj" fmla="val 5294"/>
+            </a:avLst>
+          </a:prstGeom>
+          <a:solidFill>
+            <a:schemeClr val="bg2"/>
+          </a:solidFill>
+          <a:ln w="12700">
+            <a:solidFill>
+              <a:schemeClr val="bg2"/>
+            </a:solidFill>
+            <a:prstDash val="solid"/>
+          </a:ln>
+        </p:spPr>
+      </p:sp>
+      <p:sp>
+        <p:nvSpPr>
+          <p:cNvPr id="8" name="Duda 2 pregunta"/>
+          <p:cNvSpPr txBox="1"/>
+          <p:nvPr/>
+        </p:nvSpPr>
+        <p:spPr>
+          <a:xfrm>
+            <a:off x="6690208" y="2651760"/>
+            <a:ext cx="4358488" cy="1188720"/>
+          </a:xfrm>
+          <a:prstGeom prst="rect">
+            <a:avLst/>
+          </a:prstGeom>
+          <a:noFill/>
+          <a:ln/>
+        </p:spPr>
+        <p:txBody>
+          <a:bodyPr wrap="square" lIns="0" tIns="0" rIns="0" bIns="0" rtlCol="0" anchor="t"/>
+          <a:lstStyle/>
+          <a:p>
+            <a:pPr indent="0" marL="0">
+              <a:buNone/>
+            </a:pPr>
+            <a:r>
+              <a:rPr lang="en-US" sz="2600" b="1" dirty="0">
+                <a:solidFill>
+                  <a:schemeClr val="tx1"/>
                 </a:solidFill>
                 <a:latin typeface="Montserrat" pitchFamily="34" charset="0"/>
                 <a:ea typeface="Montserrat" pitchFamily="34" charset="-122"/>
                 <a:cs typeface="Montserrat" pitchFamily="34" charset="-120"/>
               </a:rPr>
-              <a:t>= USD 1,17 por día</a:t>
-            </a:r>
-            <a:endParaRPr lang="en-US" sz="4800" dirty="0"/>
-          </a:p>
-        </p:txBody>
-      </p:sp>
-      <p:sp>
-        <p:nvSpPr>
-          <p:cNvPr id="4" name="Remate"/>
+              <a:t>¿Y si no lo puedo sostener?</a:t>
+            </a:r>
+            <a:endParaRPr lang="en-US" sz="2600" dirty="0"/>
+          </a:p>
+        </p:txBody>
+      </p:sp>
+      <p:sp>
+        <p:nvSpPr>
+          <p:cNvPr id="9" name="Duda 2 respuesta"/>
           <p:cNvSpPr txBox="1"/>
           <p:nvPr/>
         </p:nvSpPr>
         <p:spPr>
           <a:xfrm>
-            <a:off x="731520" y="3977640"/>
-            <a:ext cx="6766560" cy="914400"/>
+            <a:off x="6690208" y="3931920"/>
+            <a:ext cx="4358488" cy="1188720"/>
           </a:xfrm>
           <a:prstGeom prst="rect">
             <a:avLst/>
@@ -2987,124 +4467,14 @@
               <a:buNone/>
             </a:pPr>
             <a:r>
-              <a:rPr lang="en-US" sz="3600" b="1" dirty="0">
+              <a:rPr lang="en-US" sz="1900" dirty="0">
                 <a:solidFill>
                   <a:schemeClr val="tx1"/>
                 </a:solidFill>
-                <a:latin typeface="Montserrat" pitchFamily="34" charset="0"/>
-                <a:ea typeface="Montserrat" pitchFamily="34" charset="-122"/>
-                <a:cs typeface="Montserrat" pitchFamily="34" charset="-120"/>
-              </a:rPr>
-              <a:t>Ni siquiera un café por día</a:t>
-            </a:r>
-            <a:endParaRPr lang="en-US" sz="3600" dirty="0"/>
-          </a:p>
-        </p:txBody>
-      </p:sp>
-      <p:sp>
-        <p:nvSpPr>
-          <p:cNvPr id="5" name="Espacio Mini Nico café"/>
-          <p:cNvSpPr/>
-          <p:nvPr/>
-        </p:nvSpPr>
-        <p:spPr>
-          <a:xfrm>
-            <a:off x="8001000" y="685800"/>
-            <a:ext cx="3456432" cy="5074920"/>
-          </a:xfrm>
-          <a:prstGeom prst="roundRect">
-            <a:avLst>
-              <a:gd name="adj" fmla="val 4762"/>
-            </a:avLst>
-          </a:prstGeom>
-          <a:solidFill>
-            <a:schemeClr val="bg2"/>
-          </a:solidFill>
-          <a:ln w="19050">
-            <a:solidFill>
-              <a:schemeClr val="accent3"/>
-            </a:solidFill>
-            <a:prstDash val="dash"/>
-          </a:ln>
-        </p:spPr>
-      </p:sp>
-      <p:sp>
-        <p:nvSpPr>
-          <p:cNvPr id="6" name="Espacio Mini Nico café (texto)"/>
-          <p:cNvSpPr txBox="1"/>
-          <p:nvPr/>
-        </p:nvSpPr>
-        <p:spPr>
-          <a:xfrm>
-            <a:off x="8275320" y="685800"/>
-            <a:ext cx="2907792" cy="5074920"/>
-          </a:xfrm>
-          <a:prstGeom prst="rect">
-            <a:avLst/>
-          </a:prstGeom>
-          <a:noFill/>
-          <a:ln/>
-        </p:spPr>
-        <p:txBody>
-          <a:bodyPr wrap="square" lIns="0" tIns="0" rIns="0" bIns="0" rtlCol="0" anchor="ctr"/>
-          <a:lstStyle/>
-          <a:p>
-            <a:pPr algn="ctr" indent="0" marL="0">
-              <a:buNone/>
-            </a:pPr>
-            <a:r>
-              <a:rPr lang="en-US" sz="1300" b="1" spc="200" kern="0" dirty="0">
-                <a:solidFill>
-                  <a:schemeClr val="accent3"/>
-                </a:solidFill>
-              </a:rPr>
-              <a:t>MINI NICO</a:t>
-            </a:r>
-            <a:endParaRPr lang="en-US" sz="1300" dirty="0"/>
-          </a:p>
-          <a:p>
-            <a:pPr algn="ctr" indent="0" marL="0">
-              <a:buNone/>
-            </a:pPr>
-            <a:r>
-              <a:rPr lang="en-US" sz="1300" b="1" spc="200" kern="0" dirty="0">
-                <a:solidFill>
-                  <a:schemeClr val="accent3"/>
-                </a:solidFill>
-              </a:rPr>
-              <a:t>con un café en la mano</a:t>
-            </a:r>
-            <a:endParaRPr lang="en-US" sz="1300" dirty="0"/>
-          </a:p>
-        </p:txBody>
-      </p:sp>
-      <p:sp>
-        <p:nvSpPr>
-          <p:cNvPr id="8" name="Text 0"/>
-          <p:cNvSpPr/>
-          <p:nvPr>
-            <p:ph idx="101" type="title" hasCustomPrompt="1"/>
-          </p:nvPr>
-        </p:nvSpPr>
-        <p:spPr>
-          <a:xfrm>
-            <a:off x="731520" y="1097280"/>
-            <a:ext cx="10728655" cy="1005840"/>
-          </a:xfrm>
-          <a:prstGeom prst="rect">
-            <a:avLst/>
-          </a:prstGeom>
-          <a:noFill/>
-          <a:ln/>
-        </p:spPr>
-        <p:txBody>
-          <a:bodyPr wrap="square" lIns="0" tIns="0" rIns="0" bIns="0" rtlCol="0" anchor="t"/>
-          <a:lstStyle/>
-          <a:p>
-            <a:pPr algn="l" indent="0" marL="0">
-              <a:buNone/>
-            </a:pPr>
-            <a:endParaRPr lang="en-US" sz="4000" dirty="0"/>
+              </a:rPr>
+              <a:t>Está pensada para semanas que se desarman. Podés desaparecer una semana, dos no.</a:t>
+            </a:r>
+            <a:endParaRPr lang="en-US" sz="1900" dirty="0"/>
           </a:p>
         </p:txBody>
       </p:sp>
@@ -3143,7 +4513,7 @@
         </p:nvSpPr>
         <p:spPr>
           <a:xfrm>
-            <a:off x="731520" y="685800"/>
+            <a:off x="731520" y="1325880"/>
             <a:ext cx="10728655" cy="365760"/>
           </a:xfrm>
           <a:prstGeom prst="rect">
@@ -3156,7 +4526,7 @@
           <a:bodyPr wrap="square" lIns="0" tIns="0" rIns="0" bIns="0" rtlCol="0" anchor="ctr"/>
           <a:lstStyle/>
           <a:p>
-            <a:pPr indent="0" marL="0">
+            <a:pPr algn="ctr" indent="0" marL="0">
               <a:buNone/>
             </a:pPr>
             <a:r>
@@ -3165,7 +4535,7 @@
                   <a:schemeClr val="accent1"/>
                 </a:solidFill>
               </a:rPr>
-              <a:t>ANTES DE DECIDIR</a:t>
+              <a:t>UNA PREGUNTA</a:t>
             </a:r>
             <a:endParaRPr lang="en-US" sz="1400" dirty="0"/>
           </a:p>
@@ -3181,8 +4551,46 @@
         </p:nvSpPr>
         <p:spPr>
           <a:xfrm>
-            <a:off x="731520" y="1097280"/>
-            <a:ext cx="10728655" cy="1005840"/>
+            <a:off x="1280160" y="1828800"/>
+            <a:ext cx="9631375" cy="2331720"/>
+          </a:xfrm>
+          <a:prstGeom prst="rect">
+            <a:avLst/>
+          </a:prstGeom>
+          <a:noFill/>
+          <a:ln/>
+        </p:spPr>
+        <p:txBody>
+          <a:bodyPr wrap="square" lIns="0" tIns="0" rIns="0" bIns="0" rtlCol="0" anchor="ctr"/>
+          <a:lstStyle/>
+          <a:p>
+            <a:pPr algn="ctr" indent="0" marL="0">
+              <a:buNone/>
+            </a:pPr>
+            <a:r>
+              <a:rPr lang="en-US" sz="4800" b="1" dirty="0">
+                <a:solidFill>
+                  <a:schemeClr val="bg1"/>
+                </a:solidFill>
+              </a:rPr>
+              <a:t>¿Cuántas suscripciones pagás todos los meses?</a:t>
+            </a:r>
+            <a:endParaRPr lang="en-US" sz="4800" dirty="0"/>
+          </a:p>
+        </p:txBody>
+      </p:sp>
+      <p:sp>
+        <p:nvSpPr>
+          <p:cNvPr id="4" name="Text 0"/>
+          <p:cNvSpPr/>
+          <p:nvPr>
+            <p:ph idx="102" type="body" hasCustomPrompt="1"/>
+          </p:nvPr>
+        </p:nvSpPr>
+        <p:spPr>
+          <a:xfrm>
+            <a:off x="1645920" y="4297680"/>
+            <a:ext cx="8899855" cy="822960"/>
           </a:xfrm>
           <a:prstGeom prst="rect">
             <a:avLst/>
@@ -3194,43 +4602,43 @@
           <a:bodyPr wrap="square" lIns="0" tIns="0" rIns="0" bIns="0" rtlCol="0" anchor="t"/>
           <a:lstStyle/>
           <a:p>
-            <a:pPr algn="l" indent="0" marL="0">
-              <a:buNone/>
-            </a:pPr>
-            <a:r>
-              <a:rPr lang="en-US" sz="4000" b="1" dirty="0">
-                <a:solidFill>
-                  <a:schemeClr val="tx1"/>
-                </a:solidFill>
-              </a:rPr>
-              <a:t>Las dos dudas de siempre</a:t>
-            </a:r>
-            <a:endParaRPr lang="en-US" sz="4000" dirty="0"/>
-          </a:p>
-        </p:txBody>
-      </p:sp>
-      <p:sp>
-        <p:nvSpPr>
-          <p:cNvPr id="4" name="Duda 1"/>
-          <p:cNvSpPr/>
-          <p:nvPr/>
-        </p:nvSpPr>
-        <p:spPr>
-          <a:xfrm>
-            <a:off x="731520" y="2240280"/>
-            <a:ext cx="5181448" cy="3108960"/>
+            <a:pPr algn="ctr" indent="0" marL="0">
+              <a:buNone/>
+            </a:pPr>
+            <a:r>
+              <a:rPr lang="en-US" sz="2200" dirty="0">
+                <a:solidFill>
+                  <a:schemeClr val="accent2"/>
+                </a:solidFill>
+              </a:rPr>
+              <a:t>¿Y cuántas te suman a tu bienestar o a tus objetivos?</a:t>
+            </a:r>
+            <a:endParaRPr lang="en-US" sz="2200" dirty="0"/>
+          </a:p>
+        </p:txBody>
+      </p:sp>
+      <p:sp>
+        <p:nvSpPr>
+          <p:cNvPr id="5" name="Suscripción 1"/>
+          <p:cNvSpPr/>
+          <p:nvPr/>
+        </p:nvSpPr>
+        <p:spPr>
+          <a:xfrm>
+            <a:off x="1066648" y="5257800"/>
+            <a:ext cx="1709928" cy="502920"/>
           </a:xfrm>
           <a:prstGeom prst="roundRect">
             <a:avLst>
-              <a:gd name="adj" fmla="val 5294"/>
+              <a:gd name="adj" fmla="val 50000"/>
             </a:avLst>
           </a:prstGeom>
           <a:solidFill>
-            <a:schemeClr val="bg2"/>
+            <a:schemeClr val="tx2"/>
           </a:solidFill>
           <a:ln w="12700">
             <a:solidFill>
-              <a:schemeClr val="bg2"/>
+              <a:schemeClr val="tx2"/>
             </a:solidFill>
             <a:prstDash val="solid"/>
           </a:ln>
@@ -3238,101 +4646,62 @@
       </p:sp>
       <p:sp>
         <p:nvSpPr>
-          <p:cNvPr id="5" name="Duda 1 pregunta"/>
+          <p:cNvPr id="6" name="Suscripción 1 (texto)"/>
           <p:cNvSpPr txBox="1"/>
           <p:nvPr/>
         </p:nvSpPr>
         <p:spPr>
           <a:xfrm>
-            <a:off x="1143000" y="2651760"/>
-            <a:ext cx="4358488" cy="1188720"/>
-          </a:xfrm>
-          <a:prstGeom prst="rect">
-            <a:avLst/>
-          </a:prstGeom>
-          <a:noFill/>
-          <a:ln/>
-        </p:spPr>
-        <p:txBody>
-          <a:bodyPr wrap="square" lIns="0" tIns="0" rIns="0" bIns="0" rtlCol="0" anchor="t"/>
-          <a:lstStyle/>
-          <a:p>
-            <a:pPr indent="0" marL="0">
-              <a:buNone/>
-            </a:pPr>
-            <a:r>
-              <a:rPr lang="en-US" sz="2600" b="1" dirty="0">
-                <a:solidFill>
-                  <a:schemeClr val="tx1"/>
-                </a:solidFill>
-                <a:latin typeface="Montserrat" pitchFamily="34" charset="0"/>
-                <a:ea typeface="Montserrat" pitchFamily="34" charset="-122"/>
-                <a:cs typeface="Montserrat" pitchFamily="34" charset="-120"/>
-              </a:rPr>
-              <a:t>¿Otro curso más que voy a dejar a la mitad?</a:t>
-            </a:r>
-            <a:endParaRPr lang="en-US" sz="2600" dirty="0"/>
-          </a:p>
-        </p:txBody>
-      </p:sp>
-      <p:sp>
-        <p:nvSpPr>
-          <p:cNvPr id="6" name="Duda 1 respuesta"/>
-          <p:cNvSpPr txBox="1"/>
-          <p:nvPr/>
-        </p:nvSpPr>
-        <p:spPr>
-          <a:xfrm>
-            <a:off x="1143000" y="3931920"/>
-            <a:ext cx="4358488" cy="1188720"/>
-          </a:xfrm>
-          <a:prstGeom prst="rect">
-            <a:avLst/>
-          </a:prstGeom>
-          <a:noFill/>
-          <a:ln/>
-        </p:spPr>
-        <p:txBody>
-          <a:bodyPr wrap="square" lIns="0" tIns="0" rIns="0" bIns="0" rtlCol="0" anchor="t"/>
-          <a:lstStyle/>
-          <a:p>
-            <a:pPr indent="0" marL="0">
-              <a:buNone/>
-            </a:pPr>
-            <a:r>
-              <a:rPr lang="en-US" sz="1900" dirty="0">
-                <a:solidFill>
-                  <a:schemeClr val="tx1"/>
-                </a:solidFill>
-              </a:rPr>
-              <a:t>Todo pasa en vivo: el sábado planificás con otros y de lunes a viernes avanzás en co-works.</a:t>
-            </a:r>
-            <a:endParaRPr lang="en-US" sz="1900" dirty="0"/>
-          </a:p>
-        </p:txBody>
-      </p:sp>
-      <p:sp>
-        <p:nvSpPr>
-          <p:cNvPr id="7" name="Duda 2"/>
-          <p:cNvSpPr/>
-          <p:nvPr/>
-        </p:nvSpPr>
-        <p:spPr>
-          <a:xfrm>
-            <a:off x="6278728" y="2240280"/>
-            <a:ext cx="5181448" cy="3108960"/>
+            <a:off x="1066648" y="5257800"/>
+            <a:ext cx="1709928" cy="502920"/>
+          </a:xfrm>
+          <a:prstGeom prst="rect">
+            <a:avLst/>
+          </a:prstGeom>
+          <a:noFill/>
+          <a:ln/>
+        </p:spPr>
+        <p:txBody>
+          <a:bodyPr wrap="square" lIns="0" tIns="0" rIns="0" bIns="0" rtlCol="0" anchor="ctr"/>
+          <a:lstStyle/>
+          <a:p>
+            <a:pPr algn="ctr" indent="0" marL="0">
+              <a:buNone/>
+            </a:pPr>
+            <a:r>
+              <a:rPr lang="en-US" sz="1400" b="1" spc="200" kern="0" dirty="0">
+                <a:solidFill>
+                  <a:schemeClr val="accent2"/>
+                </a:solidFill>
+              </a:rPr>
+              <a:t>Streaming</a:t>
+            </a:r>
+            <a:endParaRPr lang="en-US" sz="1400" dirty="0"/>
+          </a:p>
+        </p:txBody>
+      </p:sp>
+      <p:sp>
+        <p:nvSpPr>
+          <p:cNvPr id="7" name="Suscripción 2"/>
+          <p:cNvSpPr/>
+          <p:nvPr/>
+        </p:nvSpPr>
+        <p:spPr>
+          <a:xfrm>
+            <a:off x="3005176" y="5257800"/>
+            <a:ext cx="1353312" cy="502920"/>
           </a:xfrm>
           <a:prstGeom prst="roundRect">
             <a:avLst>
-              <a:gd name="adj" fmla="val 5294"/>
+              <a:gd name="adj" fmla="val 50000"/>
             </a:avLst>
           </a:prstGeom>
           <a:solidFill>
-            <a:schemeClr val="bg2"/>
+            <a:schemeClr val="tx2"/>
           </a:solidFill>
           <a:ln w="12700">
             <a:solidFill>
-              <a:schemeClr val="bg2"/>
+              <a:schemeClr val="tx2"/>
             </a:solidFill>
             <a:prstDash val="solid"/>
           </a:ln>
@@ -3340,76 +4709,226 @@
       </p:sp>
       <p:sp>
         <p:nvSpPr>
-          <p:cNvPr id="8" name="Duda 2 pregunta"/>
+          <p:cNvPr id="8" name="Suscripción 2 (texto)"/>
           <p:cNvSpPr txBox="1"/>
           <p:nvPr/>
         </p:nvSpPr>
         <p:spPr>
           <a:xfrm>
-            <a:off x="6690208" y="2651760"/>
-            <a:ext cx="4358488" cy="1188720"/>
-          </a:xfrm>
-          <a:prstGeom prst="rect">
-            <a:avLst/>
-          </a:prstGeom>
-          <a:noFill/>
-          <a:ln/>
-        </p:spPr>
-        <p:txBody>
-          <a:bodyPr wrap="square" lIns="0" tIns="0" rIns="0" bIns="0" rtlCol="0" anchor="t"/>
-          <a:lstStyle/>
-          <a:p>
-            <a:pPr indent="0" marL="0">
-              <a:buNone/>
-            </a:pPr>
-            <a:r>
-              <a:rPr lang="en-US" sz="2600" b="1" dirty="0">
-                <a:solidFill>
-                  <a:schemeClr val="tx1"/>
-                </a:solidFill>
-                <a:latin typeface="Montserrat" pitchFamily="34" charset="0"/>
-                <a:ea typeface="Montserrat" pitchFamily="34" charset="-122"/>
-                <a:cs typeface="Montserrat" pitchFamily="34" charset="-120"/>
-              </a:rPr>
-              <a:t>¿Y si una semana no puedo?</a:t>
-            </a:r>
-            <a:endParaRPr lang="en-US" sz="2600" dirty="0"/>
-          </a:p>
-        </p:txBody>
-      </p:sp>
-      <p:sp>
-        <p:nvSpPr>
-          <p:cNvPr id="9" name="Duda 2 respuesta"/>
+            <a:off x="3005176" y="5257800"/>
+            <a:ext cx="1353312" cy="502920"/>
+          </a:xfrm>
+          <a:prstGeom prst="rect">
+            <a:avLst/>
+          </a:prstGeom>
+          <a:noFill/>
+          <a:ln/>
+        </p:spPr>
+        <p:txBody>
+          <a:bodyPr wrap="square" lIns="0" tIns="0" rIns="0" bIns="0" rtlCol="0" anchor="ctr"/>
+          <a:lstStyle/>
+          <a:p>
+            <a:pPr algn="ctr" indent="0" marL="0">
+              <a:buNone/>
+            </a:pPr>
+            <a:r>
+              <a:rPr lang="en-US" sz="1400" b="1" spc="200" kern="0" dirty="0">
+                <a:solidFill>
+                  <a:schemeClr val="accent2"/>
+                </a:solidFill>
+              </a:rPr>
+              <a:t>Música</a:t>
+            </a:r>
+            <a:endParaRPr lang="en-US" sz="1400" dirty="0"/>
+          </a:p>
+        </p:txBody>
+      </p:sp>
+      <p:sp>
+        <p:nvSpPr>
+          <p:cNvPr id="9" name="Suscripción 3"/>
+          <p:cNvSpPr/>
+          <p:nvPr/>
+        </p:nvSpPr>
+        <p:spPr>
+          <a:xfrm>
+            <a:off x="4587088" y="5257800"/>
+            <a:ext cx="2660904" cy="502920"/>
+          </a:xfrm>
+          <a:prstGeom prst="roundRect">
+            <a:avLst>
+              <a:gd name="adj" fmla="val 50000"/>
+            </a:avLst>
+          </a:prstGeom>
+          <a:solidFill>
+            <a:schemeClr val="tx2"/>
+          </a:solidFill>
+          <a:ln w="12700">
+            <a:solidFill>
+              <a:schemeClr val="tx2"/>
+            </a:solidFill>
+            <a:prstDash val="solid"/>
+          </a:ln>
+        </p:spPr>
+      </p:sp>
+      <p:sp>
+        <p:nvSpPr>
+          <p:cNvPr id="10" name="Suscripción 3 (texto)"/>
           <p:cNvSpPr txBox="1"/>
           <p:nvPr/>
         </p:nvSpPr>
         <p:spPr>
           <a:xfrm>
-            <a:off x="6690208" y="3931920"/>
-            <a:ext cx="4358488" cy="1188720"/>
-          </a:xfrm>
-          <a:prstGeom prst="rect">
-            <a:avLst/>
-          </a:prstGeom>
-          <a:noFill/>
-          <a:ln/>
-        </p:spPr>
-        <p:txBody>
-          <a:bodyPr wrap="square" lIns="0" tIns="0" rIns="0" bIns="0" rtlCol="0" anchor="t"/>
-          <a:lstStyle/>
-          <a:p>
-            <a:pPr indent="0" marL="0">
-              <a:buNone/>
-            </a:pPr>
-            <a:r>
-              <a:rPr lang="en-US" sz="1900" dirty="0">
-                <a:solidFill>
-                  <a:schemeClr val="tx1"/>
-                </a:solidFill>
-              </a:rPr>
-              <a:t>El sábado planificamos de nuevo. Y si ya no te sirve, cancelás cuando quieras.</a:t>
-            </a:r>
-            <a:endParaRPr lang="en-US" sz="1900" dirty="0"/>
+            <a:off x="4587088" y="5257800"/>
+            <a:ext cx="2660904" cy="502920"/>
+          </a:xfrm>
+          <a:prstGeom prst="rect">
+            <a:avLst/>
+          </a:prstGeom>
+          <a:noFill/>
+          <a:ln/>
+        </p:spPr>
+        <p:txBody>
+          <a:bodyPr wrap="square" lIns="0" tIns="0" rIns="0" bIns="0" rtlCol="0" anchor="ctr"/>
+          <a:lstStyle/>
+          <a:p>
+            <a:pPr algn="ctr" indent="0" marL="0">
+              <a:buNone/>
+            </a:pPr>
+            <a:r>
+              <a:rPr lang="en-US" sz="1400" b="1" spc="200" kern="0" dirty="0">
+                <a:solidFill>
+                  <a:schemeClr val="accent2"/>
+                </a:solidFill>
+              </a:rPr>
+              <a:t>Apps que no abrís</a:t>
+            </a:r>
+            <a:endParaRPr lang="en-US" sz="1400" dirty="0"/>
+          </a:p>
+        </p:txBody>
+      </p:sp>
+      <p:sp>
+        <p:nvSpPr>
+          <p:cNvPr id="11" name="Suscripción 4"/>
+          <p:cNvSpPr/>
+          <p:nvPr/>
+        </p:nvSpPr>
+        <p:spPr>
+          <a:xfrm>
+            <a:off x="7476592" y="5257800"/>
+            <a:ext cx="1472184" cy="502920"/>
+          </a:xfrm>
+          <a:prstGeom prst="roundRect">
+            <a:avLst>
+              <a:gd name="adj" fmla="val 50000"/>
+            </a:avLst>
+          </a:prstGeom>
+          <a:solidFill>
+            <a:schemeClr val="tx2"/>
+          </a:solidFill>
+          <a:ln w="12700">
+            <a:solidFill>
+              <a:schemeClr val="tx2"/>
+            </a:solidFill>
+            <a:prstDash val="solid"/>
+          </a:ln>
+        </p:spPr>
+      </p:sp>
+      <p:sp>
+        <p:nvSpPr>
+          <p:cNvPr id="12" name="Suscripción 4 (texto)"/>
+          <p:cNvSpPr txBox="1"/>
+          <p:nvPr/>
+        </p:nvSpPr>
+        <p:spPr>
+          <a:xfrm>
+            <a:off x="7476592" y="5257800"/>
+            <a:ext cx="1472184" cy="502920"/>
+          </a:xfrm>
+          <a:prstGeom prst="rect">
+            <a:avLst/>
+          </a:prstGeom>
+          <a:noFill/>
+          <a:ln/>
+        </p:spPr>
+        <p:txBody>
+          <a:bodyPr wrap="square" lIns="0" tIns="0" rIns="0" bIns="0" rtlCol="0" anchor="ctr"/>
+          <a:lstStyle/>
+          <a:p>
+            <a:pPr algn="ctr" indent="0" marL="0">
+              <a:buNone/>
+            </a:pPr>
+            <a:r>
+              <a:rPr lang="en-US" sz="1400" b="1" spc="200" kern="0" dirty="0">
+                <a:solidFill>
+                  <a:schemeClr val="accent2"/>
+                </a:solidFill>
+              </a:rPr>
+              <a:t>La nube</a:t>
+            </a:r>
+            <a:endParaRPr lang="en-US" sz="1400" dirty="0"/>
+          </a:p>
+        </p:txBody>
+      </p:sp>
+      <p:sp>
+        <p:nvSpPr>
+          <p:cNvPr id="13" name="Suscripción 5"/>
+          <p:cNvSpPr/>
+          <p:nvPr/>
+        </p:nvSpPr>
+        <p:spPr>
+          <a:xfrm>
+            <a:off x="9177376" y="5257800"/>
+            <a:ext cx="1947672" cy="502920"/>
+          </a:xfrm>
+          <a:prstGeom prst="roundRect">
+            <a:avLst>
+              <a:gd name="adj" fmla="val 50000"/>
+            </a:avLst>
+          </a:prstGeom>
+          <a:solidFill>
+            <a:schemeClr val="tx2"/>
+          </a:solidFill>
+          <a:ln w="12700">
+            <a:solidFill>
+              <a:schemeClr val="tx2"/>
+            </a:solidFill>
+            <a:prstDash val="solid"/>
+          </a:ln>
+        </p:spPr>
+      </p:sp>
+      <p:sp>
+        <p:nvSpPr>
+          <p:cNvPr id="14" name="Suscripción 5 (texto)"/>
+          <p:cNvSpPr txBox="1"/>
+          <p:nvPr/>
+        </p:nvSpPr>
+        <p:spPr>
+          <a:xfrm>
+            <a:off x="9177376" y="5257800"/>
+            <a:ext cx="1947672" cy="502920"/>
+          </a:xfrm>
+          <a:prstGeom prst="rect">
+            <a:avLst/>
+          </a:prstGeom>
+          <a:noFill/>
+          <a:ln/>
+        </p:spPr>
+        <p:txBody>
+          <a:bodyPr wrap="square" lIns="0" tIns="0" rIns="0" bIns="0" rtlCol="0" anchor="ctr"/>
+          <a:lstStyle/>
+          <a:p>
+            <a:pPr algn="ctr" indent="0" marL="0">
+              <a:buNone/>
+            </a:pPr>
+            <a:r>
+              <a:rPr lang="en-US" sz="1400" b="1" spc="200" kern="0" dirty="0">
+                <a:solidFill>
+                  <a:schemeClr val="accent2"/>
+                </a:solidFill>
+              </a:rPr>
+              <a:t>El gimnasio</a:t>
+            </a:r>
+            <a:endParaRPr lang="en-US" sz="1400" dirty="0"/>
           </a:p>
         </p:txBody>
       </p:sp>
@@ -3449,7 +4968,7 @@
         <p:spPr>
           <a:xfrm>
             <a:off x="731520" y="685800"/>
-            <a:ext cx="4114800" cy="365760"/>
+            <a:ext cx="10728655" cy="365760"/>
           </a:xfrm>
           <a:prstGeom prst="rect">
             <a:avLst/>
@@ -3470,7 +4989,7 @@
                   <a:schemeClr val="accent1"/>
                 </a:solidFill>
               </a:rPr>
-              <a:t>PRIMERAS 20 PERSONAS</a:t>
+              <a:t>LA BALANZA</a:t>
             </a:r>
             <a:endParaRPr lang="en-US" sz="1400" dirty="0"/>
           </a:p>
@@ -3487,7 +5006,7 @@
         <p:spPr>
           <a:xfrm>
             <a:off x="731520" y="1097280"/>
-            <a:ext cx="4114800" cy="2743200"/>
+            <a:ext cx="10728655" cy="1005840"/>
           </a:xfrm>
           <a:prstGeom prst="rect">
             <a:avLst/>
@@ -3503,147 +5022,37 @@
               <a:buNone/>
             </a:pPr>
             <a:r>
-              <a:rPr lang="en-US" sz="3600" b="1" dirty="0">
-                <a:solidFill>
-                  <a:schemeClr val="bg1"/>
-                </a:solidFill>
-              </a:rPr>
-              <a:t>Escaneá y entrá ahora</a:t>
-            </a:r>
-            <a:endParaRPr lang="en-US" sz="3600" dirty="0"/>
-          </a:p>
-        </p:txBody>
-      </p:sp>
-      <p:sp>
-        <p:nvSpPr>
-          <p:cNvPr id="4" name="Pedido"/>
-          <p:cNvSpPr txBox="1"/>
-          <p:nvPr/>
-        </p:nvSpPr>
-        <p:spPr>
-          <a:xfrm>
-            <a:off x="731520" y="2331720"/>
-            <a:ext cx="4114800" cy="914400"/>
-          </a:xfrm>
-          <a:prstGeom prst="rect">
-            <a:avLst/>
-          </a:prstGeom>
-          <a:noFill/>
-          <a:ln/>
-        </p:spPr>
-        <p:txBody>
-          <a:bodyPr wrap="square" lIns="0" tIns="0" rIns="0" bIns="0" rtlCol="0" anchor="t"/>
-          <a:lstStyle/>
-          <a:p>
-            <a:pPr indent="0" marL="0">
-              <a:buNone/>
-            </a:pPr>
-            <a:r>
-              <a:rPr lang="en-US" sz="2200" b="1" dirty="0">
-                <a:solidFill>
-                  <a:schemeClr val="bg1"/>
-                </a:solidFill>
-              </a:rPr>
-              <a:t>¿Ya entraste? Escribí ENTRÉ en el chat.</a:t>
-            </a:r>
-            <a:endParaRPr lang="en-US" sz="2200" dirty="0"/>
-          </a:p>
-        </p:txBody>
-      </p:sp>
-      <p:sp>
-        <p:nvSpPr>
-          <p:cNvPr id="5" name="Ayuda"/>
-          <p:cNvSpPr txBox="1"/>
-          <p:nvPr/>
-        </p:nvSpPr>
-        <p:spPr>
-          <a:xfrm>
-            <a:off x="731520" y="3383280"/>
-            <a:ext cx="4114800" cy="914400"/>
-          </a:xfrm>
-          <a:prstGeom prst="rect">
-            <a:avLst/>
-          </a:prstGeom>
-          <a:noFill/>
-          <a:ln/>
-        </p:spPr>
-        <p:txBody>
-          <a:bodyPr wrap="square" lIns="0" tIns="0" rIns="0" bIns="0" rtlCol="0" anchor="t"/>
-          <a:lstStyle/>
-          <a:p>
-            <a:pPr indent="0" marL="0">
-              <a:buNone/>
-            </a:pPr>
-            <a:r>
-              <a:rPr lang="en-US" sz="1800" dirty="0">
-                <a:solidFill>
-                  <a:schemeClr val="accent2"/>
-                </a:solidFill>
-              </a:rPr>
-              <a:t>¿Problema con el pago? Escribilo en el chat y te ayudamos.</a:t>
-            </a:r>
-            <a:endParaRPr lang="en-US" sz="1800" dirty="0"/>
-          </a:p>
-        </p:txBody>
-      </p:sp>
-      <p:sp>
-        <p:nvSpPr>
-          <p:cNvPr id="6" name="Links"/>
-          <p:cNvSpPr txBox="1"/>
-          <p:nvPr/>
-        </p:nvSpPr>
-        <p:spPr>
-          <a:xfrm>
-            <a:off x="731520" y="4434840"/>
-            <a:ext cx="4114800" cy="457200"/>
-          </a:xfrm>
-          <a:prstGeom prst="rect">
-            <a:avLst/>
-          </a:prstGeom>
-          <a:noFill/>
-          <a:ln/>
-        </p:spPr>
-        <p:txBody>
-          <a:bodyPr wrap="square" lIns="0" tIns="0" rIns="0" bIns="0" rtlCol="0" anchor="t"/>
-          <a:lstStyle/>
-          <a:p>
-            <a:pPr indent="0" marL="0">
-              <a:buNone/>
-            </a:pPr>
-            <a:r>
-              <a:rPr lang="en-US" sz="1800" dirty="0">
-                <a:solidFill>
-                  <a:schemeClr val="accent2"/>
-                </a:solidFill>
-              </a:rPr>
-              <a:t>Los dos links también están en el chat.</a:t>
-            </a:r>
-            <a:endParaRPr lang="en-US" sz="1800" dirty="0"/>
-          </a:p>
-        </p:txBody>
-      </p:sp>
-      <p:sp>
-        <p:nvSpPr>
-          <p:cNvPr id="7" name="Pago en pesos"/>
-          <p:cNvSpPr/>
-          <p:nvPr/>
-        </p:nvSpPr>
-        <p:spPr>
-          <a:xfrm>
-            <a:off x="5148072" y="868680"/>
-            <a:ext cx="3017520" cy="3749040"/>
-          </a:xfrm>
-          <a:prstGeom prst="roundRect">
-            <a:avLst>
-              <a:gd name="adj" fmla="val 5455"/>
-            </a:avLst>
+              <a:rPr lang="en-US" sz="4000" b="1" dirty="0">
+                <a:solidFill>
+                  <a:schemeClr val="tx1"/>
+                </a:solidFill>
+              </a:rPr>
+              <a:t>¿Qué pesa más?</a:t>
+            </a:r>
+            <a:endParaRPr lang="en-US" sz="4000" dirty="0"/>
+          </a:p>
+        </p:txBody>
+      </p:sp>
+      <p:sp>
+        <p:nvSpPr>
+          <p:cNvPr id="4" name="Balanza poste"/>
+          <p:cNvSpPr/>
+          <p:nvPr/>
+        </p:nvSpPr>
+        <p:spPr>
+          <a:xfrm>
+            <a:off x="6031840" y="2514600"/>
+            <a:ext cx="128016" cy="2926080"/>
+          </a:xfrm>
+          <a:prstGeom prst="rect">
+            <a:avLst/>
           </a:prstGeom>
           <a:solidFill>
-            <a:schemeClr val="bg1"/>
+            <a:schemeClr val="tx1"/>
           </a:solidFill>
           <a:ln w="12700">
             <a:solidFill>
-              <a:schemeClr val="bg1"/>
+              <a:schemeClr val="tx1"/>
             </a:solidFill>
             <a:prstDash val="solid"/>
           </a:ln>
@@ -3651,30 +5060,159 @@
       </p:sp>
       <p:sp>
         <p:nvSpPr>
-          <p:cNvPr id="8" name="Pago en pesos título"/>
+          <p:cNvPr id="5" name="Balanza base"/>
+          <p:cNvSpPr/>
+          <p:nvPr/>
+        </p:nvSpPr>
+        <p:spPr>
+          <a:xfrm>
+            <a:off x="5181448" y="5394960"/>
+            <a:ext cx="1828800" cy="182880"/>
+          </a:xfrm>
+          <a:prstGeom prst="roundRect">
+            <a:avLst>
+              <a:gd name="adj" fmla="val 50000"/>
+            </a:avLst>
+          </a:prstGeom>
+          <a:solidFill>
+            <a:schemeClr val="tx1"/>
+          </a:solidFill>
+          <a:ln w="12700">
+            <a:solidFill>
+              <a:schemeClr val="tx1"/>
+            </a:solidFill>
+            <a:prstDash val="solid"/>
+          </a:ln>
+        </p:spPr>
+      </p:sp>
+      <p:sp>
+        <p:nvSpPr>
+          <p:cNvPr id="6" name="Balanza brazo"/>
+          <p:cNvSpPr/>
+          <p:nvPr/>
+        </p:nvSpPr>
+        <p:spPr>
+          <a:xfrm rot="300000">
+            <a:off x="2438248" y="2459736"/>
+            <a:ext cx="7315200" cy="109728"/>
+          </a:xfrm>
+          <a:prstGeom prst="roundRect">
+            <a:avLst>
+              <a:gd name="adj" fmla="val 50000"/>
+            </a:avLst>
+          </a:prstGeom>
+          <a:solidFill>
+            <a:schemeClr val="tx1"/>
+          </a:solidFill>
+          <a:ln w="12700">
+            <a:solidFill>
+              <a:schemeClr val="tx1"/>
+            </a:solidFill>
+            <a:prstDash val="solid"/>
+          </a:ln>
+        </p:spPr>
+      </p:sp>
+      <p:sp>
+        <p:nvSpPr>
+          <p:cNvPr id="7" name="Balanza eje"/>
+          <p:cNvSpPr/>
+          <p:nvPr/>
+        </p:nvSpPr>
+        <p:spPr>
+          <a:xfrm>
+            <a:off x="5940400" y="2359152"/>
+            <a:ext cx="310896" cy="310896"/>
+          </a:xfrm>
+          <a:prstGeom prst="ellipse">
+            <a:avLst/>
+          </a:prstGeom>
+          <a:solidFill>
+            <a:schemeClr val="accent1"/>
+          </a:solidFill>
+          <a:ln w="12700">
+            <a:solidFill>
+              <a:schemeClr val="accent1"/>
+            </a:solidFill>
+            <a:prstDash val="solid"/>
+          </a:ln>
+        </p:spPr>
+      </p:sp>
+      <p:sp>
+        <p:nvSpPr>
+          <p:cNvPr id="8" name="Balanza hilo 1"/>
+          <p:cNvSpPr/>
+          <p:nvPr/>
+        </p:nvSpPr>
+        <p:spPr>
+          <a:xfrm>
+            <a:off x="2452166" y="2195819"/>
+            <a:ext cx="0" cy="320040"/>
+          </a:xfrm>
+          <a:prstGeom prst="line">
+            <a:avLst/>
+          </a:prstGeom>
+          <a:noFill/>
+          <a:ln w="19050">
+            <a:solidFill>
+              <a:schemeClr val="tx1"/>
+            </a:solidFill>
+            <a:prstDash val="solid"/>
+          </a:ln>
+        </p:spPr>
+      </p:sp>
+      <p:sp>
+        <p:nvSpPr>
+          <p:cNvPr id="9" name="Platillo 1"/>
+          <p:cNvSpPr/>
+          <p:nvPr/>
+        </p:nvSpPr>
+        <p:spPr>
+          <a:xfrm>
+            <a:off x="806246" y="2515859"/>
+            <a:ext cx="3291840" cy="1417320"/>
+          </a:xfrm>
+          <a:prstGeom prst="roundRect">
+            <a:avLst>
+              <a:gd name="adj" fmla="val 11613"/>
+            </a:avLst>
+          </a:prstGeom>
+          <a:solidFill>
+            <a:schemeClr val="bg2"/>
+          </a:solidFill>
+          <a:ln w="12700">
+            <a:solidFill>
+              <a:schemeClr val="bg2"/>
+            </a:solidFill>
+            <a:prstDash val="solid"/>
+          </a:ln>
+        </p:spPr>
+      </p:sp>
+      <p:sp>
+        <p:nvSpPr>
+          <p:cNvPr id="10" name="Platillo 1 texto"/>
           <p:cNvSpPr txBox="1"/>
           <p:nvPr/>
         </p:nvSpPr>
         <p:spPr>
           <a:xfrm>
-            <a:off x="5148072" y="1069848"/>
-            <a:ext cx="3017520" cy="365760"/>
-          </a:xfrm>
-          <a:prstGeom prst="rect">
-            <a:avLst/>
-          </a:prstGeom>
-          <a:noFill/>
-          <a:ln/>
-        </p:spPr>
-        <p:txBody>
-          <a:bodyPr wrap="square" lIns="0" tIns="0" rIns="0" bIns="0" rtlCol="0" anchor="t"/>
+            <a:off x="1080566" y="2515859"/>
+            <a:ext cx="2743200" cy="1417320"/>
+          </a:xfrm>
+          <a:prstGeom prst="rect">
+            <a:avLst/>
+          </a:prstGeom>
+          <a:noFill/>
+          <a:ln/>
+        </p:spPr>
+        <p:txBody>
+          <a:bodyPr wrap="square" lIns="0" tIns="0" rIns="0" bIns="0" rtlCol="0" anchor="ctr"/>
           <a:lstStyle/>
           <a:p>
             <a:pPr algn="ctr" indent="0" marL="0">
               <a:buNone/>
             </a:pPr>
             <a:r>
-              <a:rPr lang="en-US" sz="2000" b="1" dirty="0">
+              <a:rPr lang="en-US" sz="1800" b="1" dirty="0">
                 <a:solidFill>
                   <a:schemeClr val="tx1"/>
                 </a:solidFill>
@@ -3682,94 +5220,57 @@
                 <a:ea typeface="Montserrat" pitchFamily="34" charset="-122"/>
                 <a:cs typeface="Montserrat" pitchFamily="34" charset="-120"/>
               </a:rPr>
-              <a:t>EN PESOS</a:t>
-            </a:r>
-            <a:endParaRPr lang="en-US" sz="2000" dirty="0"/>
-          </a:p>
-        </p:txBody>
-      </p:sp>
-      <p:sp>
-        <p:nvSpPr>
-          <p:cNvPr id="9" name="Pago en pesos medio"/>
-          <p:cNvSpPr txBox="1"/>
-          <p:nvPr/>
-        </p:nvSpPr>
-        <p:spPr>
-          <a:xfrm>
-            <a:off x="5148072" y="1435608"/>
-            <a:ext cx="3017520" cy="274320"/>
-          </a:xfrm>
-          <a:prstGeom prst="rect">
-            <a:avLst/>
-          </a:prstGeom>
-          <a:noFill/>
-          <a:ln/>
-        </p:spPr>
-        <p:txBody>
-          <a:bodyPr wrap="square" lIns="0" tIns="0" rIns="0" bIns="0" rtlCol="0" anchor="t"/>
-          <a:lstStyle/>
-          <a:p>
-            <a:pPr algn="ctr" indent="0" marL="0">
-              <a:buNone/>
-            </a:pPr>
-            <a:r>
-              <a:rPr lang="en-US" sz="1400" dirty="0">
-                <a:solidFill>
-                  <a:schemeClr val="accent3"/>
-                </a:solidFill>
-              </a:rPr>
-              <a:t>Mercado Pago</a:t>
-            </a:r>
-            <a:endParaRPr lang="en-US" sz="1400" dirty="0"/>
-          </a:p>
-        </p:txBody>
-      </p:sp>
-      <p:pic>
-        <p:nvPicPr>
-          <p:cNvPr id="10" name="Pago en pesos QR" descr="QR EN PESOS">    </p:cNvPr>
-          <p:cNvPicPr>
-            <a:picLocks noChangeAspect="1"/>
-          </p:cNvPicPr>
-          <p:nvPr/>
-        </p:nvPicPr>
-        <p:blipFill>
-          <a:blip r:embed="rId1"/>
-          <a:stretch>
-            <a:fillRect/>
-          </a:stretch>
-        </p:blipFill>
-        <p:spPr>
-          <a:xfrm>
-            <a:off x="5376672" y="1828800"/>
-            <a:ext cx="2560320" cy="2560320"/>
-          </a:xfrm>
-          <a:prstGeom prst="rect">
-            <a:avLst/>
-          </a:prstGeom>
-        </p:spPr>
-      </p:pic>
-      <p:sp>
-        <p:nvSpPr>
-          <p:cNvPr id="11" name="Pago en dólares"/>
-          <p:cNvSpPr/>
-          <p:nvPr/>
-        </p:nvSpPr>
-        <p:spPr>
-          <a:xfrm>
-            <a:off x="8439912" y="868680"/>
-            <a:ext cx="3017520" cy="3749040"/>
+              <a:t>Lo que pagás todos los meses sin que te sume</a:t>
+            </a:r>
+            <a:endParaRPr lang="en-US" sz="1800" dirty="0"/>
+          </a:p>
+        </p:txBody>
+      </p:sp>
+      <p:sp>
+        <p:nvSpPr>
+          <p:cNvPr id="11" name="Balanza hilo 2"/>
+          <p:cNvSpPr/>
+          <p:nvPr/>
+        </p:nvSpPr>
+        <p:spPr>
+          <a:xfrm>
+            <a:off x="9739529" y="2833381"/>
+            <a:ext cx="0" cy="320040"/>
+          </a:xfrm>
+          <a:prstGeom prst="line">
+            <a:avLst/>
+          </a:prstGeom>
+          <a:noFill/>
+          <a:ln w="19050">
+            <a:solidFill>
+              <a:schemeClr val="tx1"/>
+            </a:solidFill>
+            <a:prstDash val="solid"/>
+          </a:ln>
+        </p:spPr>
+      </p:sp>
+      <p:sp>
+        <p:nvSpPr>
+          <p:cNvPr id="12" name="Platillo 2"/>
+          <p:cNvSpPr/>
+          <p:nvPr/>
+        </p:nvSpPr>
+        <p:spPr>
+          <a:xfrm>
+            <a:off x="8093609" y="3153421"/>
+            <a:ext cx="3291840" cy="1417320"/>
           </a:xfrm>
           <a:prstGeom prst="roundRect">
             <a:avLst>
-              <a:gd name="adj" fmla="val 5455"/>
+              <a:gd name="adj" fmla="val 11613"/>
             </a:avLst>
           </a:prstGeom>
           <a:solidFill>
-            <a:schemeClr val="bg1"/>
+            <a:schemeClr val="accent1"/>
           </a:solidFill>
           <a:ln w="12700">
             <a:solidFill>
-              <a:schemeClr val="bg1"/>
+              <a:schemeClr val="accent1"/>
             </a:solidFill>
             <a:prstDash val="solid"/>
           </a:ln>
@@ -3777,53 +5278,53 @@
       </p:sp>
       <p:sp>
         <p:nvSpPr>
-          <p:cNvPr id="12" name="Pago en dólares título"/>
+          <p:cNvPr id="13" name="Platillo 2 texto"/>
           <p:cNvSpPr txBox="1"/>
           <p:nvPr/>
         </p:nvSpPr>
         <p:spPr>
           <a:xfrm>
-            <a:off x="8439912" y="1069848"/>
-            <a:ext cx="3017520" cy="365760"/>
-          </a:xfrm>
-          <a:prstGeom prst="rect">
-            <a:avLst/>
-          </a:prstGeom>
-          <a:noFill/>
-          <a:ln/>
-        </p:spPr>
-        <p:txBody>
-          <a:bodyPr wrap="square" lIns="0" tIns="0" rIns="0" bIns="0" rtlCol="0" anchor="t"/>
+            <a:off x="8367929" y="3153421"/>
+            <a:ext cx="2743200" cy="1417320"/>
+          </a:xfrm>
+          <a:prstGeom prst="rect">
+            <a:avLst/>
+          </a:prstGeom>
+          <a:noFill/>
+          <a:ln/>
+        </p:spPr>
+        <p:txBody>
+          <a:bodyPr wrap="square" lIns="0" tIns="0" rIns="0" bIns="0" rtlCol="0" anchor="ctr"/>
           <a:lstStyle/>
           <a:p>
             <a:pPr algn="ctr" indent="0" marL="0">
               <a:buNone/>
             </a:pPr>
             <a:r>
-              <a:rPr lang="en-US" sz="2000" b="1" dirty="0">
-                <a:solidFill>
-                  <a:schemeClr val="tx1"/>
+              <a:rPr lang="en-US" sz="1800" b="1" dirty="0">
+                <a:solidFill>
+                  <a:schemeClr val="bg1"/>
                 </a:solidFill>
                 <a:latin typeface="Montserrat" pitchFamily="34" charset="0"/>
                 <a:ea typeface="Montserrat" pitchFamily="34" charset="-122"/>
                 <a:cs typeface="Montserrat" pitchFamily="34" charset="-120"/>
               </a:rPr>
-              <a:t>EN DÓLARES</a:t>
-            </a:r>
-            <a:endParaRPr lang="en-US" sz="2000" dirty="0"/>
-          </a:p>
-        </p:txBody>
-      </p:sp>
-      <p:sp>
-        <p:nvSpPr>
-          <p:cNvPr id="13" name="Pago en dólares medio"/>
+              <a:t>Lo que hace que tus cosas dejen de quedar para después</a:t>
+            </a:r>
+            <a:endParaRPr lang="en-US" sz="1800" dirty="0"/>
+          </a:p>
+        </p:txBody>
+      </p:sp>
+      <p:sp>
+        <p:nvSpPr>
+          <p:cNvPr id="14" name="Costo de esperar"/>
           <p:cNvSpPr txBox="1"/>
           <p:nvPr/>
         </p:nvSpPr>
         <p:spPr>
           <a:xfrm>
-            <a:off x="8439912" y="1435608"/>
-            <a:ext cx="3017520" cy="274320"/>
+            <a:off x="731520" y="5120640"/>
+            <a:ext cx="4389120" cy="822960"/>
           </a:xfrm>
           <a:prstGeom prst="rect">
             <a:avLst/>
@@ -3835,45 +5336,21 @@
           <a:bodyPr wrap="square" lIns="0" tIns="0" rIns="0" bIns="0" rtlCol="0" anchor="t"/>
           <a:lstStyle/>
           <a:p>
-            <a:pPr algn="ctr" indent="0" marL="0">
-              <a:buNone/>
-            </a:pPr>
-            <a:r>
-              <a:rPr lang="en-US" sz="1400" dirty="0">
+            <a:pPr indent="0" marL="0">
+              <a:buNone/>
+            </a:pPr>
+            <a:r>
+              <a:rPr lang="en-US" sz="1800" dirty="0">
                 <a:solidFill>
                   <a:schemeClr val="accent3"/>
                 </a:solidFill>
               </a:rPr>
-              <a:t>Con tarjeta</a:t>
-            </a:r>
-            <a:endParaRPr lang="en-US" sz="1400" dirty="0"/>
-          </a:p>
-        </p:txBody>
-      </p:sp>
-      <p:pic>
-        <p:nvPicPr>
-          <p:cNvPr id="14" name="Pago en dólares QR" descr="QR EN DÓLARES">    </p:cNvPr>
-          <p:cNvPicPr>
-            <a:picLocks noChangeAspect="1"/>
-          </p:cNvPicPr>
-          <p:nvPr/>
-        </p:nvPicPr>
-        <p:blipFill>
-          <a:blip r:embed="rId2"/>
-          <a:stretch>
-            <a:fillRect/>
-          </a:stretch>
-        </p:blipFill>
-        <p:spPr>
-          <a:xfrm>
-            <a:off x="8668512" y="1828800"/>
-            <a:ext cx="2560320" cy="2560320"/>
-          </a:xfrm>
-          <a:prstGeom prst="rect">
-            <a:avLst/>
-          </a:prstGeom>
-        </p:spPr>
-      </p:pic>
+              <a:t>Otro mes igual es otro mes con tu proyecto en el mismo lugar.</a:t>
+            </a:r>
+            <a:endParaRPr lang="en-US" sz="1800" dirty="0"/>
+          </a:p>
+        </p:txBody>
+      </p:sp>
     </p:spTree>
   </p:cSld>
   <p:clrMapOvr>
@@ -3910,7 +5387,7 @@
         <p:spPr>
           <a:xfrm>
             <a:off x="731520" y="685800"/>
-            <a:ext cx="4114800" cy="365760"/>
+            <a:ext cx="10728655" cy="365760"/>
           </a:xfrm>
           <a:prstGeom prst="rect">
             <a:avLst/>
@@ -3931,7 +5408,7 @@
                   <a:schemeClr val="accent1"/>
                 </a:solidFill>
               </a:rPr>
-              <a:t>TU PRIMER PASO ES HOY</a:t>
+              <a:t>¿Y CUÁNTO CUESTA?</a:t>
             </a:r>
             <a:endParaRPr lang="en-US" sz="1400" dirty="0"/>
           </a:p>
@@ -3939,7 +5416,179 @@
       </p:sp>
       <p:sp>
         <p:nvSpPr>
-          <p:cNvPr id="3" name="Text 0"/>
+          <p:cNvPr id="3" name="Cuenta"/>
+          <p:cNvSpPr txBox="1"/>
+          <p:nvPr/>
+        </p:nvSpPr>
+        <p:spPr>
+          <a:xfrm>
+            <a:off x="731520" y="1417320"/>
+            <a:ext cx="6766560" cy="2194560"/>
+          </a:xfrm>
+          <a:prstGeom prst="rect">
+            <a:avLst/>
+          </a:prstGeom>
+          <a:noFill/>
+          <a:ln/>
+        </p:spPr>
+        <p:txBody>
+          <a:bodyPr wrap="square" lIns="0" tIns="0" rIns="0" bIns="0" rtlCol="0" anchor="ctr"/>
+          <a:lstStyle/>
+          <a:p>
+            <a:pPr indent="0" marL="0">
+              <a:buNone/>
+            </a:pPr>
+            <a:r>
+              <a:rPr lang="en-US" sz="4800" b="1" dirty="0">
+                <a:solidFill>
+                  <a:schemeClr val="tx1"/>
+                </a:solidFill>
+                <a:latin typeface="Montserrat" pitchFamily="34" charset="0"/>
+                <a:ea typeface="Montserrat" pitchFamily="34" charset="-122"/>
+                <a:cs typeface="Montserrat" pitchFamily="34" charset="-120"/>
+              </a:rPr>
+              <a:t>USD 35 ÷ 30 días</a:t>
+            </a:r>
+            <a:endParaRPr lang="en-US" sz="4800" dirty="0"/>
+          </a:p>
+          <a:p>
+            <a:pPr indent="0" marL="0">
+              <a:buNone/>
+            </a:pPr>
+            <a:r>
+              <a:rPr lang="en-US" sz="4800" b="1" dirty="0">
+                <a:solidFill>
+                  <a:schemeClr val="accent1"/>
+                </a:solidFill>
+                <a:latin typeface="Montserrat" pitchFamily="34" charset="0"/>
+                <a:ea typeface="Montserrat" pitchFamily="34" charset="-122"/>
+                <a:cs typeface="Montserrat" pitchFamily="34" charset="-120"/>
+              </a:rPr>
+              <a:t>= USD 1,17 por día</a:t>
+            </a:r>
+            <a:endParaRPr lang="en-US" sz="4800" dirty="0"/>
+          </a:p>
+        </p:txBody>
+      </p:sp>
+      <p:sp>
+        <p:nvSpPr>
+          <p:cNvPr id="4" name="Remate"/>
+          <p:cNvSpPr txBox="1"/>
+          <p:nvPr/>
+        </p:nvSpPr>
+        <p:spPr>
+          <a:xfrm>
+            <a:off x="731520" y="3977640"/>
+            <a:ext cx="6766560" cy="914400"/>
+          </a:xfrm>
+          <a:prstGeom prst="rect">
+            <a:avLst/>
+          </a:prstGeom>
+          <a:noFill/>
+          <a:ln/>
+        </p:spPr>
+        <p:txBody>
+          <a:bodyPr wrap="square" lIns="0" tIns="0" rIns="0" bIns="0" rtlCol="0" anchor="t"/>
+          <a:lstStyle/>
+          <a:p>
+            <a:pPr indent="0" marL="0">
+              <a:buNone/>
+            </a:pPr>
+            <a:r>
+              <a:rPr lang="en-US" sz="3600" b="1" dirty="0">
+                <a:solidFill>
+                  <a:schemeClr val="tx1"/>
+                </a:solidFill>
+                <a:latin typeface="Montserrat" pitchFamily="34" charset="0"/>
+                <a:ea typeface="Montserrat" pitchFamily="34" charset="-122"/>
+                <a:cs typeface="Montserrat" pitchFamily="34" charset="-120"/>
+              </a:rPr>
+              <a:t>Ni siquiera un café por día</a:t>
+            </a:r>
+            <a:endParaRPr lang="en-US" sz="3600" dirty="0"/>
+          </a:p>
+        </p:txBody>
+      </p:sp>
+      <p:sp>
+        <p:nvSpPr>
+          <p:cNvPr id="5" name="Espacio Mini Nico café"/>
+          <p:cNvSpPr/>
+          <p:nvPr/>
+        </p:nvSpPr>
+        <p:spPr>
+          <a:xfrm>
+            <a:off x="8001000" y="685800"/>
+            <a:ext cx="3456432" cy="5074920"/>
+          </a:xfrm>
+          <a:prstGeom prst="roundRect">
+            <a:avLst>
+              <a:gd name="adj" fmla="val 4762"/>
+            </a:avLst>
+          </a:prstGeom>
+          <a:solidFill>
+            <a:schemeClr val="bg2"/>
+          </a:solidFill>
+          <a:ln w="19050">
+            <a:solidFill>
+              <a:schemeClr val="accent3"/>
+            </a:solidFill>
+            <a:prstDash val="dash"/>
+          </a:ln>
+        </p:spPr>
+      </p:sp>
+      <p:sp>
+        <p:nvSpPr>
+          <p:cNvPr id="6" name="Espacio Mini Nico café (texto)"/>
+          <p:cNvSpPr txBox="1"/>
+          <p:nvPr/>
+        </p:nvSpPr>
+        <p:spPr>
+          <a:xfrm>
+            <a:off x="8275320" y="685800"/>
+            <a:ext cx="2907792" cy="5074920"/>
+          </a:xfrm>
+          <a:prstGeom prst="rect">
+            <a:avLst/>
+          </a:prstGeom>
+          <a:noFill/>
+          <a:ln/>
+        </p:spPr>
+        <p:txBody>
+          <a:bodyPr wrap="square" lIns="0" tIns="0" rIns="0" bIns="0" rtlCol="0" anchor="ctr"/>
+          <a:lstStyle/>
+          <a:p>
+            <a:pPr algn="ctr" indent="0" marL="0">
+              <a:buNone/>
+            </a:pPr>
+            <a:r>
+              <a:rPr lang="en-US" sz="1300" b="1" spc="200" kern="0" dirty="0">
+                <a:solidFill>
+                  <a:schemeClr val="accent3"/>
+                </a:solidFill>
+              </a:rPr>
+              <a:t>MINI NICO</a:t>
+            </a:r>
+            <a:endParaRPr lang="en-US" sz="1300" dirty="0"/>
+          </a:p>
+          <a:p>
+            <a:pPr algn="ctr" indent="0" marL="0">
+              <a:buNone/>
+            </a:pPr>
+            <a:r>
+              <a:rPr lang="en-US" sz="1300" b="1" spc="200" kern="0" dirty="0">
+                <a:solidFill>
+                  <a:schemeClr val="accent3"/>
+                </a:solidFill>
+              </a:rPr>
+              <a:t>con un café en la mano</a:t>
+            </a:r>
+            <a:endParaRPr lang="en-US" sz="1300" dirty="0"/>
+          </a:p>
+        </p:txBody>
+      </p:sp>
+      <p:sp>
+        <p:nvSpPr>
+          <p:cNvPr id="8" name="Text 0"/>
           <p:cNvSpPr/>
           <p:nvPr>
             <p:ph idx="101" type="title" hasCustomPrompt="1"/>
@@ -3948,6 +5597,348 @@
         <p:spPr>
           <a:xfrm>
             <a:off x="731520" y="1097280"/>
+            <a:ext cx="10728655" cy="1005840"/>
+          </a:xfrm>
+          <a:prstGeom prst="rect">
+            <a:avLst/>
+          </a:prstGeom>
+          <a:noFill/>
+          <a:ln/>
+        </p:spPr>
+        <p:txBody>
+          <a:bodyPr wrap="square" lIns="0" tIns="0" rIns="0" bIns="0" rtlCol="0" anchor="t"/>
+          <a:lstStyle/>
+          <a:p>
+            <a:pPr algn="l" indent="0" marL="0">
+              <a:buNone/>
+            </a:pPr>
+            <a:endParaRPr lang="en-US" sz="4000" dirty="0"/>
+          </a:p>
+        </p:txBody>
+      </p:sp>
+    </p:spTree>
+  </p:cSld>
+  <p:clrMapOvr>
+    <a:masterClrMapping/>
+  </p:clrMapOvr>
+</p:sld>
+</file>
+
+<file path=ppt/slides/slide14.xml><?xml version="1.0" encoding="utf-8"?>
+<p:sld xmlns:a="http://schemas.openxmlformats.org/drawingml/2006/main" xmlns:r="http://schemas.openxmlformats.org/officeDocument/2006/relationships" xmlns:p="http://schemas.openxmlformats.org/presentationml/2006/main">
+  <p:cSld name="Slide 14">
+    <p:spTree>
+      <p:nvGrpSpPr>
+        <p:cNvPr id="1" name=""/>
+        <p:cNvGrpSpPr/>
+        <p:nvPr/>
+      </p:nvGrpSpPr>
+      <p:grpSpPr>
+        <a:xfrm>
+          <a:off x="0" y="0"/>
+          <a:ext cx="0" cy="0"/>
+          <a:chOff x="0" y="0"/>
+          <a:chExt cx="0" cy="0"/>
+        </a:xfrm>
+      </p:grpSpPr>
+      <p:sp>
+        <p:nvSpPr>
+          <p:cNvPr id="2" name="Kicker"/>
+          <p:cNvSpPr txBox="1"/>
+          <p:nvPr/>
+        </p:nvSpPr>
+        <p:spPr>
+          <a:xfrm>
+            <a:off x="731520" y="868680"/>
+            <a:ext cx="10728655" cy="365760"/>
+          </a:xfrm>
+          <a:prstGeom prst="rect">
+            <a:avLst/>
+          </a:prstGeom>
+          <a:noFill/>
+          <a:ln/>
+        </p:spPr>
+        <p:txBody>
+          <a:bodyPr wrap="square" lIns="0" tIns="0" rIns="0" bIns="0" rtlCol="0" anchor="t"/>
+          <a:lstStyle/>
+          <a:p>
+            <a:pPr algn="ctr" indent="0" marL="0">
+              <a:buNone/>
+            </a:pPr>
+            <a:r>
+              <a:rPr lang="en-US" sz="1400" b="1" spc="300" kern="0" dirty="0">
+                <a:solidFill>
+                  <a:schemeClr val="accent1"/>
+                </a:solidFill>
+              </a:rPr>
+              <a:t>TU LUGAR EN LA COMUNIDAD PRODUCTIVA</a:t>
+            </a:r>
+            <a:endParaRPr lang="en-US" sz="1400" dirty="0"/>
+          </a:p>
+        </p:txBody>
+      </p:sp>
+      <p:sp>
+        <p:nvSpPr>
+          <p:cNvPr id="3" name="Precio anterior"/>
+          <p:cNvSpPr txBox="1"/>
+          <p:nvPr/>
+        </p:nvSpPr>
+        <p:spPr>
+          <a:xfrm>
+            <a:off x="731520" y="1508760"/>
+            <a:ext cx="10728655" cy="822960"/>
+          </a:xfrm>
+          <a:prstGeom prst="rect">
+            <a:avLst/>
+          </a:prstGeom>
+          <a:noFill/>
+          <a:ln/>
+        </p:spPr>
+        <p:txBody>
+          <a:bodyPr wrap="square" lIns="0" tIns="0" rIns="0" bIns="0" rtlCol="0" anchor="ctr"/>
+          <a:lstStyle/>
+          <a:p>
+            <a:pPr algn="ctr" indent="0" marL="0">
+              <a:buNone/>
+            </a:pPr>
+            <a:r>
+              <a:rPr lang="en-US" sz="4400" b="1" strike="sngStrike" dirty="0">
+                <a:solidFill>
+                  <a:schemeClr val="accent2"/>
+                </a:solidFill>
+                <a:latin typeface="Montserrat" pitchFamily="34" charset="0"/>
+                <a:ea typeface="Montserrat" pitchFamily="34" charset="-122"/>
+                <a:cs typeface="Montserrat" pitchFamily="34" charset="-120"/>
+              </a:rPr>
+              <a:t>USD 50</a:t>
+            </a:r>
+            <a:endParaRPr lang="en-US" sz="4400" dirty="0"/>
+          </a:p>
+        </p:txBody>
+      </p:sp>
+      <p:sp>
+        <p:nvSpPr>
+          <p:cNvPr id="4" name="Precio"/>
+          <p:cNvSpPr txBox="1"/>
+          <p:nvPr/>
+        </p:nvSpPr>
+        <p:spPr>
+          <a:xfrm>
+            <a:off x="731520" y="2331720"/>
+            <a:ext cx="10728655" cy="1737360"/>
+          </a:xfrm>
+          <a:prstGeom prst="rect">
+            <a:avLst/>
+          </a:prstGeom>
+          <a:noFill/>
+          <a:ln/>
+        </p:spPr>
+        <p:txBody>
+          <a:bodyPr wrap="square" lIns="0" tIns="0" rIns="0" bIns="0" rtlCol="0" anchor="ctr"/>
+          <a:lstStyle/>
+          <a:p>
+            <a:pPr algn="ctr" indent="0" marL="0">
+              <a:buNone/>
+            </a:pPr>
+            <a:r>
+              <a:rPr lang="en-US" sz="12000" b="1" dirty="0">
+                <a:solidFill>
+                  <a:schemeClr val="accent1"/>
+                </a:solidFill>
+                <a:latin typeface="Montserrat" pitchFamily="34" charset="0"/>
+                <a:ea typeface="Montserrat" pitchFamily="34" charset="-122"/>
+                <a:cs typeface="Montserrat" pitchFamily="34" charset="-120"/>
+              </a:rPr>
+              <a:t>USD 35</a:t>
+            </a:r>
+            <a:pPr algn="ctr" indent="0" marL="0">
+              <a:buNone/>
+            </a:pPr>
+            <a:r>
+              <a:rPr lang="en-US" sz="3200" b="1" dirty="0">
+                <a:solidFill>
+                  <a:schemeClr val="bg1"/>
+                </a:solidFill>
+                <a:latin typeface="Montserrat" pitchFamily="34" charset="0"/>
+                <a:ea typeface="Montserrat" pitchFamily="34" charset="-122"/>
+                <a:cs typeface="Montserrat" pitchFamily="34" charset="-120"/>
+              </a:rPr>
+              <a:t> por mes</a:t>
+            </a:r>
+            <a:endParaRPr lang="en-US" sz="1800" dirty="0"/>
+          </a:p>
+        </p:txBody>
+      </p:sp>
+      <p:sp>
+        <p:nvSpPr>
+          <p:cNvPr id="5" name="Condición"/>
+          <p:cNvSpPr txBox="1"/>
+          <p:nvPr/>
+        </p:nvSpPr>
+        <p:spPr>
+          <a:xfrm>
+            <a:off x="731520" y="4160520"/>
+            <a:ext cx="10728655" cy="502920"/>
+          </a:xfrm>
+          <a:prstGeom prst="rect">
+            <a:avLst/>
+          </a:prstGeom>
+          <a:noFill/>
+          <a:ln/>
+        </p:spPr>
+        <p:txBody>
+          <a:bodyPr wrap="square" lIns="0" tIns="0" rIns="0" bIns="0" rtlCol="0" anchor="t"/>
+          <a:lstStyle/>
+          <a:p>
+            <a:pPr algn="ctr" indent="0" marL="0">
+              <a:buNone/>
+            </a:pPr>
+            <a:r>
+              <a:rPr lang="en-US" sz="2400" dirty="0">
+                <a:solidFill>
+                  <a:schemeClr val="bg1"/>
+                </a:solidFill>
+              </a:rPr>
+              <a:t>Es mensual: si no te sirve, no renovás.</a:t>
+            </a:r>
+            <a:endParaRPr lang="en-US" sz="2400" dirty="0"/>
+          </a:p>
+        </p:txBody>
+      </p:sp>
+      <p:sp>
+        <p:nvSpPr>
+          <p:cNvPr id="6" name="Escasez"/>
+          <p:cNvSpPr txBox="1"/>
+          <p:nvPr/>
+        </p:nvSpPr>
+        <p:spPr>
+          <a:xfrm>
+            <a:off x="731520" y="4983480"/>
+            <a:ext cx="10728655" cy="411480"/>
+          </a:xfrm>
+          <a:prstGeom prst="rect">
+            <a:avLst/>
+          </a:prstGeom>
+          <a:noFill/>
+          <a:ln/>
+        </p:spPr>
+        <p:txBody>
+          <a:bodyPr wrap="square" lIns="0" tIns="0" rIns="0" bIns="0" rtlCol="0" anchor="t"/>
+          <a:lstStyle/>
+          <a:p>
+            <a:pPr algn="ctr" indent="0" marL="0">
+              <a:buNone/>
+            </a:pPr>
+            <a:r>
+              <a:rPr lang="en-US" sz="1800" dirty="0">
+                <a:solidFill>
+                  <a:schemeClr val="accent2"/>
+                </a:solidFill>
+              </a:rPr>
+              <a:t>Precio para las primeras 20 personas. Después, el sistema lo sube a USD 50.</a:t>
+            </a:r>
+            <a:endParaRPr lang="en-US" sz="1800" dirty="0"/>
+          </a:p>
+        </p:txBody>
+      </p:sp>
+      <p:pic>
+        <p:nvPicPr>
+          <p:cNvPr id="7" name="Logo" descr="Instituto de Productividad">    </p:cNvPr>
+          <p:cNvPicPr>
+            <a:picLocks noChangeAspect="1"/>
+          </p:cNvPicPr>
+          <p:nvPr/>
+        </p:nvPicPr>
+        <p:blipFill>
+          <a:blip r:embed="rId1"/>
+          <a:stretch>
+            <a:fillRect/>
+          </a:stretch>
+        </p:blipFill>
+        <p:spPr>
+          <a:xfrm>
+            <a:off x="9722815" y="6093006"/>
+            <a:ext cx="1737360" cy="353514"/>
+          </a:xfrm>
+          <a:prstGeom prst="rect">
+            <a:avLst/>
+          </a:prstGeom>
+        </p:spPr>
+      </p:pic>
+    </p:spTree>
+  </p:cSld>
+  <p:clrMapOvr>
+    <a:masterClrMapping/>
+  </p:clrMapOvr>
+</p:sld>
+</file>
+
+<file path=ppt/slides/slide15.xml><?xml version="1.0" encoding="utf-8"?>
+<p:sld xmlns:a="http://schemas.openxmlformats.org/drawingml/2006/main" xmlns:r="http://schemas.openxmlformats.org/officeDocument/2006/relationships" xmlns:p="http://schemas.openxmlformats.org/presentationml/2006/main">
+  <p:cSld name="Slide 15">
+    <p:spTree>
+      <p:nvGrpSpPr>
+        <p:cNvPr id="1" name=""/>
+        <p:cNvGrpSpPr/>
+        <p:nvPr/>
+      </p:nvGrpSpPr>
+      <p:grpSpPr>
+        <a:xfrm>
+          <a:off x="0" y="0"/>
+          <a:ext cx="0" cy="0"/>
+          <a:chOff x="0" y="0"/>
+          <a:chExt cx="0" cy="0"/>
+        </a:xfrm>
+      </p:grpSpPr>
+      <p:sp>
+        <p:nvSpPr>
+          <p:cNvPr id="2" name="Text 0"/>
+          <p:cNvSpPr/>
+          <p:nvPr>
+            <p:ph idx="100" type="body" hasCustomPrompt="1"/>
+          </p:nvPr>
+        </p:nvSpPr>
+        <p:spPr>
+          <a:xfrm>
+            <a:off x="731520" y="685800"/>
+            <a:ext cx="4114800" cy="365760"/>
+          </a:xfrm>
+          <a:prstGeom prst="rect">
+            <a:avLst/>
+          </a:prstGeom>
+          <a:noFill/>
+          <a:ln/>
+        </p:spPr>
+        <p:txBody>
+          <a:bodyPr wrap="square" lIns="0" tIns="0" rIns="0" bIns="0" rtlCol="0" anchor="ctr"/>
+          <a:lstStyle/>
+          <a:p>
+            <a:pPr indent="0" marL="0">
+              <a:buNone/>
+            </a:pPr>
+            <a:r>
+              <a:rPr lang="en-US" sz="1400" b="1" spc="300" kern="0" dirty="0">
+                <a:solidFill>
+                  <a:schemeClr val="accent1"/>
+                </a:solidFill>
+              </a:rPr>
+              <a:t>PRIMERAS 20 PERSONAS</a:t>
+            </a:r>
+            <a:endParaRPr lang="en-US" sz="1400" dirty="0"/>
+          </a:p>
+        </p:txBody>
+      </p:sp>
+      <p:sp>
+        <p:nvSpPr>
+          <p:cNvPr id="3" name="Text 0"/>
+          <p:cNvSpPr/>
+          <p:nvPr>
+            <p:ph idx="101" type="title" hasCustomPrompt="1"/>
+          </p:nvPr>
+        </p:nvSpPr>
+        <p:spPr>
+          <a:xfrm>
+            <a:off x="731520" y="1097280"/>
             <a:ext cx="4114800" cy="2743200"/>
           </a:xfrm>
           <a:prstGeom prst="rect">
@@ -3969,6 +5960,467 @@
                   <a:schemeClr val="bg1"/>
                 </a:solidFill>
               </a:rPr>
+              <a:t>Sumate al Instituto</a:t>
+            </a:r>
+            <a:endParaRPr lang="en-US" sz="3600" dirty="0"/>
+          </a:p>
+        </p:txBody>
+      </p:sp>
+      <p:sp>
+        <p:nvSpPr>
+          <p:cNvPr id="4" name="Acción"/>
+          <p:cNvSpPr txBox="1"/>
+          <p:nvPr/>
+        </p:nvSpPr>
+        <p:spPr>
+          <a:xfrm>
+            <a:off x="731520" y="2560320"/>
+            <a:ext cx="4114800" cy="1188720"/>
+          </a:xfrm>
+          <a:prstGeom prst="rect">
+            <a:avLst/>
+          </a:prstGeom>
+          <a:noFill/>
+          <a:ln/>
+        </p:spPr>
+        <p:txBody>
+          <a:bodyPr wrap="square" lIns="0" tIns="0" rIns="0" bIns="0" rtlCol="0" anchor="t"/>
+          <a:lstStyle/>
+          <a:p>
+            <a:pPr indent="0" marL="0">
+              <a:buNone/>
+            </a:pPr>
+            <a:r>
+              <a:rPr lang="en-US" sz="2100" b="1" dirty="0">
+                <a:solidFill>
+                  <a:schemeClr val="bg1"/>
+                </a:solidFill>
+              </a:rPr>
+              <a:t>Escaneá el QR de tu moneda. Cuando entres, escribí ADENTRO en el chat.</a:t>
+            </a:r>
+            <a:endParaRPr lang="en-US" sz="2100" dirty="0"/>
+          </a:p>
+        </p:txBody>
+      </p:sp>
+      <p:sp>
+        <p:nvSpPr>
+          <p:cNvPr id="5" name="Urgencia"/>
+          <p:cNvSpPr txBox="1"/>
+          <p:nvPr/>
+        </p:nvSpPr>
+        <p:spPr>
+          <a:xfrm>
+            <a:off x="731520" y="3886200"/>
+            <a:ext cx="4114800" cy="914400"/>
+          </a:xfrm>
+          <a:prstGeom prst="rect">
+            <a:avLst/>
+          </a:prstGeom>
+          <a:noFill/>
+          <a:ln/>
+        </p:spPr>
+        <p:txBody>
+          <a:bodyPr wrap="square" lIns="0" tIns="0" rIns="0" bIns="0" rtlCol="0" anchor="t"/>
+          <a:lstStyle/>
+          <a:p>
+            <a:pPr indent="0" marL="0">
+              <a:buNone/>
+            </a:pPr>
+            <a:r>
+              <a:rPr lang="en-US" sz="1800" b="1" dirty="0">
+                <a:solidFill>
+                  <a:schemeClr val="accent1"/>
+                </a:solidFill>
+              </a:rPr>
+              <a:t>Si entrás hoy, este sábado ya planificás con nosotros.</a:t>
+            </a:r>
+            <a:endParaRPr lang="en-US" sz="1800" dirty="0"/>
+          </a:p>
+        </p:txBody>
+      </p:sp>
+      <p:sp>
+        <p:nvSpPr>
+          <p:cNvPr id="6" name="Ayuda"/>
+          <p:cNvSpPr txBox="1"/>
+          <p:nvPr/>
+        </p:nvSpPr>
+        <p:spPr>
+          <a:xfrm>
+            <a:off x="731520" y="4846320"/>
+            <a:ext cx="4114800" cy="822960"/>
+          </a:xfrm>
+          <a:prstGeom prst="rect">
+            <a:avLst/>
+          </a:prstGeom>
+          <a:noFill/>
+          <a:ln/>
+        </p:spPr>
+        <p:txBody>
+          <a:bodyPr wrap="square" lIns="0" tIns="0" rIns="0" bIns="0" rtlCol="0" anchor="t"/>
+          <a:lstStyle/>
+          <a:p>
+            <a:pPr indent="0" marL="0">
+              <a:buNone/>
+            </a:pPr>
+            <a:r>
+              <a:rPr lang="en-US" sz="1600" dirty="0">
+                <a:solidFill>
+                  <a:schemeClr val="accent2"/>
+                </a:solidFill>
+              </a:rPr>
+              <a:t>¿Problema con el pago? En el chat tenés el WhatsApp de un asesor.</a:t>
+            </a:r>
+            <a:endParaRPr lang="en-US" sz="1600" dirty="0"/>
+          </a:p>
+        </p:txBody>
+      </p:sp>
+      <p:sp>
+        <p:nvSpPr>
+          <p:cNvPr id="7" name="Pago en pesos"/>
+          <p:cNvSpPr/>
+          <p:nvPr/>
+        </p:nvSpPr>
+        <p:spPr>
+          <a:xfrm>
+            <a:off x="5148072" y="868680"/>
+            <a:ext cx="3017520" cy="3749040"/>
+          </a:xfrm>
+          <a:prstGeom prst="roundRect">
+            <a:avLst>
+              <a:gd name="adj" fmla="val 5455"/>
+            </a:avLst>
+          </a:prstGeom>
+          <a:solidFill>
+            <a:schemeClr val="bg1"/>
+          </a:solidFill>
+          <a:ln w="12700">
+            <a:solidFill>
+              <a:schemeClr val="bg1"/>
+            </a:solidFill>
+            <a:prstDash val="solid"/>
+          </a:ln>
+        </p:spPr>
+      </p:sp>
+      <p:sp>
+        <p:nvSpPr>
+          <p:cNvPr id="8" name="Pago en pesos título"/>
+          <p:cNvSpPr txBox="1"/>
+          <p:nvPr/>
+        </p:nvSpPr>
+        <p:spPr>
+          <a:xfrm>
+            <a:off x="5148072" y="1069848"/>
+            <a:ext cx="3017520" cy="365760"/>
+          </a:xfrm>
+          <a:prstGeom prst="rect">
+            <a:avLst/>
+          </a:prstGeom>
+          <a:noFill/>
+          <a:ln/>
+        </p:spPr>
+        <p:txBody>
+          <a:bodyPr wrap="square" lIns="0" tIns="0" rIns="0" bIns="0" rtlCol="0" anchor="t"/>
+          <a:lstStyle/>
+          <a:p>
+            <a:pPr algn="ctr" indent="0" marL="0">
+              <a:buNone/>
+            </a:pPr>
+            <a:r>
+              <a:rPr lang="en-US" sz="2000" b="1" dirty="0">
+                <a:solidFill>
+                  <a:schemeClr val="tx1"/>
+                </a:solidFill>
+                <a:latin typeface="Montserrat" pitchFamily="34" charset="0"/>
+                <a:ea typeface="Montserrat" pitchFamily="34" charset="-122"/>
+                <a:cs typeface="Montserrat" pitchFamily="34" charset="-120"/>
+              </a:rPr>
+              <a:t>EN PESOS</a:t>
+            </a:r>
+            <a:endParaRPr lang="en-US" sz="2000" dirty="0"/>
+          </a:p>
+        </p:txBody>
+      </p:sp>
+      <p:sp>
+        <p:nvSpPr>
+          <p:cNvPr id="9" name="Pago en pesos medio"/>
+          <p:cNvSpPr txBox="1"/>
+          <p:nvPr/>
+        </p:nvSpPr>
+        <p:spPr>
+          <a:xfrm>
+            <a:off x="5148072" y="1435608"/>
+            <a:ext cx="3017520" cy="274320"/>
+          </a:xfrm>
+          <a:prstGeom prst="rect">
+            <a:avLst/>
+          </a:prstGeom>
+          <a:noFill/>
+          <a:ln/>
+        </p:spPr>
+        <p:txBody>
+          <a:bodyPr wrap="square" lIns="0" tIns="0" rIns="0" bIns="0" rtlCol="0" anchor="t"/>
+          <a:lstStyle/>
+          <a:p>
+            <a:pPr algn="ctr" indent="0" marL="0">
+              <a:buNone/>
+            </a:pPr>
+            <a:r>
+              <a:rPr lang="en-US" sz="1400" dirty="0">
+                <a:solidFill>
+                  <a:schemeClr val="accent3"/>
+                </a:solidFill>
+              </a:rPr>
+              <a:t>Mercado Pago</a:t>
+            </a:r>
+            <a:endParaRPr lang="en-US" sz="1400" dirty="0"/>
+          </a:p>
+        </p:txBody>
+      </p:sp>
+      <p:pic>
+        <p:nvPicPr>
+          <p:cNvPr id="10" name="Pago en pesos QR" descr="QR EN PESOS">    </p:cNvPr>
+          <p:cNvPicPr>
+            <a:picLocks noChangeAspect="1"/>
+          </p:cNvPicPr>
+          <p:nvPr/>
+        </p:nvPicPr>
+        <p:blipFill>
+          <a:blip r:embed="rId1"/>
+          <a:stretch>
+            <a:fillRect/>
+          </a:stretch>
+        </p:blipFill>
+        <p:spPr>
+          <a:xfrm>
+            <a:off x="5376672" y="1828800"/>
+            <a:ext cx="2560320" cy="2560320"/>
+          </a:xfrm>
+          <a:prstGeom prst="rect">
+            <a:avLst/>
+          </a:prstGeom>
+        </p:spPr>
+      </p:pic>
+      <p:sp>
+        <p:nvSpPr>
+          <p:cNvPr id="11" name="Pago en dólares"/>
+          <p:cNvSpPr/>
+          <p:nvPr/>
+        </p:nvSpPr>
+        <p:spPr>
+          <a:xfrm>
+            <a:off x="8439912" y="868680"/>
+            <a:ext cx="3017520" cy="3749040"/>
+          </a:xfrm>
+          <a:prstGeom prst="roundRect">
+            <a:avLst>
+              <a:gd name="adj" fmla="val 5455"/>
+            </a:avLst>
+          </a:prstGeom>
+          <a:solidFill>
+            <a:schemeClr val="bg1"/>
+          </a:solidFill>
+          <a:ln w="12700">
+            <a:solidFill>
+              <a:schemeClr val="bg1"/>
+            </a:solidFill>
+            <a:prstDash val="solid"/>
+          </a:ln>
+        </p:spPr>
+      </p:sp>
+      <p:sp>
+        <p:nvSpPr>
+          <p:cNvPr id="12" name="Pago en dólares título"/>
+          <p:cNvSpPr txBox="1"/>
+          <p:nvPr/>
+        </p:nvSpPr>
+        <p:spPr>
+          <a:xfrm>
+            <a:off x="8439912" y="1069848"/>
+            <a:ext cx="3017520" cy="365760"/>
+          </a:xfrm>
+          <a:prstGeom prst="rect">
+            <a:avLst/>
+          </a:prstGeom>
+          <a:noFill/>
+          <a:ln/>
+        </p:spPr>
+        <p:txBody>
+          <a:bodyPr wrap="square" lIns="0" tIns="0" rIns="0" bIns="0" rtlCol="0" anchor="t"/>
+          <a:lstStyle/>
+          <a:p>
+            <a:pPr algn="ctr" indent="0" marL="0">
+              <a:buNone/>
+            </a:pPr>
+            <a:r>
+              <a:rPr lang="en-US" sz="2000" b="1" dirty="0">
+                <a:solidFill>
+                  <a:schemeClr val="tx1"/>
+                </a:solidFill>
+                <a:latin typeface="Montserrat" pitchFamily="34" charset="0"/>
+                <a:ea typeface="Montserrat" pitchFamily="34" charset="-122"/>
+                <a:cs typeface="Montserrat" pitchFamily="34" charset="-120"/>
+              </a:rPr>
+              <a:t>EN DÓLARES</a:t>
+            </a:r>
+            <a:endParaRPr lang="en-US" sz="2000" dirty="0"/>
+          </a:p>
+        </p:txBody>
+      </p:sp>
+      <p:sp>
+        <p:nvSpPr>
+          <p:cNvPr id="13" name="Pago en dólares medio"/>
+          <p:cNvSpPr txBox="1"/>
+          <p:nvPr/>
+        </p:nvSpPr>
+        <p:spPr>
+          <a:xfrm>
+            <a:off x="8439912" y="1435608"/>
+            <a:ext cx="3017520" cy="274320"/>
+          </a:xfrm>
+          <a:prstGeom prst="rect">
+            <a:avLst/>
+          </a:prstGeom>
+          <a:noFill/>
+          <a:ln/>
+        </p:spPr>
+        <p:txBody>
+          <a:bodyPr wrap="square" lIns="0" tIns="0" rIns="0" bIns="0" rtlCol="0" anchor="t"/>
+          <a:lstStyle/>
+          <a:p>
+            <a:pPr algn="ctr" indent="0" marL="0">
+              <a:buNone/>
+            </a:pPr>
+            <a:r>
+              <a:rPr lang="en-US" sz="1400" dirty="0">
+                <a:solidFill>
+                  <a:schemeClr val="accent3"/>
+                </a:solidFill>
+              </a:rPr>
+              <a:t>Con tarjeta</a:t>
+            </a:r>
+            <a:endParaRPr lang="en-US" sz="1400" dirty="0"/>
+          </a:p>
+        </p:txBody>
+      </p:sp>
+      <p:pic>
+        <p:nvPicPr>
+          <p:cNvPr id="14" name="Pago en dólares QR" descr="QR EN DÓLARES">    </p:cNvPr>
+          <p:cNvPicPr>
+            <a:picLocks noChangeAspect="1"/>
+          </p:cNvPicPr>
+          <p:nvPr/>
+        </p:nvPicPr>
+        <p:blipFill>
+          <a:blip r:embed="rId2"/>
+          <a:stretch>
+            <a:fillRect/>
+          </a:stretch>
+        </p:blipFill>
+        <p:spPr>
+          <a:xfrm>
+            <a:off x="8668512" y="1828800"/>
+            <a:ext cx="2560320" cy="2560320"/>
+          </a:xfrm>
+          <a:prstGeom prst="rect">
+            <a:avLst/>
+          </a:prstGeom>
+        </p:spPr>
+      </p:pic>
+    </p:spTree>
+  </p:cSld>
+  <p:clrMapOvr>
+    <a:masterClrMapping/>
+  </p:clrMapOvr>
+</p:sld>
+</file>
+
+<file path=ppt/slides/slide16.xml><?xml version="1.0" encoding="utf-8"?>
+<p:sld xmlns:a="http://schemas.openxmlformats.org/drawingml/2006/main" xmlns:r="http://schemas.openxmlformats.org/officeDocument/2006/relationships" xmlns:p="http://schemas.openxmlformats.org/presentationml/2006/main">
+  <p:cSld name="Slide 16">
+    <p:spTree>
+      <p:nvGrpSpPr>
+        <p:cNvPr id="1" name=""/>
+        <p:cNvGrpSpPr/>
+        <p:nvPr/>
+      </p:nvGrpSpPr>
+      <p:grpSpPr>
+        <a:xfrm>
+          <a:off x="0" y="0"/>
+          <a:ext cx="0" cy="0"/>
+          <a:chOff x="0" y="0"/>
+          <a:chExt cx="0" cy="0"/>
+        </a:xfrm>
+      </p:grpSpPr>
+      <p:sp>
+        <p:nvSpPr>
+          <p:cNvPr id="2" name="Text 0"/>
+          <p:cNvSpPr/>
+          <p:nvPr>
+            <p:ph idx="100" type="body" hasCustomPrompt="1"/>
+          </p:nvPr>
+        </p:nvSpPr>
+        <p:spPr>
+          <a:xfrm>
+            <a:off x="731520" y="685800"/>
+            <a:ext cx="4114800" cy="365760"/>
+          </a:xfrm>
+          <a:prstGeom prst="rect">
+            <a:avLst/>
+          </a:prstGeom>
+          <a:noFill/>
+          <a:ln/>
+        </p:spPr>
+        <p:txBody>
+          <a:bodyPr wrap="square" lIns="0" tIns="0" rIns="0" bIns="0" rtlCol="0" anchor="ctr"/>
+          <a:lstStyle/>
+          <a:p>
+            <a:pPr indent="0" marL="0">
+              <a:buNone/>
+            </a:pPr>
+            <a:r>
+              <a:rPr lang="en-US" sz="1400" b="1" spc="300" kern="0" dirty="0">
+                <a:solidFill>
+                  <a:schemeClr val="accent1"/>
+                </a:solidFill>
+              </a:rPr>
+              <a:t>PRIMERO LAS BASES</a:t>
+            </a:r>
+            <a:endParaRPr lang="en-US" sz="1400" dirty="0"/>
+          </a:p>
+        </p:txBody>
+      </p:sp>
+      <p:sp>
+        <p:nvSpPr>
+          <p:cNvPr id="3" name="Text 0"/>
+          <p:cNvSpPr/>
+          <p:nvPr>
+            <p:ph idx="101" type="title" hasCustomPrompt="1"/>
+          </p:nvPr>
+        </p:nvSpPr>
+        <p:spPr>
+          <a:xfrm>
+            <a:off x="731520" y="1097280"/>
+            <a:ext cx="4114800" cy="2743200"/>
+          </a:xfrm>
+          <a:prstGeom prst="rect">
+            <a:avLst/>
+          </a:prstGeom>
+          <a:noFill/>
+          <a:ln/>
+        </p:spPr>
+        <p:txBody>
+          <a:bodyPr wrap="square" lIns="0" tIns="0" rIns="0" bIns="0" rtlCol="0" anchor="t"/>
+          <a:lstStyle/>
+          <a:p>
+            <a:pPr algn="l" indent="0" marL="0">
+              <a:buNone/>
+            </a:pPr>
+            <a:r>
+              <a:rPr lang="en-US" sz="3600" b="1" dirty="0">
+                <a:solidFill>
+                  <a:schemeClr val="bg1"/>
+                </a:solidFill>
+              </a:rPr>
               <a:t>¿Este sábado planificás tu semana con nosotros?</a:t>
             </a:r>
             <a:endParaRPr lang="en-US" sz="3600" dirty="0"/>
@@ -3977,14 +6429,14 @@
       </p:sp>
       <p:sp>
         <p:nvSpPr>
-          <p:cNvPr id="4" name="Recordatorio"/>
+          <p:cNvPr id="4" name="Frase central"/>
           <p:cNvSpPr txBox="1"/>
           <p:nvPr/>
         </p:nvSpPr>
         <p:spPr>
           <a:xfrm>
-            <a:off x="731520" y="4160520"/>
-            <a:ext cx="4114800" cy="914400"/>
+            <a:off x="731520" y="4069080"/>
+            <a:ext cx="4114800" cy="1005840"/>
           </a:xfrm>
           <a:prstGeom prst="rect">
             <a:avLst/>
@@ -4005,7 +6457,7 @@
                   <a:schemeClr val="accent2"/>
                 </a:solidFill>
               </a:rPr>
-              <a:t>USD 35 por mes para las primeras 20 personas.</a:t>
+              <a:t>Organizate y concentrate, y todo lo demás se vuelve más fácil.</a:t>
             </a:r>
             <a:endParaRPr lang="en-US" sz="2000" dirty="0"/>
           </a:p>
@@ -4293,53 +6745,205 @@
           <p:cNvPr id="2" name="Text 0"/>
           <p:cNvSpPr/>
           <p:nvPr>
+            <p:ph idx="100" type="body" hasCustomPrompt="1"/>
+          </p:nvPr>
+        </p:nvSpPr>
+        <p:spPr>
+          <a:xfrm>
+            <a:off x="731520" y="685800"/>
+            <a:ext cx="10728655" cy="365760"/>
+          </a:xfrm>
+          <a:prstGeom prst="rect">
+            <a:avLst/>
+          </a:prstGeom>
+          <a:noFill/>
+          <a:ln/>
+        </p:spPr>
+        <p:txBody>
+          <a:bodyPr wrap="square" lIns="0" tIns="0" rIns="0" bIns="0" rtlCol="0" anchor="ctr"/>
+          <a:lstStyle/>
+          <a:p>
+            <a:pPr indent="0" marL="0">
+              <a:buNone/>
+            </a:pPr>
+            <a:r>
+              <a:rPr lang="en-US" sz="1400" b="1" spc="300" kern="0" dirty="0">
+                <a:solidFill>
+                  <a:schemeClr val="accent1"/>
+                </a:solidFill>
+              </a:rPr>
+              <a:t>TODO LO QUE HAY ADENTRO</a:t>
+            </a:r>
+            <a:endParaRPr lang="en-US" sz="1400" dirty="0"/>
+          </a:p>
+        </p:txBody>
+      </p:sp>
+      <p:sp>
+        <p:nvSpPr>
+          <p:cNvPr id="3" name="Text 0"/>
+          <p:cNvSpPr/>
+          <p:nvPr>
             <p:ph idx="101" type="title" hasCustomPrompt="1"/>
           </p:nvPr>
         </p:nvSpPr>
         <p:spPr>
           <a:xfrm>
-            <a:off x="1280160" y="2057400"/>
-            <a:ext cx="9631375" cy="1920240"/>
-          </a:xfrm>
-          <a:prstGeom prst="rect">
-            <a:avLst/>
-          </a:prstGeom>
-          <a:noFill/>
-          <a:ln/>
-        </p:spPr>
-        <p:txBody>
-          <a:bodyPr wrap="square" lIns="0" tIns="0" rIns="0" bIns="0" rtlCol="0" anchor="ctr"/>
-          <a:lstStyle/>
-          <a:p>
-            <a:pPr algn="ctr" indent="0" marL="0">
-              <a:buNone/>
-            </a:pPr>
-            <a:r>
-              <a:rPr lang="en-US" sz="4800" b="1" dirty="0">
-                <a:solidFill>
-                  <a:schemeClr val="bg1"/>
-                </a:solidFill>
-              </a:rPr>
-              <a:t>¿Querés que te muestre cómo lo hacemos todas las semanas?</a:t>
-            </a:r>
-            <a:endParaRPr lang="en-US" sz="4800" dirty="0"/>
-          </a:p>
-        </p:txBody>
-      </p:sp>
-      <p:sp>
-        <p:nvSpPr>
-          <p:cNvPr id="3" name="Pedido al chat"/>
-          <p:cNvSpPr/>
-          <p:nvPr/>
-        </p:nvSpPr>
-        <p:spPr>
-          <a:xfrm>
-            <a:off x="3992728" y="4343400"/>
-            <a:ext cx="4206240" cy="685800"/>
+            <a:off x="731520" y="1097280"/>
+            <a:ext cx="10728655" cy="1005840"/>
+          </a:xfrm>
+          <a:prstGeom prst="rect">
+            <a:avLst/>
+          </a:prstGeom>
+          <a:noFill/>
+          <a:ln/>
+        </p:spPr>
+        <p:txBody>
+          <a:bodyPr wrap="square" lIns="0" tIns="0" rIns="0" bIns="0" rtlCol="0" anchor="t"/>
+          <a:lstStyle/>
+          <a:p>
+            <a:pPr algn="l" indent="0" marL="0">
+              <a:buNone/>
+            </a:pPr>
+            <a:r>
+              <a:rPr lang="en-US" sz="4000" b="1" dirty="0">
+                <a:solidFill>
+                  <a:schemeClr val="tx1"/>
+                </a:solidFill>
+              </a:rPr>
+              <a:t>El Instituto completo</a:t>
+            </a:r>
+            <a:endParaRPr lang="en-US" sz="4000" dirty="0"/>
+          </a:p>
+        </p:txBody>
+      </p:sp>
+      <p:sp>
+        <p:nvSpPr>
+          <p:cNvPr id="4" name="Frase 1"/>
+          <p:cNvSpPr txBox="1"/>
+          <p:nvPr/>
+        </p:nvSpPr>
+        <p:spPr>
+          <a:xfrm>
+            <a:off x="731520" y="2240280"/>
+            <a:ext cx="4114800" cy="548640"/>
+          </a:xfrm>
+          <a:prstGeom prst="rect">
+            <a:avLst/>
+          </a:prstGeom>
+          <a:noFill/>
+          <a:ln/>
+        </p:spPr>
+        <p:txBody>
+          <a:bodyPr wrap="square" lIns="0" tIns="0" rIns="0" bIns="0" rtlCol="0" anchor="t"/>
+          <a:lstStyle/>
+          <a:p>
+            <a:pPr indent="0" marL="0">
+              <a:buNone/>
+            </a:pPr>
+            <a:r>
+              <a:rPr lang="en-US" sz="2600" b="1" dirty="0">
+                <a:solidFill>
+                  <a:schemeClr val="tx1"/>
+                </a:solidFill>
+                <a:latin typeface="Montserrat" pitchFamily="34" charset="0"/>
+                <a:ea typeface="Montserrat" pitchFamily="34" charset="-122"/>
+                <a:cs typeface="Montserrat" pitchFamily="34" charset="-120"/>
+              </a:rPr>
+              <a:t>Podés con todo.</a:t>
+            </a:r>
+            <a:endParaRPr lang="en-US" sz="2600" dirty="0"/>
+          </a:p>
+        </p:txBody>
+      </p:sp>
+      <p:sp>
+        <p:nvSpPr>
+          <p:cNvPr id="5" name="Frase 2"/>
+          <p:cNvSpPr txBox="1"/>
+          <p:nvPr/>
+        </p:nvSpPr>
+        <p:spPr>
+          <a:xfrm>
+            <a:off x="731520" y="2788920"/>
+            <a:ext cx="4114800" cy="914400"/>
+          </a:xfrm>
+          <a:prstGeom prst="rect">
+            <a:avLst/>
+          </a:prstGeom>
+          <a:noFill/>
+          <a:ln/>
+        </p:spPr>
+        <p:txBody>
+          <a:bodyPr wrap="square" lIns="0" tIns="0" rIns="0" bIns="0" rtlCol="0" anchor="t"/>
+          <a:lstStyle/>
+          <a:p>
+            <a:pPr indent="0" marL="0">
+              <a:buNone/>
+            </a:pPr>
+            <a:r>
+              <a:rPr lang="en-US" sz="2600" b="1" dirty="0">
+                <a:solidFill>
+                  <a:schemeClr val="accent1"/>
+                </a:solidFill>
+                <a:latin typeface="Montserrat" pitchFamily="34" charset="0"/>
+                <a:ea typeface="Montserrat" pitchFamily="34" charset="-122"/>
+                <a:cs typeface="Montserrat" pitchFamily="34" charset="-120"/>
+              </a:rPr>
+              <a:t>Pero no con todo al mismo tiempo.</a:t>
+            </a:r>
+            <a:endParaRPr lang="en-US" sz="2600" dirty="0"/>
+          </a:p>
+        </p:txBody>
+      </p:sp>
+      <p:sp>
+        <p:nvSpPr>
+          <p:cNvPr id="6" name="Primer paso"/>
+          <p:cNvSpPr txBox="1"/>
+          <p:nvPr/>
+        </p:nvSpPr>
+        <p:spPr>
+          <a:xfrm>
+            <a:off x="731520" y="3977640"/>
+            <a:ext cx="4114800" cy="1097280"/>
+          </a:xfrm>
+          <a:prstGeom prst="rect">
+            <a:avLst/>
+          </a:prstGeom>
+          <a:noFill/>
+          <a:ln/>
+        </p:spPr>
+        <p:txBody>
+          <a:bodyPr wrap="square" lIns="0" tIns="0" rIns="0" bIns="0" rtlCol="0" anchor="t"/>
+          <a:lstStyle/>
+          <a:p>
+            <a:pPr indent="0" marL="0">
+              <a:buNone/>
+            </a:pPr>
+            <a:r>
+              <a:rPr lang="en-US" sz="1800" dirty="0">
+                <a:solidFill>
+                  <a:schemeClr val="accent3"/>
+                </a:solidFill>
+              </a:rPr>
+              <a:t>El primer paso es el único que depende de vos. Todo lo demás lo hacemos juntos.</a:t>
+            </a:r>
+            <a:endParaRPr lang="en-US" sz="1800" dirty="0"/>
+          </a:p>
+        </p:txBody>
+      </p:sp>
+      <p:sp>
+        <p:nvSpPr>
+          <p:cNvPr id="7" name="Escalón 1"/>
+          <p:cNvSpPr/>
+          <p:nvPr/>
+        </p:nvSpPr>
+        <p:spPr>
+          <a:xfrm>
+            <a:off x="5074920" y="4160520"/>
+            <a:ext cx="2103120" cy="1737360"/>
           </a:xfrm>
           <a:prstGeom prst="roundRect">
             <a:avLst>
-              <a:gd name="adj" fmla="val 50000"/>
+              <a:gd name="adj" fmla="val 9474"/>
             </a:avLst>
           </a:prstGeom>
           <a:solidFill>
@@ -4355,14 +6959,155 @@
       </p:sp>
       <p:sp>
         <p:nvSpPr>
-          <p:cNvPr id="4" name="Pedido al chat (texto)"/>
+          <p:cNvPr id="8" name="Escalón 1 número"/>
           <p:cNvSpPr txBox="1"/>
           <p:nvPr/>
         </p:nvSpPr>
         <p:spPr>
           <a:xfrm>
-            <a:off x="3992728" y="4343400"/>
-            <a:ext cx="4206240" cy="685800"/>
+            <a:off x="5303520" y="4343400"/>
+            <a:ext cx="548640" cy="411480"/>
+          </a:xfrm>
+          <a:prstGeom prst="rect">
+            <a:avLst/>
+          </a:prstGeom>
+          <a:noFill/>
+          <a:ln/>
+        </p:spPr>
+        <p:txBody>
+          <a:bodyPr wrap="square" lIns="0" tIns="0" rIns="0" bIns="0" rtlCol="0" anchor="t"/>
+          <a:lstStyle/>
+          <a:p>
+            <a:pPr indent="0" marL="0">
+              <a:buNone/>
+            </a:pPr>
+            <a:r>
+              <a:rPr lang="en-US" sz="2400" b="1" dirty="0">
+                <a:solidFill>
+                  <a:schemeClr val="bg1"/>
+                </a:solidFill>
+                <a:latin typeface="Montserrat" pitchFamily="34" charset="0"/>
+                <a:ea typeface="Montserrat" pitchFamily="34" charset="-122"/>
+                <a:cs typeface="Montserrat" pitchFamily="34" charset="-120"/>
+              </a:rPr>
+              <a:t>1</a:t>
+            </a:r>
+            <a:endParaRPr lang="en-US" sz="2400" dirty="0"/>
+          </a:p>
+        </p:txBody>
+      </p:sp>
+      <p:sp>
+        <p:nvSpPr>
+          <p:cNvPr id="9" name="Escalón 1 nombre"/>
+          <p:cNvSpPr txBox="1"/>
+          <p:nvPr/>
+        </p:nvSpPr>
+        <p:spPr>
+          <a:xfrm>
+            <a:off x="5303520" y="4754880"/>
+            <a:ext cx="1737360" cy="685800"/>
+          </a:xfrm>
+          <a:prstGeom prst="rect">
+            <a:avLst/>
+          </a:prstGeom>
+          <a:noFill/>
+          <a:ln/>
+        </p:spPr>
+        <p:txBody>
+          <a:bodyPr wrap="square" lIns="0" tIns="0" rIns="0" bIns="0" rtlCol="0" anchor="t"/>
+          <a:lstStyle/>
+          <a:p>
+            <a:pPr indent="0" marL="0">
+              <a:buNone/>
+            </a:pPr>
+            <a:r>
+              <a:rPr lang="en-US" sz="1600" b="1" dirty="0">
+                <a:solidFill>
+                  <a:schemeClr val="bg1"/>
+                </a:solidFill>
+                <a:latin typeface="Montserrat" pitchFamily="34" charset="0"/>
+                <a:ea typeface="Montserrat" pitchFamily="34" charset="-122"/>
+                <a:cs typeface="Montserrat" pitchFamily="34" charset="-120"/>
+              </a:rPr>
+              <a:t>Comunidad Productiva</a:t>
+            </a:r>
+            <a:endParaRPr lang="en-US" sz="1600" dirty="0"/>
+          </a:p>
+        </p:txBody>
+      </p:sp>
+      <p:sp>
+        <p:nvSpPr>
+          <p:cNvPr id="10" name="Escalón 1 detalle"/>
+          <p:cNvSpPr txBox="1"/>
+          <p:nvPr/>
+        </p:nvSpPr>
+        <p:spPr>
+          <a:xfrm>
+            <a:off x="5303520" y="5422392"/>
+            <a:ext cx="1737360" cy="365760"/>
+          </a:xfrm>
+          <a:prstGeom prst="rect">
+            <a:avLst/>
+          </a:prstGeom>
+          <a:noFill/>
+          <a:ln/>
+        </p:spPr>
+        <p:txBody>
+          <a:bodyPr wrap="square" lIns="0" tIns="0" rIns="0" bIns="0" rtlCol="0" anchor="t"/>
+          <a:lstStyle/>
+          <a:p>
+            <a:pPr indent="0" marL="0">
+              <a:buNone/>
+            </a:pPr>
+            <a:r>
+              <a:rPr lang="en-US" sz="1300" dirty="0">
+                <a:solidFill>
+                  <a:schemeClr val="bg1"/>
+                </a:solidFill>
+              </a:rPr>
+              <a:t>Las bases</a:t>
+            </a:r>
+            <a:endParaRPr lang="en-US" sz="1300" dirty="0"/>
+          </a:p>
+        </p:txBody>
+      </p:sp>
+      <p:sp>
+        <p:nvSpPr>
+          <p:cNvPr id="11" name="Hoy"/>
+          <p:cNvSpPr/>
+          <p:nvPr/>
+        </p:nvSpPr>
+        <p:spPr>
+          <a:xfrm>
+            <a:off x="6217920" y="4343400"/>
+            <a:ext cx="777240" cy="329184"/>
+          </a:xfrm>
+          <a:prstGeom prst="roundRect">
+            <a:avLst>
+              <a:gd name="adj" fmla="val 50000"/>
+            </a:avLst>
+          </a:prstGeom>
+          <a:solidFill>
+            <a:schemeClr val="bg1"/>
+          </a:solidFill>
+          <a:ln w="12700">
+            <a:solidFill>
+              <a:schemeClr val="bg1"/>
+            </a:solidFill>
+            <a:prstDash val="solid"/>
+          </a:ln>
+        </p:spPr>
+      </p:sp>
+      <p:sp>
+        <p:nvSpPr>
+          <p:cNvPr id="12" name="Hoy (texto)"/>
+          <p:cNvSpPr txBox="1"/>
+          <p:nvPr/>
+        </p:nvSpPr>
+        <p:spPr>
+          <a:xfrm>
+            <a:off x="6217920" y="4343400"/>
+            <a:ext cx="777240" cy="329184"/>
           </a:xfrm>
           <a:prstGeom prst="rect">
             <a:avLst/>
@@ -4378,29 +7123,102 @@
               <a:buNone/>
             </a:pPr>
             <a:r>
-              <a:rPr lang="en-US" sz="1800" b="1" spc="200" kern="0" dirty="0">
-                <a:solidFill>
-                  <a:schemeClr val="bg1"/>
-                </a:solidFill>
-              </a:rPr>
-              <a:t>PONÉ SÍ EN EL CHAT</a:t>
-            </a:r>
-            <a:endParaRPr lang="en-US" sz="1800" dirty="0"/>
-          </a:p>
-        </p:txBody>
-      </p:sp>
-      <p:sp>
-        <p:nvSpPr>
-          <p:cNvPr id="6" name="Text 0"/>
-          <p:cNvSpPr/>
-          <p:nvPr>
-            <p:ph idx="100" type="body" hasCustomPrompt="1"/>
-          </p:nvPr>
-        </p:nvSpPr>
-        <p:spPr>
-          <a:xfrm>
-            <a:off x="731520" y="1554480"/>
-            <a:ext cx="10728655" cy="365760"/>
+              <a:rPr lang="en-US" sz="1100" b="1" spc="200" kern="0" dirty="0">
+                <a:solidFill>
+                  <a:schemeClr val="accent1"/>
+                </a:solidFill>
+              </a:rPr>
+              <a:t>HOY</a:t>
+            </a:r>
+            <a:endParaRPr lang="en-US" sz="1100" dirty="0"/>
+          </a:p>
+        </p:txBody>
+      </p:sp>
+      <p:pic>
+        <p:nvPicPr>
+          <p:cNvPr id="13" name="Escalón 2 (borroso)" descr="Escalón 2 del Instituto, todavía bloqueado">    </p:cNvPr>
+          <p:cNvPicPr>
+            <a:picLocks noChangeAspect="1"/>
+          </p:cNvPicPr>
+          <p:nvPr/>
+        </p:nvPicPr>
+        <p:blipFill>
+          <a:blip r:embed="rId1"/>
+          <a:stretch>
+            <a:fillRect/>
+          </a:stretch>
+        </p:blipFill>
+        <p:spPr>
+          <a:xfrm>
+            <a:off x="7059168" y="2926080"/>
+            <a:ext cx="2560320" cy="3200400"/>
+          </a:xfrm>
+          <a:prstGeom prst="rect">
+            <a:avLst/>
+          </a:prstGeom>
+        </p:spPr>
+      </p:pic>
+      <p:pic>
+        <p:nvPicPr>
+          <p:cNvPr id="14" name="Escalón 3 (borroso)" descr="Escalón 3 del Instituto, todavía bloqueado">    </p:cNvPr>
+          <p:cNvPicPr>
+            <a:picLocks noChangeAspect="1"/>
+          </p:cNvPicPr>
+          <p:nvPr/>
+        </p:nvPicPr>
+        <p:blipFill>
+          <a:blip r:embed="rId2"/>
+          <a:stretch>
+            <a:fillRect/>
+          </a:stretch>
+        </p:blipFill>
+        <p:spPr>
+          <a:xfrm>
+            <a:off x="9272016" y="1920240"/>
+            <a:ext cx="2560320" cy="4206240"/>
+          </a:xfrm>
+          <a:prstGeom prst="rect">
+            <a:avLst/>
+          </a:prstGeom>
+        </p:spPr>
+      </p:pic>
+      <p:sp>
+        <p:nvSpPr>
+          <p:cNvPr id="15" name="Espacio Mini Nico"/>
+          <p:cNvSpPr/>
+          <p:nvPr/>
+        </p:nvSpPr>
+        <p:spPr>
+          <a:xfrm>
+            <a:off x="5074920" y="2148840"/>
+            <a:ext cx="2103120" cy="1874520"/>
+          </a:xfrm>
+          <a:prstGeom prst="roundRect">
+            <a:avLst>
+              <a:gd name="adj" fmla="val 8780"/>
+            </a:avLst>
+          </a:prstGeom>
+          <a:solidFill>
+            <a:schemeClr val="bg2"/>
+          </a:solidFill>
+          <a:ln w="19050">
+            <a:solidFill>
+              <a:schemeClr val="accent3"/>
+            </a:solidFill>
+            <a:prstDash val="dash"/>
+          </a:ln>
+        </p:spPr>
+      </p:sp>
+      <p:sp>
+        <p:nvSpPr>
+          <p:cNvPr id="16" name="Espacio Mini Nico (texto)"/>
+          <p:cNvSpPr txBox="1"/>
+          <p:nvPr/>
+        </p:nvSpPr>
+        <p:spPr>
+          <a:xfrm>
+            <a:off x="5349240" y="2148840"/>
+            <a:ext cx="1554480" cy="1874520"/>
           </a:xfrm>
           <a:prstGeom prst="rect">
             <a:avLst/>
@@ -4415,37 +7233,29 @@
             <a:pPr algn="ctr" indent="0" marL="0">
               <a:buNone/>
             </a:pPr>
-            <a:endParaRPr lang="en-US" sz="1400" dirty="0"/>
-          </a:p>
-        </p:txBody>
-      </p:sp>
-      <p:sp>
-        <p:nvSpPr>
-          <p:cNvPr id="7" name="Text 0"/>
-          <p:cNvSpPr/>
-          <p:nvPr>
-            <p:ph idx="102" type="body" hasCustomPrompt="1"/>
-          </p:nvPr>
-        </p:nvSpPr>
-        <p:spPr>
-          <a:xfrm>
-            <a:off x="1645920" y="4114800"/>
-            <a:ext cx="8899855" cy="914400"/>
-          </a:xfrm>
-          <a:prstGeom prst="rect">
-            <a:avLst/>
-          </a:prstGeom>
-          <a:noFill/>
-          <a:ln/>
-        </p:spPr>
-        <p:txBody>
-          <a:bodyPr wrap="square" lIns="0" tIns="0" rIns="0" bIns="0" rtlCol="0" anchor="t"/>
-          <a:lstStyle/>
+            <a:r>
+              <a:rPr lang="en-US" sz="1300" b="1" spc="200" kern="0" dirty="0">
+                <a:solidFill>
+                  <a:schemeClr val="accent3"/>
+                </a:solidFill>
+              </a:rPr>
+              <a:t>MINI NICO</a:t>
+            </a:r>
+            <a:endParaRPr lang="en-US" sz="1300" dirty="0"/>
+          </a:p>
           <a:p>
             <a:pPr algn="ctr" indent="0" marL="0">
               <a:buNone/>
             </a:pPr>
-            <a:endParaRPr lang="en-US" sz="2200" dirty="0"/>
+            <a:r>
+              <a:rPr lang="en-US" sz="1300" b="1" spc="200" kern="0" dirty="0">
+                <a:solidFill>
+                  <a:schemeClr val="accent3"/>
+                </a:solidFill>
+              </a:rPr>
+              <a:t>subiendo el primer escalón</a:t>
+            </a:r>
+            <a:endParaRPr lang="en-US" sz="1300" dirty="0"/>
           </a:p>
         </p:txBody>
       </p:sp>
@@ -4506,7 +7316,7 @@
                   <a:schemeClr val="accent1"/>
                 </a:solidFill>
               </a:rPr>
-              <a:t>TU PRIMER PASO</a:t>
+              <a:t>AHORA YA LO SABÉS</a:t>
             </a:r>
             <a:endParaRPr lang="en-US" sz="1400" dirty="0"/>
           </a:p>
@@ -4523,7 +7333,7 @@
         <p:spPr>
           <a:xfrm>
             <a:off x="731520" y="1097280"/>
-            <a:ext cx="10728655" cy="1005840"/>
+            <a:ext cx="10728655" cy="1371600"/>
           </a:xfrm>
           <a:prstGeom prst="rect">
             <a:avLst/>
@@ -4541,10 +7351,10 @@
             <a:r>
               <a:rPr lang="en-US" sz="4000" b="1" dirty="0">
                 <a:solidFill>
-                  <a:schemeClr val="tx1"/>
-                </a:solidFill>
-              </a:rPr>
-              <a:t>Una cosa a la vez</a:t>
+                  <a:schemeClr val="bg1"/>
+                </a:solidFill>
+              </a:rPr>
+              <a:t>Hay dos tipos de personas</a:t>
             </a:r>
             <a:endParaRPr lang="en-US" sz="4000" dirty="0"/>
           </a:p>
@@ -4552,90 +7362,120 @@
       </p:sp>
       <p:sp>
         <p:nvSpPr>
-          <p:cNvPr id="4" name="Texto"/>
-          <p:cNvSpPr txBox="1"/>
-          <p:nvPr/>
-        </p:nvSpPr>
-        <p:spPr>
-          <a:xfrm>
-            <a:off x="731520" y="2148840"/>
-            <a:ext cx="4023360" cy="1371600"/>
-          </a:xfrm>
-          <a:prstGeom prst="rect">
-            <a:avLst/>
-          </a:prstGeom>
-          <a:noFill/>
-          <a:ln/>
-        </p:spPr>
-        <p:txBody>
-          <a:bodyPr wrap="square" lIns="0" tIns="0" rIns="0" bIns="0" rtlCol="0" anchor="t"/>
-          <a:lstStyle/>
-          <a:p>
-            <a:pPr indent="0" marL="0">
-              <a:buNone/>
-            </a:pPr>
-            <a:r>
-              <a:rPr lang="en-US" sz="2000" dirty="0">
-                <a:solidFill>
-                  <a:schemeClr val="tx1"/>
-                </a:solidFill>
-              </a:rPr>
-              <a:t>Delegar, crecer o cuidar tu salud dependen de algo previo: ordenar tu semana.</a:t>
-            </a:r>
-            <a:endParaRPr lang="en-US" sz="2000" dirty="0"/>
-          </a:p>
-        </p:txBody>
-      </p:sp>
-      <p:sp>
-        <p:nvSpPr>
-          <p:cNvPr id="5" name="Remate"/>
-          <p:cNvSpPr txBox="1"/>
-          <p:nvPr/>
-        </p:nvSpPr>
-        <p:spPr>
-          <a:xfrm>
-            <a:off x="731520" y="3611880"/>
-            <a:ext cx="4023360" cy="914400"/>
-          </a:xfrm>
-          <a:prstGeom prst="rect">
-            <a:avLst/>
-          </a:prstGeom>
-          <a:noFill/>
-          <a:ln/>
-        </p:spPr>
-        <p:txBody>
-          <a:bodyPr wrap="square" lIns="0" tIns="0" rIns="0" bIns="0" rtlCol="0" anchor="t"/>
-          <a:lstStyle/>
-          <a:p>
-            <a:pPr indent="0" marL="0">
-              <a:buNone/>
-            </a:pPr>
-            <a:r>
-              <a:rPr lang="en-US" sz="2000" b="1" dirty="0">
-                <a:solidFill>
-                  <a:schemeClr val="tx1"/>
-                </a:solidFill>
-              </a:rPr>
-              <a:t>Se arranca por ahí, bien hecho y acompañado.</a:t>
-            </a:r>
-            <a:endParaRPr lang="en-US" sz="2000" dirty="0"/>
-          </a:p>
-        </p:txBody>
-      </p:sp>
-      <p:sp>
-        <p:nvSpPr>
-          <p:cNvPr id="6" name="Escalón 1"/>
-          <p:cNvSpPr/>
-          <p:nvPr/>
-        </p:nvSpPr>
-        <p:spPr>
-          <a:xfrm>
-            <a:off x="5074920" y="4160520"/>
-            <a:ext cx="2103120" cy="1737360"/>
+          <p:cNvPr id="4" name="Tipo 1"/>
+          <p:cNvSpPr/>
+          <p:nvPr/>
+        </p:nvSpPr>
+        <p:spPr>
+          <a:xfrm>
+            <a:off x="731520" y="2331720"/>
+            <a:ext cx="5181448" cy="2651760"/>
           </a:xfrm>
           <a:prstGeom prst="roundRect">
             <a:avLst>
-              <a:gd name="adj" fmla="val 9474"/>
+              <a:gd name="adj" fmla="val 6207"/>
+            </a:avLst>
+          </a:prstGeom>
+          <a:solidFill>
+            <a:schemeClr val="tx2"/>
+          </a:solidFill>
+          <a:ln w="12700">
+            <a:solidFill>
+              <a:schemeClr val="tx2"/>
+            </a:solidFill>
+            <a:prstDash val="solid"/>
+          </a:ln>
+        </p:spPr>
+      </p:sp>
+      <p:sp>
+        <p:nvSpPr>
+          <p:cNvPr id="5" name="Tipo 1 etiqueta"/>
+          <p:cNvSpPr txBox="1"/>
+          <p:nvPr/>
+        </p:nvSpPr>
+        <p:spPr>
+          <a:xfrm>
+            <a:off x="1143000" y="2743200"/>
+            <a:ext cx="4358488" cy="365760"/>
+          </a:xfrm>
+          <a:prstGeom prst="rect">
+            <a:avLst/>
+          </a:prstGeom>
+          <a:noFill/>
+          <a:ln/>
+        </p:spPr>
+        <p:txBody>
+          <a:bodyPr wrap="square" lIns="0" tIns="0" rIns="0" bIns="0" rtlCol="0" anchor="t"/>
+          <a:lstStyle/>
+          <a:p>
+            <a:pPr indent="0" marL="0">
+              <a:buNone/>
+            </a:pPr>
+            <a:r>
+              <a:rPr lang="en-US" sz="1400" b="1" spc="300" kern="0" dirty="0">
+                <a:solidFill>
+                  <a:schemeClr val="accent2"/>
+                </a:solidFill>
+              </a:rPr>
+              <a:t>SOLAS</a:t>
+            </a:r>
+            <a:endParaRPr lang="en-US" sz="1400" dirty="0"/>
+          </a:p>
+        </p:txBody>
+      </p:sp>
+      <p:sp>
+        <p:nvSpPr>
+          <p:cNvPr id="6" name="Tipo 1 texto"/>
+          <p:cNvSpPr txBox="1"/>
+          <p:nvPr/>
+        </p:nvSpPr>
+        <p:spPr>
+          <a:xfrm>
+            <a:off x="1143000" y="3246120"/>
+            <a:ext cx="4358488" cy="1463040"/>
+          </a:xfrm>
+          <a:prstGeom prst="rect">
+            <a:avLst/>
+          </a:prstGeom>
+          <a:noFill/>
+          <a:ln/>
+        </p:spPr>
+        <p:txBody>
+          <a:bodyPr wrap="square" lIns="0" tIns="0" rIns="0" bIns="0" rtlCol="0" anchor="t"/>
+          <a:lstStyle/>
+          <a:p>
+            <a:pPr indent="0" marL="0">
+              <a:buNone/>
+            </a:pPr>
+            <a:r>
+              <a:rPr lang="en-US" sz="2400" b="1" dirty="0">
+                <a:solidFill>
+                  <a:schemeClr val="bg1"/>
+                </a:solidFill>
+                <a:latin typeface="Montserrat" pitchFamily="34" charset="0"/>
+                <a:ea typeface="Montserrat" pitchFamily="34" charset="-122"/>
+                <a:cs typeface="Montserrat" pitchFamily="34" charset="-120"/>
+              </a:rPr>
+              <a:t>Las que agarran estos conceptos y lo intentan solas, como venían haciendo.</a:t>
+            </a:r>
+            <a:endParaRPr lang="en-US" sz="2400" dirty="0"/>
+          </a:p>
+        </p:txBody>
+      </p:sp>
+      <p:sp>
+        <p:nvSpPr>
+          <p:cNvPr id="7" name="Tipo 2"/>
+          <p:cNvSpPr/>
+          <p:nvPr/>
+        </p:nvSpPr>
+        <p:spPr>
+          <a:xfrm>
+            <a:off x="6278728" y="2331720"/>
+            <a:ext cx="5181448" cy="2651760"/>
+          </a:xfrm>
+          <a:prstGeom prst="roundRect">
+            <a:avLst>
+              <a:gd name="adj" fmla="val 6207"/>
             </a:avLst>
           </a:prstGeom>
           <a:solidFill>
@@ -4651,14 +7491,50 @@
       </p:sp>
       <p:sp>
         <p:nvSpPr>
-          <p:cNvPr id="7" name="Escalón 1 número"/>
+          <p:cNvPr id="8" name="Tipo 2 etiqueta"/>
           <p:cNvSpPr txBox="1"/>
           <p:nvPr/>
         </p:nvSpPr>
         <p:spPr>
           <a:xfrm>
-            <a:off x="5303520" y="4361688"/>
-            <a:ext cx="548640" cy="411480"/>
+            <a:off x="6690208" y="2743200"/>
+            <a:ext cx="4358488" cy="365760"/>
+          </a:xfrm>
+          <a:prstGeom prst="rect">
+            <a:avLst/>
+          </a:prstGeom>
+          <a:noFill/>
+          <a:ln/>
+        </p:spPr>
+        <p:txBody>
+          <a:bodyPr wrap="square" lIns="0" tIns="0" rIns="0" bIns="0" rtlCol="0" anchor="t"/>
+          <a:lstStyle/>
+          <a:p>
+            <a:pPr indent="0" marL="0">
+              <a:buNone/>
+            </a:pPr>
+            <a:r>
+              <a:rPr lang="en-US" sz="1400" b="1" spc="300" kern="0" dirty="0">
+                <a:solidFill>
+                  <a:schemeClr val="bg1"/>
+                </a:solidFill>
+              </a:rPr>
+              <a:t>ACOMPAÑADAS</a:t>
+            </a:r>
+            <a:endParaRPr lang="en-US" sz="1400" dirty="0"/>
+          </a:p>
+        </p:txBody>
+      </p:sp>
+      <p:sp>
+        <p:nvSpPr>
+          <p:cNvPr id="9" name="Tipo 2 texto"/>
+          <p:cNvSpPr txBox="1"/>
+          <p:nvPr/>
+        </p:nvSpPr>
+        <p:spPr>
+          <a:xfrm>
+            <a:off x="6690208" y="3246120"/>
+            <a:ext cx="4358488" cy="1463040"/>
           </a:xfrm>
           <a:prstGeom prst="rect">
             <a:avLst/>
@@ -4682,506 +7558,9 @@
                 <a:ea typeface="Montserrat" pitchFamily="34" charset="-122"/>
                 <a:cs typeface="Montserrat" pitchFamily="34" charset="-120"/>
               </a:rPr>
-              <a:t>1</a:t>
+              <a:t>Las que eligen el camino simple y lo hacen acompañadas.</a:t>
             </a:r>
             <a:endParaRPr lang="en-US" sz="2400" dirty="0"/>
-          </a:p>
-        </p:txBody>
-      </p:sp>
-      <p:sp>
-        <p:nvSpPr>
-          <p:cNvPr id="8" name="Escalón 1 nombre"/>
-          <p:cNvSpPr txBox="1"/>
-          <p:nvPr/>
-        </p:nvSpPr>
-        <p:spPr>
-          <a:xfrm>
-            <a:off x="5303520" y="4754880"/>
-            <a:ext cx="1737360" cy="685800"/>
-          </a:xfrm>
-          <a:prstGeom prst="rect">
-            <a:avLst/>
-          </a:prstGeom>
-          <a:noFill/>
-          <a:ln/>
-        </p:spPr>
-        <p:txBody>
-          <a:bodyPr wrap="square" lIns="0" tIns="0" rIns="0" bIns="0" rtlCol="0" anchor="t"/>
-          <a:lstStyle/>
-          <a:p>
-            <a:pPr indent="0" marL="0">
-              <a:buNone/>
-            </a:pPr>
-            <a:r>
-              <a:rPr lang="en-US" sz="1600" b="1" dirty="0">
-                <a:solidFill>
-                  <a:schemeClr val="bg1"/>
-                </a:solidFill>
-                <a:latin typeface="Montserrat" pitchFamily="34" charset="0"/>
-                <a:ea typeface="Montserrat" pitchFamily="34" charset="-122"/>
-                <a:cs typeface="Montserrat" pitchFamily="34" charset="-120"/>
-              </a:rPr>
-              <a:t>Las bases</a:t>
-            </a:r>
-            <a:endParaRPr lang="en-US" sz="1600" dirty="0"/>
-          </a:p>
-        </p:txBody>
-      </p:sp>
-      <p:sp>
-        <p:nvSpPr>
-          <p:cNvPr id="9" name="Escalón 1 detalle"/>
-          <p:cNvSpPr txBox="1"/>
-          <p:nvPr/>
-        </p:nvSpPr>
-        <p:spPr>
-          <a:xfrm>
-            <a:off x="5303520" y="5422392"/>
-            <a:ext cx="1737360" cy="365760"/>
-          </a:xfrm>
-          <a:prstGeom prst="rect">
-            <a:avLst/>
-          </a:prstGeom>
-          <a:noFill/>
-          <a:ln/>
-        </p:spPr>
-        <p:txBody>
-          <a:bodyPr wrap="square" lIns="0" tIns="0" rIns="0" bIns="0" rtlCol="0" anchor="t"/>
-          <a:lstStyle/>
-          <a:p>
-            <a:pPr indent="0" marL="0">
-              <a:buNone/>
-            </a:pPr>
-            <a:r>
-              <a:rPr lang="en-US" sz="1300" dirty="0">
-                <a:solidFill>
-                  <a:schemeClr val="bg1"/>
-                </a:solidFill>
-              </a:rPr>
-              <a:t>Ordenar tu semana</a:t>
-            </a:r>
-            <a:endParaRPr lang="en-US" sz="1300" dirty="0"/>
-          </a:p>
-        </p:txBody>
-      </p:sp>
-      <p:sp>
-        <p:nvSpPr>
-          <p:cNvPr id="10" name="Escalón 2"/>
-          <p:cNvSpPr/>
-          <p:nvPr/>
-        </p:nvSpPr>
-        <p:spPr>
-          <a:xfrm>
-            <a:off x="7287768" y="3154680"/>
-            <a:ext cx="2103120" cy="2743200"/>
-          </a:xfrm>
-          <a:prstGeom prst="roundRect">
-            <a:avLst>
-              <a:gd name="adj" fmla="val 7826"/>
-            </a:avLst>
-          </a:prstGeom>
-          <a:solidFill>
-            <a:schemeClr val="bg2"/>
-          </a:solidFill>
-          <a:ln w="12700">
-            <a:solidFill>
-              <a:schemeClr val="bg2"/>
-            </a:solidFill>
-            <a:prstDash val="solid"/>
-          </a:ln>
-        </p:spPr>
-      </p:sp>
-      <p:sp>
-        <p:nvSpPr>
-          <p:cNvPr id="11" name="Escalón 2 número"/>
-          <p:cNvSpPr txBox="1"/>
-          <p:nvPr/>
-        </p:nvSpPr>
-        <p:spPr>
-          <a:xfrm>
-            <a:off x="7516368" y="3355848"/>
-            <a:ext cx="548640" cy="411480"/>
-          </a:xfrm>
-          <a:prstGeom prst="rect">
-            <a:avLst/>
-          </a:prstGeom>
-          <a:noFill/>
-          <a:ln/>
-        </p:spPr>
-        <p:txBody>
-          <a:bodyPr wrap="square" lIns="0" tIns="0" rIns="0" bIns="0" rtlCol="0" anchor="t"/>
-          <a:lstStyle/>
-          <a:p>
-            <a:pPr indent="0" marL="0">
-              <a:buNone/>
-            </a:pPr>
-            <a:r>
-              <a:rPr lang="en-US" sz="2400" b="1" dirty="0">
-                <a:solidFill>
-                  <a:schemeClr val="accent1"/>
-                </a:solidFill>
-                <a:latin typeface="Montserrat" pitchFamily="34" charset="0"/>
-                <a:ea typeface="Montserrat" pitchFamily="34" charset="-122"/>
-                <a:cs typeface="Montserrat" pitchFamily="34" charset="-120"/>
-              </a:rPr>
-              <a:t>2</a:t>
-            </a:r>
-            <a:endParaRPr lang="en-US" sz="2400" dirty="0"/>
-          </a:p>
-        </p:txBody>
-      </p:sp>
-      <p:sp>
-        <p:nvSpPr>
-          <p:cNvPr id="12" name="Escalón 2 nombre"/>
-          <p:cNvSpPr txBox="1"/>
-          <p:nvPr/>
-        </p:nvSpPr>
-        <p:spPr>
-          <a:xfrm>
-            <a:off x="7516368" y="3749040"/>
-            <a:ext cx="1737360" cy="685800"/>
-          </a:xfrm>
-          <a:prstGeom prst="rect">
-            <a:avLst/>
-          </a:prstGeom>
-          <a:noFill/>
-          <a:ln/>
-        </p:spPr>
-        <p:txBody>
-          <a:bodyPr wrap="square" lIns="0" tIns="0" rIns="0" bIns="0" rtlCol="0" anchor="t"/>
-          <a:lstStyle/>
-          <a:p>
-            <a:pPr indent="0" marL="0">
-              <a:buNone/>
-            </a:pPr>
-            <a:r>
-              <a:rPr lang="en-US" sz="1600" b="1" dirty="0">
-                <a:solidFill>
-                  <a:schemeClr val="tx1"/>
-                </a:solidFill>
-                <a:latin typeface="Montserrat" pitchFamily="34" charset="0"/>
-                <a:ea typeface="Montserrat" pitchFamily="34" charset="-122"/>
-                <a:cs typeface="Montserrat" pitchFamily="34" charset="-120"/>
-              </a:rPr>
-              <a:t>Clases con expertos</a:t>
-            </a:r>
-            <a:endParaRPr lang="en-US" sz="1600" dirty="0"/>
-          </a:p>
-        </p:txBody>
-      </p:sp>
-      <p:sp>
-        <p:nvSpPr>
-          <p:cNvPr id="13" name="Escalón 2 detalle"/>
-          <p:cNvSpPr txBox="1"/>
-          <p:nvPr/>
-        </p:nvSpPr>
-        <p:spPr>
-          <a:xfrm>
-            <a:off x="7516368" y="4416552"/>
-            <a:ext cx="1737360" cy="365760"/>
-          </a:xfrm>
-          <a:prstGeom prst="rect">
-            <a:avLst/>
-          </a:prstGeom>
-          <a:noFill/>
-          <a:ln/>
-        </p:spPr>
-        <p:txBody>
-          <a:bodyPr wrap="square" lIns="0" tIns="0" rIns="0" bIns="0" rtlCol="0" anchor="t"/>
-          <a:lstStyle/>
-          <a:p>
-            <a:pPr indent="0" marL="0">
-              <a:buNone/>
-            </a:pPr>
-            <a:r>
-              <a:rPr lang="en-US" sz="1300" dirty="0">
-                <a:solidFill>
-                  <a:schemeClr val="accent3"/>
-                </a:solidFill>
-              </a:rPr>
-              <a:t>Seguimiento 1 a 1</a:t>
-            </a:r>
-            <a:endParaRPr lang="en-US" sz="1300" dirty="0"/>
-          </a:p>
-        </p:txBody>
-      </p:sp>
-      <p:sp>
-        <p:nvSpPr>
-          <p:cNvPr id="14" name="Escalón 3"/>
-          <p:cNvSpPr/>
-          <p:nvPr/>
-        </p:nvSpPr>
-        <p:spPr>
-          <a:xfrm>
-            <a:off x="9500616" y="2148840"/>
-            <a:ext cx="2103120" cy="3749040"/>
-          </a:xfrm>
-          <a:prstGeom prst="roundRect">
-            <a:avLst>
-              <a:gd name="adj" fmla="val 7826"/>
-            </a:avLst>
-          </a:prstGeom>
-          <a:solidFill>
-            <a:schemeClr val="bg2"/>
-          </a:solidFill>
-          <a:ln w="12700">
-            <a:solidFill>
-              <a:schemeClr val="bg2"/>
-            </a:solidFill>
-            <a:prstDash val="solid"/>
-          </a:ln>
-        </p:spPr>
-      </p:sp>
-      <p:sp>
-        <p:nvSpPr>
-          <p:cNvPr id="15" name="Escalón 3 número"/>
-          <p:cNvSpPr txBox="1"/>
-          <p:nvPr/>
-        </p:nvSpPr>
-        <p:spPr>
-          <a:xfrm>
-            <a:off x="9729216" y="2350008"/>
-            <a:ext cx="548640" cy="411480"/>
-          </a:xfrm>
-          <a:prstGeom prst="rect">
-            <a:avLst/>
-          </a:prstGeom>
-          <a:noFill/>
-          <a:ln/>
-        </p:spPr>
-        <p:txBody>
-          <a:bodyPr wrap="square" lIns="0" tIns="0" rIns="0" bIns="0" rtlCol="0" anchor="t"/>
-          <a:lstStyle/>
-          <a:p>
-            <a:pPr indent="0" marL="0">
-              <a:buNone/>
-            </a:pPr>
-            <a:r>
-              <a:rPr lang="en-US" sz="2400" b="1" dirty="0">
-                <a:solidFill>
-                  <a:schemeClr val="accent1"/>
-                </a:solidFill>
-                <a:latin typeface="Montserrat" pitchFamily="34" charset="0"/>
-                <a:ea typeface="Montserrat" pitchFamily="34" charset="-122"/>
-                <a:cs typeface="Montserrat" pitchFamily="34" charset="-120"/>
-              </a:rPr>
-              <a:t>3</a:t>
-            </a:r>
-            <a:endParaRPr lang="en-US" sz="2400" dirty="0"/>
-          </a:p>
-        </p:txBody>
-      </p:sp>
-      <p:sp>
-        <p:nvSpPr>
-          <p:cNvPr id="16" name="Escalón 3 nombre"/>
-          <p:cNvSpPr txBox="1"/>
-          <p:nvPr/>
-        </p:nvSpPr>
-        <p:spPr>
-          <a:xfrm>
-            <a:off x="9729216" y="2743200"/>
-            <a:ext cx="1737360" cy="685800"/>
-          </a:xfrm>
-          <a:prstGeom prst="rect">
-            <a:avLst/>
-          </a:prstGeom>
-          <a:noFill/>
-          <a:ln/>
-        </p:spPr>
-        <p:txBody>
-          <a:bodyPr wrap="square" lIns="0" tIns="0" rIns="0" bIns="0" rtlCol="0" anchor="t"/>
-          <a:lstStyle/>
-          <a:p>
-            <a:pPr indent="0" marL="0">
-              <a:buNone/>
-            </a:pPr>
-            <a:r>
-              <a:rPr lang="en-US" sz="1600" b="1" dirty="0">
-                <a:solidFill>
-                  <a:schemeClr val="tx1"/>
-                </a:solidFill>
-                <a:latin typeface="Montserrat" pitchFamily="34" charset="0"/>
-                <a:ea typeface="Montserrat" pitchFamily="34" charset="-122"/>
-                <a:cs typeface="Montserrat" pitchFamily="34" charset="-120"/>
-              </a:rPr>
-              <a:t>Proceso personalizado</a:t>
-            </a:r>
-            <a:endParaRPr lang="en-US" sz="1600" dirty="0"/>
-          </a:p>
-        </p:txBody>
-      </p:sp>
-      <p:sp>
-        <p:nvSpPr>
-          <p:cNvPr id="17" name="Escalón 3 detalle"/>
-          <p:cNvSpPr txBox="1"/>
-          <p:nvPr/>
-        </p:nvSpPr>
-        <p:spPr>
-          <a:xfrm>
-            <a:off x="9729216" y="3410712"/>
-            <a:ext cx="1737360" cy="365760"/>
-          </a:xfrm>
-          <a:prstGeom prst="rect">
-            <a:avLst/>
-          </a:prstGeom>
-          <a:noFill/>
-          <a:ln/>
-        </p:spPr>
-        <p:txBody>
-          <a:bodyPr wrap="square" lIns="0" tIns="0" rIns="0" bIns="0" rtlCol="0" anchor="t"/>
-          <a:lstStyle/>
-          <a:p>
-            <a:pPr indent="0" marL="0">
-              <a:buNone/>
-            </a:pPr>
-            <a:r>
-              <a:rPr lang="en-US" sz="1300" dirty="0">
-                <a:solidFill>
-                  <a:schemeClr val="accent3"/>
-                </a:solidFill>
-              </a:rPr>
-              <a:t>Experto asignado 1 a 1</a:t>
-            </a:r>
-            <a:endParaRPr lang="en-US" sz="1300" dirty="0"/>
-          </a:p>
-        </p:txBody>
-      </p:sp>
-      <p:sp>
-        <p:nvSpPr>
-          <p:cNvPr id="18" name="Hoy"/>
-          <p:cNvSpPr/>
-          <p:nvPr/>
-        </p:nvSpPr>
-        <p:spPr>
-          <a:xfrm>
-            <a:off x="6217920" y="4361688"/>
-            <a:ext cx="777240" cy="329184"/>
-          </a:xfrm>
-          <a:prstGeom prst="roundRect">
-            <a:avLst>
-              <a:gd name="adj" fmla="val 50000"/>
-            </a:avLst>
-          </a:prstGeom>
-          <a:solidFill>
-            <a:schemeClr val="bg1"/>
-          </a:solidFill>
-          <a:ln w="12700">
-            <a:solidFill>
-              <a:schemeClr val="bg1"/>
-            </a:solidFill>
-            <a:prstDash val="solid"/>
-          </a:ln>
-        </p:spPr>
-      </p:sp>
-      <p:sp>
-        <p:nvSpPr>
-          <p:cNvPr id="19" name="Hoy (texto)"/>
-          <p:cNvSpPr txBox="1"/>
-          <p:nvPr/>
-        </p:nvSpPr>
-        <p:spPr>
-          <a:xfrm>
-            <a:off x="6217920" y="4361688"/>
-            <a:ext cx="777240" cy="329184"/>
-          </a:xfrm>
-          <a:prstGeom prst="rect">
-            <a:avLst/>
-          </a:prstGeom>
-          <a:noFill/>
-          <a:ln/>
-        </p:spPr>
-        <p:txBody>
-          <a:bodyPr wrap="square" lIns="0" tIns="0" rIns="0" bIns="0" rtlCol="0" anchor="ctr"/>
-          <a:lstStyle/>
-          <a:p>
-            <a:pPr algn="ctr" indent="0" marL="0">
-              <a:buNone/>
-            </a:pPr>
-            <a:r>
-              <a:rPr lang="en-US" sz="1100" b="1" spc="200" kern="0" dirty="0">
-                <a:solidFill>
-                  <a:schemeClr val="accent1"/>
-                </a:solidFill>
-              </a:rPr>
-              <a:t>HOY</a:t>
-            </a:r>
-            <a:endParaRPr lang="en-US" sz="1100" dirty="0"/>
-          </a:p>
-        </p:txBody>
-      </p:sp>
-      <p:sp>
-        <p:nvSpPr>
-          <p:cNvPr id="20" name="Espacio Mini Nico"/>
-          <p:cNvSpPr/>
-          <p:nvPr/>
-        </p:nvSpPr>
-        <p:spPr>
-          <a:xfrm>
-            <a:off x="5074920" y="2148840"/>
-            <a:ext cx="2103120" cy="1874520"/>
-          </a:xfrm>
-          <a:prstGeom prst="roundRect">
-            <a:avLst>
-              <a:gd name="adj" fmla="val 8780"/>
-            </a:avLst>
-          </a:prstGeom>
-          <a:solidFill>
-            <a:schemeClr val="bg2"/>
-          </a:solidFill>
-          <a:ln w="19050">
-            <a:solidFill>
-              <a:schemeClr val="accent3"/>
-            </a:solidFill>
-            <a:prstDash val="dash"/>
-          </a:ln>
-        </p:spPr>
-      </p:sp>
-      <p:sp>
-        <p:nvSpPr>
-          <p:cNvPr id="21" name="Espacio Mini Nico (texto)"/>
-          <p:cNvSpPr txBox="1"/>
-          <p:nvPr/>
-        </p:nvSpPr>
-        <p:spPr>
-          <a:xfrm>
-            <a:off x="5349240" y="2148840"/>
-            <a:ext cx="1554480" cy="1874520"/>
-          </a:xfrm>
-          <a:prstGeom prst="rect">
-            <a:avLst/>
-          </a:prstGeom>
-          <a:noFill/>
-          <a:ln/>
-        </p:spPr>
-        <p:txBody>
-          <a:bodyPr wrap="square" lIns="0" tIns="0" rIns="0" bIns="0" rtlCol="0" anchor="ctr"/>
-          <a:lstStyle/>
-          <a:p>
-            <a:pPr algn="ctr" indent="0" marL="0">
-              <a:buNone/>
-            </a:pPr>
-            <a:r>
-              <a:rPr lang="en-US" sz="1300" b="1" spc="200" kern="0" dirty="0">
-                <a:solidFill>
-                  <a:schemeClr val="accent3"/>
-                </a:solidFill>
-              </a:rPr>
-              <a:t>MINI NICO</a:t>
-            </a:r>
-            <a:endParaRPr lang="en-US" sz="1300" dirty="0"/>
-          </a:p>
-          <a:p>
-            <a:pPr algn="ctr" indent="0" marL="0">
-              <a:buNone/>
-            </a:pPr>
-            <a:r>
-              <a:rPr lang="en-US" sz="1300" b="1" spc="200" kern="0" dirty="0">
-                <a:solidFill>
-                  <a:schemeClr val="accent3"/>
-                </a:solidFill>
-              </a:rPr>
-              <a:t>subiendo el primer escalón</a:t>
-            </a:r>
-            <a:endParaRPr lang="en-US" sz="1300" dirty="0"/>
           </a:p>
         </p:txBody>
       </p:sp>
@@ -5210,40 +7589,119 @@
           <a:chExt cx="0" cy="0"/>
         </a:xfrm>
       </p:grpSpPr>
-      <p:pic>
-        <p:nvPicPr>
-          <p:cNvPr id="2" name="Logo" descr="Instituto de Productividad">    </p:cNvPr>
-          <p:cNvPicPr>
-            <a:picLocks noChangeAspect="1"/>
-          </p:cNvPicPr>
-          <p:nvPr/>
-        </p:nvPicPr>
-        <p:blipFill>
-          <a:blip r:embed="rId1"/>
-          <a:stretch>
-            <a:fillRect/>
-          </a:stretch>
-        </p:blipFill>
-        <p:spPr>
-          <a:xfrm>
-            <a:off x="4175608" y="1234440"/>
-            <a:ext cx="3840480" cy="781452"/>
-          </a:xfrm>
-          <a:prstGeom prst="rect">
-            <a:avLst/>
-          </a:prstGeom>
-        </p:spPr>
-      </p:pic>
-      <p:sp>
-        <p:nvSpPr>
-          <p:cNvPr id="3" name="Nombre"/>
+      <p:sp>
+        <p:nvSpPr>
+          <p:cNvPr id="2" name="Text 0"/>
+          <p:cNvSpPr/>
+          <p:nvPr>
+            <p:ph idx="100" type="body" hasCustomPrompt="1"/>
+          </p:nvPr>
+        </p:nvSpPr>
+        <p:spPr>
+          <a:xfrm>
+            <a:off x="731520" y="1325880"/>
+            <a:ext cx="10728655" cy="365760"/>
+          </a:xfrm>
+          <a:prstGeom prst="rect">
+            <a:avLst/>
+          </a:prstGeom>
+          <a:noFill/>
+          <a:ln/>
+        </p:spPr>
+        <p:txBody>
+          <a:bodyPr wrap="square" lIns="0" tIns="0" rIns="0" bIns="0" rtlCol="0" anchor="ctr"/>
+          <a:lstStyle/>
+          <a:p>
+            <a:pPr algn="ctr" indent="0" marL="0">
+              <a:buNone/>
+            </a:pPr>
+            <a:r>
+              <a:rPr lang="en-US" sz="1400" b="1" spc="300" kern="0" dirty="0">
+                <a:solidFill>
+                  <a:schemeClr val="accent1"/>
+                </a:solidFill>
+              </a:rPr>
+              <a:t>PARA ORGANIZARTE Y CONCENTRARTE</a:t>
+            </a:r>
+            <a:endParaRPr lang="en-US" sz="1400" dirty="0"/>
+          </a:p>
+        </p:txBody>
+      </p:sp>
+      <p:sp>
+        <p:nvSpPr>
+          <p:cNvPr id="3" name="Text 0"/>
+          <p:cNvSpPr/>
+          <p:nvPr>
+            <p:ph idx="101" type="title" hasCustomPrompt="1"/>
+          </p:nvPr>
+        </p:nvSpPr>
+        <p:spPr>
+          <a:xfrm>
+            <a:off x="1280160" y="1828800"/>
+            <a:ext cx="9631375" cy="2331720"/>
+          </a:xfrm>
+          <a:prstGeom prst="rect">
+            <a:avLst/>
+          </a:prstGeom>
+          <a:noFill/>
+          <a:ln/>
+        </p:spPr>
+        <p:txBody>
+          <a:bodyPr wrap="square" lIns="0" tIns="0" rIns="0" bIns="0" rtlCol="0" anchor="ctr"/>
+          <a:lstStyle/>
+          <a:p>
+            <a:pPr algn="ctr" indent="0" marL="0">
+              <a:buNone/>
+            </a:pPr>
+            <a:r>
+              <a:rPr lang="en-US" sz="4800" b="1" dirty="0">
+                <a:solidFill>
+                  <a:schemeClr val="bg1"/>
+                </a:solidFill>
+              </a:rPr>
+              <a:t>¿Querés que te muestre el único paso concreto que podés dar hoy?</a:t>
+            </a:r>
+            <a:endParaRPr lang="en-US" sz="4800" dirty="0"/>
+          </a:p>
+        </p:txBody>
+      </p:sp>
+      <p:sp>
+        <p:nvSpPr>
+          <p:cNvPr id="4" name="Pedido al chat"/>
+          <p:cNvSpPr/>
+          <p:nvPr/>
+        </p:nvSpPr>
+        <p:spPr>
+          <a:xfrm>
+            <a:off x="3901288" y="4526280"/>
+            <a:ext cx="4389120" cy="685800"/>
+          </a:xfrm>
+          <a:prstGeom prst="roundRect">
+            <a:avLst>
+              <a:gd name="adj" fmla="val 50000"/>
+            </a:avLst>
+          </a:prstGeom>
+          <a:solidFill>
+            <a:schemeClr val="accent1"/>
+          </a:solidFill>
+          <a:ln w="12700">
+            <a:solidFill>
+              <a:schemeClr val="accent1"/>
+            </a:solidFill>
+            <a:prstDash val="solid"/>
+          </a:ln>
+        </p:spPr>
+      </p:sp>
+      <p:sp>
+        <p:nvSpPr>
+          <p:cNvPr id="5" name="Pedido al chat (texto)"/>
           <p:cNvSpPr txBox="1"/>
           <p:nvPr/>
         </p:nvSpPr>
         <p:spPr>
           <a:xfrm>
-            <a:off x="731520" y="2606040"/>
-            <a:ext cx="10728655" cy="1097280"/>
+            <a:off x="3901288" y="4526280"/>
+            <a:ext cx="4389120" cy="685800"/>
           </a:xfrm>
           <a:prstGeom prst="rect">
             <a:avLst/>
@@ -5259,30 +7717,29 @@
               <a:buNone/>
             </a:pPr>
             <a:r>
-              <a:rPr lang="en-US" sz="6000" b="1" dirty="0">
+              <a:rPr lang="en-US" sz="1800" b="1" spc="200" kern="0" dirty="0">
                 <a:solidFill>
                   <a:schemeClr val="bg1"/>
                 </a:solidFill>
-                <a:latin typeface="Montserrat" pitchFamily="34" charset="0"/>
-                <a:ea typeface="Montserrat" pitchFamily="34" charset="-122"/>
-                <a:cs typeface="Montserrat" pitchFamily="34" charset="-120"/>
-              </a:rPr>
-              <a:t>Comunidad Productiva</a:t>
-            </a:r>
-            <a:endParaRPr lang="en-US" sz="6000" dirty="0"/>
-          </a:p>
-        </p:txBody>
-      </p:sp>
-      <p:sp>
-        <p:nvSpPr>
-          <p:cNvPr id="4" name="Tagline"/>
-          <p:cNvSpPr txBox="1"/>
-          <p:nvPr/>
-        </p:nvSpPr>
-        <p:spPr>
-          <a:xfrm>
-            <a:off x="731520" y="3794760"/>
-            <a:ext cx="10728655" cy="548640"/>
+              </a:rPr>
+              <a:t>ESCRIBÍ SÍ EN EL CHAT</a:t>
+            </a:r>
+            <a:endParaRPr lang="en-US" sz="1800" dirty="0"/>
+          </a:p>
+        </p:txBody>
+      </p:sp>
+      <p:sp>
+        <p:nvSpPr>
+          <p:cNvPr id="7" name="Text 0"/>
+          <p:cNvSpPr/>
+          <p:nvPr>
+            <p:ph idx="102" type="body" hasCustomPrompt="1"/>
+          </p:nvPr>
+        </p:nvSpPr>
+        <p:spPr>
+          <a:xfrm>
+            <a:off x="1645920" y="4297680"/>
+            <a:ext cx="8899855" cy="822960"/>
           </a:xfrm>
           <a:prstGeom prst="rect">
             <a:avLst/>
@@ -5297,15 +7754,7 @@
             <a:pPr algn="ctr" indent="0" marL="0">
               <a:buNone/>
             </a:pPr>
-            <a:r>
-              <a:rPr lang="en-US" sz="2600" i="1" dirty="0">
-                <a:solidFill>
-                  <a:schemeClr val="accent1"/>
-                </a:solidFill>
-              </a:rPr>
-              <a:t>Avanzá sin dejar la vida en el intento.</a:t>
-            </a:r>
-            <a:endParaRPr lang="en-US" sz="2600" dirty="0"/>
+            <a:endParaRPr lang="en-US" sz="2200" dirty="0"/>
           </a:p>
         </p:txBody>
       </p:sp>
@@ -5334,17 +7783,39 @@
           <a:chExt cx="0" cy="0"/>
         </a:xfrm>
       </p:grpSpPr>
-      <p:sp>
-        <p:nvSpPr>
-          <p:cNvPr id="2" name="Text 0"/>
-          <p:cNvSpPr/>
-          <p:nvPr>
-            <p:ph idx="100" type="body" hasCustomPrompt="1"/>
-          </p:nvPr>
-        </p:nvSpPr>
-        <p:spPr>
-          <a:xfrm>
-            <a:off x="731520" y="685800"/>
+      <p:pic>
+        <p:nvPicPr>
+          <p:cNvPr id="2" name="Logo" descr="Instituto de Productividad">    </p:cNvPr>
+          <p:cNvPicPr>
+            <a:picLocks noChangeAspect="1"/>
+          </p:cNvPicPr>
+          <p:nvPr/>
+        </p:nvPicPr>
+        <p:blipFill>
+          <a:blip r:embed="rId1"/>
+          <a:stretch>
+            <a:fillRect/>
+          </a:stretch>
+        </p:blipFill>
+        <p:spPr>
+          <a:xfrm>
+            <a:off x="4449928" y="1143000"/>
+            <a:ext cx="3291840" cy="669816"/>
+          </a:xfrm>
+          <a:prstGeom prst="rect">
+            <a:avLst/>
+          </a:prstGeom>
+        </p:spPr>
+      </p:pic>
+      <p:sp>
+        <p:nvSpPr>
+          <p:cNvPr id="3" name="Kicker"/>
+          <p:cNvSpPr txBox="1"/>
+          <p:nvPr/>
+        </p:nvSpPr>
+        <p:spPr>
+          <a:xfrm>
+            <a:off x="731520" y="2286000"/>
             <a:ext cx="10728655" cy="365760"/>
           </a:xfrm>
           <a:prstGeom prst="rect">
@@ -5354,174 +7825,73 @@
           <a:ln/>
         </p:spPr>
         <p:txBody>
+          <a:bodyPr wrap="square" lIns="0" tIns="0" rIns="0" bIns="0" rtlCol="0" anchor="t"/>
+          <a:lstStyle/>
+          <a:p>
+            <a:pPr algn="ctr" indent="0" marL="0">
+              <a:buNone/>
+            </a:pPr>
+            <a:r>
+              <a:rPr lang="en-US" sz="1500" b="1" spc="300" kern="0" dirty="0">
+                <a:solidFill>
+                  <a:schemeClr val="accent1"/>
+                </a:solidFill>
+              </a:rPr>
+              <a:t>EL PRIMER ESCALÓN DEL INSTITUTO</a:t>
+            </a:r>
+            <a:endParaRPr lang="en-US" sz="1500" dirty="0"/>
+          </a:p>
+        </p:txBody>
+      </p:sp>
+      <p:sp>
+        <p:nvSpPr>
+          <p:cNvPr id="4" name="Nombre"/>
+          <p:cNvSpPr txBox="1"/>
+          <p:nvPr/>
+        </p:nvSpPr>
+        <p:spPr>
+          <a:xfrm>
+            <a:off x="731520" y="2743200"/>
+            <a:ext cx="10728655" cy="1097280"/>
+          </a:xfrm>
+          <a:prstGeom prst="rect">
+            <a:avLst/>
+          </a:prstGeom>
+          <a:noFill/>
+          <a:ln/>
+        </p:spPr>
+        <p:txBody>
           <a:bodyPr wrap="square" lIns="0" tIns="0" rIns="0" bIns="0" rtlCol="0" anchor="ctr"/>
           <a:lstStyle/>
           <a:p>
-            <a:pPr indent="0" marL="0">
-              <a:buNone/>
-            </a:pPr>
-            <a:r>
-              <a:rPr lang="en-US" sz="1400" b="1" spc="300" kern="0" dirty="0">
-                <a:solidFill>
-                  <a:schemeClr val="accent1"/>
-                </a:solidFill>
-              </a:rPr>
-              <a:t>COMUNIDAD PRODUCTIVA</a:t>
-            </a:r>
-            <a:endParaRPr lang="en-US" sz="1400" dirty="0"/>
-          </a:p>
-        </p:txBody>
-      </p:sp>
-      <p:sp>
-        <p:nvSpPr>
-          <p:cNvPr id="3" name="Text 0"/>
-          <p:cNvSpPr/>
-          <p:nvPr>
-            <p:ph idx="101" type="title" hasCustomPrompt="1"/>
-          </p:nvPr>
-        </p:nvSpPr>
-        <p:spPr>
-          <a:xfrm>
-            <a:off x="731520" y="1097280"/>
-            <a:ext cx="10728655" cy="1005840"/>
-          </a:xfrm>
-          <a:prstGeom prst="rect">
-            <a:avLst/>
-          </a:prstGeom>
-          <a:noFill/>
-          <a:ln/>
-        </p:spPr>
-        <p:txBody>
-          <a:bodyPr wrap="square" lIns="0" tIns="0" rIns="0" bIns="0" rtlCol="0" anchor="t"/>
-          <a:lstStyle/>
-          <a:p>
-            <a:pPr algn="l" indent="0" marL="0">
-              <a:buNone/>
-            </a:pPr>
-            <a:r>
-              <a:rPr lang="en-US" sz="4000" b="1" dirty="0">
-                <a:solidFill>
-                  <a:schemeClr val="tx1"/>
-                </a:solidFill>
-              </a:rPr>
-              <a:t>Así es tu semana adentro</a:t>
-            </a:r>
-            <a:endParaRPr lang="en-US" sz="4000" dirty="0"/>
-          </a:p>
-        </p:txBody>
-      </p:sp>
-      <p:sp>
-        <p:nvSpPr>
-          <p:cNvPr id="4" name="Momento 1"/>
-          <p:cNvSpPr/>
-          <p:nvPr/>
-        </p:nvSpPr>
-        <p:spPr>
-          <a:xfrm>
-            <a:off x="731520" y="2103120"/>
-            <a:ext cx="3362858" cy="2880360"/>
-          </a:xfrm>
-          <a:prstGeom prst="roundRect">
-            <a:avLst>
-              <a:gd name="adj" fmla="val 5714"/>
-            </a:avLst>
-          </a:prstGeom>
-          <a:solidFill>
-            <a:schemeClr val="bg2"/>
-          </a:solidFill>
-          <a:ln w="12700">
-            <a:solidFill>
-              <a:schemeClr val="bg2"/>
-            </a:solidFill>
-            <a:prstDash val="solid"/>
-          </a:ln>
-        </p:spPr>
-      </p:sp>
-      <p:sp>
-        <p:nvSpPr>
-          <p:cNvPr id="5" name="Momento 1 cuándo"/>
-          <p:cNvSpPr txBox="1"/>
-          <p:nvPr/>
-        </p:nvSpPr>
-        <p:spPr>
-          <a:xfrm>
-            <a:off x="1051560" y="2423160"/>
-            <a:ext cx="2722778" cy="320040"/>
-          </a:xfrm>
-          <a:prstGeom prst="rect">
-            <a:avLst/>
-          </a:prstGeom>
-          <a:noFill/>
-          <a:ln/>
-        </p:spPr>
-        <p:txBody>
-          <a:bodyPr wrap="square" lIns="0" tIns="0" rIns="0" bIns="0" rtlCol="0" anchor="t"/>
-          <a:lstStyle/>
-          <a:p>
-            <a:pPr indent="0" marL="0">
-              <a:buNone/>
-            </a:pPr>
-            <a:r>
-              <a:rPr lang="en-US" sz="1300" b="1" spc="200" kern="0" dirty="0">
-                <a:solidFill>
-                  <a:schemeClr val="accent1"/>
-                </a:solidFill>
-              </a:rPr>
-              <a:t>SÁBADO A LA MAÑANA</a:t>
-            </a:r>
-            <a:endParaRPr lang="en-US" sz="1300" dirty="0"/>
-          </a:p>
-        </p:txBody>
-      </p:sp>
-      <p:sp>
-        <p:nvSpPr>
-          <p:cNvPr id="6" name="Momento 1 qué"/>
-          <p:cNvSpPr txBox="1"/>
-          <p:nvPr/>
-        </p:nvSpPr>
-        <p:spPr>
-          <a:xfrm>
-            <a:off x="1051560" y="2834640"/>
-            <a:ext cx="2722778" cy="1280160"/>
-          </a:xfrm>
-          <a:prstGeom prst="rect">
-            <a:avLst/>
-          </a:prstGeom>
-          <a:noFill/>
-          <a:ln/>
-        </p:spPr>
-        <p:txBody>
-          <a:bodyPr wrap="square" lIns="0" tIns="0" rIns="0" bIns="0" rtlCol="0" anchor="t"/>
-          <a:lstStyle/>
-          <a:p>
-            <a:pPr indent="0" marL="0">
-              <a:buNone/>
-            </a:pPr>
-            <a:r>
-              <a:rPr lang="en-US" sz="1900" b="1" dirty="0">
-                <a:solidFill>
-                  <a:schemeClr val="tx1"/>
+            <a:pPr algn="ctr" indent="0" marL="0">
+              <a:buNone/>
+            </a:pPr>
+            <a:r>
+              <a:rPr lang="en-US" sz="6000" b="1" dirty="0">
+                <a:solidFill>
+                  <a:schemeClr val="bg1"/>
                 </a:solidFill>
                 <a:latin typeface="Montserrat" pitchFamily="34" charset="0"/>
                 <a:ea typeface="Montserrat" pitchFamily="34" charset="-122"/>
                 <a:cs typeface="Montserrat" pitchFamily="34" charset="-120"/>
               </a:rPr>
-              <a:t>Planificás tu semana en vivo, con otros</a:t>
-            </a:r>
-            <a:endParaRPr lang="en-US" sz="1900" dirty="0"/>
-          </a:p>
-        </p:txBody>
-      </p:sp>
-      <p:sp>
-        <p:nvSpPr>
-          <p:cNvPr id="7" name="Momento 1 para qué"/>
+              <a:t>Comunidad Productiva</a:t>
+            </a:r>
+            <a:endParaRPr lang="en-US" sz="6000" dirty="0"/>
+          </a:p>
+        </p:txBody>
+      </p:sp>
+      <p:sp>
+        <p:nvSpPr>
+          <p:cNvPr id="5" name="Tagline"/>
           <p:cNvSpPr txBox="1"/>
           <p:nvPr/>
         </p:nvSpPr>
         <p:spPr>
           <a:xfrm>
-            <a:off x="1051560" y="4206240"/>
-            <a:ext cx="2722778" cy="640080"/>
+            <a:off x="731520" y="3931920"/>
+            <a:ext cx="10728655" cy="548640"/>
           </a:xfrm>
           <a:prstGeom prst="rect">
             <a:avLst/>
@@ -5533,357 +7903,18 @@
           <a:bodyPr wrap="square" lIns="0" tIns="0" rIns="0" bIns="0" rtlCol="0" anchor="t"/>
           <a:lstStyle/>
           <a:p>
-            <a:pPr indent="0" marL="0">
-              <a:buNone/>
-            </a:pPr>
-            <a:r>
-              <a:rPr lang="en-US" sz="1600" dirty="0">
-                <a:solidFill>
-                  <a:schemeClr val="accent3"/>
-                </a:solidFill>
-              </a:rPr>
-              <a:t>Para saber qué hacés cada día.</a:t>
-            </a:r>
-            <a:endParaRPr lang="en-US" sz="1600" dirty="0"/>
-          </a:p>
-        </p:txBody>
-      </p:sp>
-      <p:sp>
-        <p:nvSpPr>
-          <p:cNvPr id="8" name="Momento 2"/>
-          <p:cNvSpPr/>
-          <p:nvPr/>
-        </p:nvSpPr>
-        <p:spPr>
-          <a:xfrm>
-            <a:off x="4414418" y="2103120"/>
-            <a:ext cx="3362858" cy="2880360"/>
-          </a:xfrm>
-          <a:prstGeom prst="roundRect">
-            <a:avLst>
-              <a:gd name="adj" fmla="val 5714"/>
-            </a:avLst>
-          </a:prstGeom>
-          <a:solidFill>
-            <a:schemeClr val="bg2"/>
-          </a:solidFill>
-          <a:ln w="12700">
-            <a:solidFill>
-              <a:schemeClr val="bg2"/>
-            </a:solidFill>
-            <a:prstDash val="solid"/>
-          </a:ln>
-        </p:spPr>
-      </p:sp>
-      <p:sp>
-        <p:nvSpPr>
-          <p:cNvPr id="9" name="Momento 2 cuándo"/>
-          <p:cNvSpPr txBox="1"/>
-          <p:nvPr/>
-        </p:nvSpPr>
-        <p:spPr>
-          <a:xfrm>
-            <a:off x="4734458" y="2423160"/>
-            <a:ext cx="2722778" cy="320040"/>
-          </a:xfrm>
-          <a:prstGeom prst="rect">
-            <a:avLst/>
-          </a:prstGeom>
-          <a:noFill/>
-          <a:ln/>
-        </p:spPr>
-        <p:txBody>
-          <a:bodyPr wrap="square" lIns="0" tIns="0" rIns="0" bIns="0" rtlCol="0" anchor="t"/>
-          <a:lstStyle/>
-          <a:p>
-            <a:pPr indent="0" marL="0">
-              <a:buNone/>
-            </a:pPr>
-            <a:r>
-              <a:rPr lang="en-US" sz="1300" b="1" spc="200" kern="0" dirty="0">
+            <a:pPr algn="ctr" indent="0" marL="0">
+              <a:buNone/>
+            </a:pPr>
+            <a:r>
+              <a:rPr lang="en-US" sz="2600" i="1" dirty="0">
                 <a:solidFill>
                   <a:schemeClr val="accent1"/>
                 </a:solidFill>
               </a:rPr>
-              <a:t>DE LUNES A VIERNES</a:t>
-            </a:r>
-            <a:endParaRPr lang="en-US" sz="1300" dirty="0"/>
-          </a:p>
-        </p:txBody>
-      </p:sp>
-      <p:sp>
-        <p:nvSpPr>
-          <p:cNvPr id="10" name="Momento 2 qué"/>
-          <p:cNvSpPr txBox="1"/>
-          <p:nvPr/>
-        </p:nvSpPr>
-        <p:spPr>
-          <a:xfrm>
-            <a:off x="4734458" y="2834640"/>
-            <a:ext cx="2722778" cy="1280160"/>
-          </a:xfrm>
-          <a:prstGeom prst="rect">
-            <a:avLst/>
-          </a:prstGeom>
-          <a:noFill/>
-          <a:ln/>
-        </p:spPr>
-        <p:txBody>
-          <a:bodyPr wrap="square" lIns="0" tIns="0" rIns="0" bIns="0" rtlCol="0" anchor="t"/>
-          <a:lstStyle/>
-          <a:p>
-            <a:pPr indent="0" marL="0">
-              <a:buNone/>
-            </a:pPr>
-            <a:r>
-              <a:rPr lang="en-US" sz="1900" b="1" dirty="0">
-                <a:solidFill>
-                  <a:schemeClr val="tx1"/>
-                </a:solidFill>
-                <a:latin typeface="Montserrat" pitchFamily="34" charset="0"/>
-                <a:ea typeface="Montserrat" pitchFamily="34" charset="-122"/>
-                <a:cs typeface="Montserrat" pitchFamily="34" charset="-120"/>
-              </a:rPr>
-              <a:t>Co-works en vivo, con cámara</a:t>
-            </a:r>
-            <a:endParaRPr lang="en-US" sz="1900" dirty="0"/>
-          </a:p>
-        </p:txBody>
-      </p:sp>
-      <p:sp>
-        <p:nvSpPr>
-          <p:cNvPr id="11" name="Momento 2 para qué"/>
-          <p:cNvSpPr txBox="1"/>
-          <p:nvPr/>
-        </p:nvSpPr>
-        <p:spPr>
-          <a:xfrm>
-            <a:off x="4734458" y="4206240"/>
-            <a:ext cx="2722778" cy="640080"/>
-          </a:xfrm>
-          <a:prstGeom prst="rect">
-            <a:avLst/>
-          </a:prstGeom>
-          <a:noFill/>
-          <a:ln/>
-        </p:spPr>
-        <p:txBody>
-          <a:bodyPr wrap="square" lIns="0" tIns="0" rIns="0" bIns="0" rtlCol="0" anchor="t"/>
-          <a:lstStyle/>
-          <a:p>
-            <a:pPr indent="0" marL="0">
-              <a:buNone/>
-            </a:pPr>
-            <a:r>
-              <a:rPr lang="en-US" sz="1600" dirty="0">
-                <a:solidFill>
-                  <a:schemeClr val="accent3"/>
-                </a:solidFill>
-              </a:rPr>
-              <a:t>Para avanzar en tus cosas en bloques de foco.</a:t>
-            </a:r>
-            <a:endParaRPr lang="en-US" sz="1600" dirty="0"/>
-          </a:p>
-        </p:txBody>
-      </p:sp>
-      <p:sp>
-        <p:nvSpPr>
-          <p:cNvPr id="12" name="Momento 3"/>
-          <p:cNvSpPr/>
-          <p:nvPr/>
-        </p:nvSpPr>
-        <p:spPr>
-          <a:xfrm>
-            <a:off x="8097317" y="2103120"/>
-            <a:ext cx="3362858" cy="2880360"/>
-          </a:xfrm>
-          <a:prstGeom prst="roundRect">
-            <a:avLst>
-              <a:gd name="adj" fmla="val 5714"/>
-            </a:avLst>
-          </a:prstGeom>
-          <a:solidFill>
-            <a:schemeClr val="bg2"/>
-          </a:solidFill>
-          <a:ln w="12700">
-            <a:solidFill>
-              <a:schemeClr val="bg2"/>
-            </a:solidFill>
-            <a:prstDash val="solid"/>
-          </a:ln>
-        </p:spPr>
-      </p:sp>
-      <p:sp>
-        <p:nvSpPr>
-          <p:cNvPr id="13" name="Momento 3 cuándo"/>
-          <p:cNvSpPr txBox="1"/>
-          <p:nvPr/>
-        </p:nvSpPr>
-        <p:spPr>
-          <a:xfrm>
-            <a:off x="8417357" y="2423160"/>
-            <a:ext cx="2722778" cy="320040"/>
-          </a:xfrm>
-          <a:prstGeom prst="rect">
-            <a:avLst/>
-          </a:prstGeom>
-          <a:noFill/>
-          <a:ln/>
-        </p:spPr>
-        <p:txBody>
-          <a:bodyPr wrap="square" lIns="0" tIns="0" rIns="0" bIns="0" rtlCol="0" anchor="t"/>
-          <a:lstStyle/>
-          <a:p>
-            <a:pPr indent="0" marL="0">
-              <a:buNone/>
-            </a:pPr>
-            <a:r>
-              <a:rPr lang="en-US" sz="1300" b="1" spc="200" kern="0" dirty="0">
-                <a:solidFill>
-                  <a:schemeClr val="accent1"/>
-                </a:solidFill>
-              </a:rPr>
-              <a:t>UNA VEZ POR MES</a:t>
-            </a:r>
-            <a:endParaRPr lang="en-US" sz="1300" dirty="0"/>
-          </a:p>
-        </p:txBody>
-      </p:sp>
-      <p:sp>
-        <p:nvSpPr>
-          <p:cNvPr id="14" name="Momento 3 qué"/>
-          <p:cNvSpPr txBox="1"/>
-          <p:nvPr/>
-        </p:nvSpPr>
-        <p:spPr>
-          <a:xfrm>
-            <a:off x="8417357" y="2834640"/>
-            <a:ext cx="2722778" cy="1280160"/>
-          </a:xfrm>
-          <a:prstGeom prst="rect">
-            <a:avLst/>
-          </a:prstGeom>
-          <a:noFill/>
-          <a:ln/>
-        </p:spPr>
-        <p:txBody>
-          <a:bodyPr wrap="square" lIns="0" tIns="0" rIns="0" bIns="0" rtlCol="0" anchor="t"/>
-          <a:lstStyle/>
-          <a:p>
-            <a:pPr indent="0" marL="0">
-              <a:buNone/>
-            </a:pPr>
-            <a:r>
-              <a:rPr lang="en-US" sz="1900" b="1" dirty="0">
-                <a:solidFill>
-                  <a:schemeClr val="tx1"/>
-                </a:solidFill>
-                <a:latin typeface="Montserrat" pitchFamily="34" charset="0"/>
-                <a:ea typeface="Montserrat" pitchFamily="34" charset="-122"/>
-                <a:cs typeface="Montserrat" pitchFamily="34" charset="-120"/>
-              </a:rPr>
-              <a:t>Planificación con nutricionista, psicóloga y coaches</a:t>
-            </a:r>
-            <a:endParaRPr lang="en-US" sz="1900" dirty="0"/>
-          </a:p>
-        </p:txBody>
-      </p:sp>
-      <p:sp>
-        <p:nvSpPr>
-          <p:cNvPr id="15" name="Momento 3 para qué"/>
-          <p:cNvSpPr txBox="1"/>
-          <p:nvPr/>
-        </p:nvSpPr>
-        <p:spPr>
-          <a:xfrm>
-            <a:off x="8417357" y="4206240"/>
-            <a:ext cx="2722778" cy="640080"/>
-          </a:xfrm>
-          <a:prstGeom prst="rect">
-            <a:avLst/>
-          </a:prstGeom>
-          <a:noFill/>
-          <a:ln/>
-        </p:spPr>
-        <p:txBody>
-          <a:bodyPr wrap="square" lIns="0" tIns="0" rIns="0" bIns="0" rtlCol="0" anchor="t"/>
-          <a:lstStyle/>
-          <a:p>
-            <a:pPr indent="0" marL="0">
-              <a:buNone/>
-            </a:pPr>
-            <a:r>
-              <a:rPr lang="en-US" sz="1600" dirty="0">
-                <a:solidFill>
-                  <a:schemeClr val="accent3"/>
-                </a:solidFill>
-              </a:rPr>
-              <a:t>Para que avanzar no te cueste la salud.</a:t>
-            </a:r>
-            <a:endParaRPr lang="en-US" sz="1600" dirty="0"/>
-          </a:p>
-        </p:txBody>
-      </p:sp>
-      <p:sp>
-        <p:nvSpPr>
-          <p:cNvPr id="16" name="La regla"/>
-          <p:cNvSpPr/>
-          <p:nvPr/>
-        </p:nvSpPr>
-        <p:spPr>
-          <a:xfrm>
-            <a:off x="731520" y="5257800"/>
-            <a:ext cx="5852160" cy="566928"/>
-          </a:xfrm>
-          <a:prstGeom prst="roundRect">
-            <a:avLst>
-              <a:gd name="adj" fmla="val 50000"/>
-            </a:avLst>
-          </a:prstGeom>
-          <a:solidFill>
-            <a:schemeClr val="tx1"/>
-          </a:solidFill>
-          <a:ln w="12700">
-            <a:solidFill>
-              <a:schemeClr val="tx1"/>
-            </a:solidFill>
-            <a:prstDash val="solid"/>
-          </a:ln>
-        </p:spPr>
-      </p:sp>
-      <p:sp>
-        <p:nvSpPr>
-          <p:cNvPr id="17" name="La regla (texto)"/>
-          <p:cNvSpPr txBox="1"/>
-          <p:nvPr/>
-        </p:nvSpPr>
-        <p:spPr>
-          <a:xfrm>
-            <a:off x="731520" y="5257800"/>
-            <a:ext cx="5852160" cy="566928"/>
-          </a:xfrm>
-          <a:prstGeom prst="rect">
-            <a:avLst/>
-          </a:prstGeom>
-          <a:noFill/>
-          <a:ln/>
-        </p:spPr>
-        <p:txBody>
-          <a:bodyPr wrap="square" lIns="0" tIns="0" rIns="0" bIns="0" rtlCol="0" anchor="ctr"/>
-          <a:lstStyle/>
-          <a:p>
-            <a:pPr algn="ctr" indent="0" marL="0">
-              <a:buNone/>
-            </a:pPr>
-            <a:r>
-              <a:rPr lang="en-US" sz="1400" b="1" spc="200" kern="0" dirty="0">
-                <a:solidFill>
-                  <a:schemeClr val="bg1"/>
-                </a:solidFill>
-              </a:rPr>
-              <a:t>LA REGLA: PODÉS FALTAR UNA SEMANA. DOS, NO.</a:t>
-            </a:r>
-            <a:endParaRPr lang="en-US" sz="1400" dirty="0"/>
+              <a:t>Avanzá sin dejar la vida en el intento.</a:t>
+            </a:r>
+            <a:endParaRPr lang="en-US" sz="2600" dirty="0"/>
           </a:p>
         </p:txBody>
       </p:sp>
@@ -5923,7 +7954,7 @@
         <p:spPr>
           <a:xfrm>
             <a:off x="731520" y="685800"/>
-            <a:ext cx="4114800" cy="365760"/>
+            <a:ext cx="10728655" cy="365760"/>
           </a:xfrm>
           <a:prstGeom prst="rect">
             <a:avLst/>
@@ -5944,7 +7975,7 @@
                   <a:schemeClr val="accent1"/>
                 </a:solidFill>
               </a:rPr>
-              <a:t>CO-WORKS EN VIVO</a:t>
+              <a:t>LO PRIMERO QUE NECESITÁS</a:t>
             </a:r>
             <a:endParaRPr lang="en-US" sz="1400" dirty="0"/>
           </a:p>
@@ -5961,7 +7992,7 @@
         <p:spPr>
           <a:xfrm>
             <a:off x="731520" y="1097280"/>
-            <a:ext cx="4114800" cy="2743200"/>
+            <a:ext cx="10728655" cy="1005840"/>
           </a:xfrm>
           <a:prstGeom prst="rect">
             <a:avLst/>
@@ -5977,90 +8008,79 @@
               <a:buNone/>
             </a:pPr>
             <a:r>
-              <a:rPr lang="en-US" sz="3600" b="1" dirty="0">
-                <a:solidFill>
-                  <a:schemeClr val="bg1"/>
-                </a:solidFill>
-              </a:rPr>
-              <a:t>Son las 9 y un grupo prende la cámara</a:t>
-            </a:r>
-            <a:endParaRPr lang="en-US" sz="3600" dirty="0"/>
-          </a:p>
-        </p:txBody>
-      </p:sp>
-      <p:sp>
-        <p:nvSpPr>
-          <p:cNvPr id="4" name="Texto"/>
-          <p:cNvSpPr txBox="1"/>
-          <p:nvPr/>
-        </p:nvSpPr>
-        <p:spPr>
-          <a:xfrm>
-            <a:off x="731520" y="3429000"/>
-            <a:ext cx="4114800" cy="1280160"/>
-          </a:xfrm>
-          <a:prstGeom prst="rect">
-            <a:avLst/>
-          </a:prstGeom>
-          <a:noFill/>
-          <a:ln/>
-        </p:spPr>
-        <p:txBody>
-          <a:bodyPr wrap="square" lIns="0" tIns="0" rIns="0" bIns="0" rtlCol="0" anchor="t"/>
-          <a:lstStyle/>
-          <a:p>
-            <a:pPr indent="0" marL="0">
-              <a:buNone/>
-            </a:pPr>
-            <a:r>
-              <a:rPr lang="en-US" sz="2000" dirty="0">
-                <a:solidFill>
-                  <a:schemeClr val="accent2"/>
-                </a:solidFill>
-              </a:rPr>
-              <a:t>Para hacer lo que venía postergando, al lado de otros que están en lo mismo.</a:t>
-            </a:r>
-            <a:endParaRPr lang="en-US" sz="2000" dirty="0"/>
-          </a:p>
-        </p:txBody>
-      </p:sp>
-      <p:sp>
-        <p:nvSpPr>
-          <p:cNvPr id="5" name="Espacio captura co-work"/>
-          <p:cNvSpPr/>
-          <p:nvPr/>
-        </p:nvSpPr>
-        <p:spPr>
-          <a:xfrm>
-            <a:off x="5440680" y="685800"/>
-            <a:ext cx="6016752" cy="5074920"/>
+              <a:rPr lang="en-US" sz="4000" b="1" dirty="0">
+                <a:solidFill>
+                  <a:schemeClr val="tx1"/>
+                </a:solidFill>
+              </a:rPr>
+              <a:t>Los 3 pilares del primer paso</a:t>
+            </a:r>
+            <a:endParaRPr lang="en-US" sz="4000" dirty="0"/>
+          </a:p>
+        </p:txBody>
+      </p:sp>
+      <p:sp>
+        <p:nvSpPr>
+          <p:cNvPr id="4" name="Pilar 1"/>
+          <p:cNvSpPr/>
+          <p:nvPr/>
+        </p:nvSpPr>
+        <p:spPr>
+          <a:xfrm>
+            <a:off x="731520" y="2103120"/>
+            <a:ext cx="3362858" cy="2971800"/>
           </a:xfrm>
           <a:prstGeom prst="roundRect">
             <a:avLst>
-              <a:gd name="adj" fmla="val 3243"/>
+              <a:gd name="adj" fmla="val 5538"/>
             </a:avLst>
           </a:prstGeom>
           <a:solidFill>
-            <a:schemeClr val="tx2"/>
+            <a:schemeClr val="bg2"/>
           </a:solidFill>
-          <a:ln w="19050">
+          <a:ln w="12700">
             <a:solidFill>
-              <a:schemeClr val="accent2"/>
+              <a:schemeClr val="bg2"/>
             </a:solidFill>
-            <a:prstDash val="dash"/>
+            <a:prstDash val="solid"/>
           </a:ln>
         </p:spPr>
       </p:sp>
       <p:sp>
         <p:nvSpPr>
-          <p:cNvPr id="6" name="Espacio captura co-work (texto)"/>
+          <p:cNvPr id="5" name="Pilar 1 círculo"/>
+          <p:cNvSpPr/>
+          <p:nvPr/>
+        </p:nvSpPr>
+        <p:spPr>
+          <a:xfrm>
+            <a:off x="1051560" y="2395728"/>
+            <a:ext cx="457200" cy="457200"/>
+          </a:xfrm>
+          <a:prstGeom prst="ellipse">
+            <a:avLst/>
+          </a:prstGeom>
+          <a:solidFill>
+            <a:schemeClr val="accent1"/>
+          </a:solidFill>
+          <a:ln w="12700">
+            <a:solidFill>
+              <a:schemeClr val="accent1"/>
+            </a:solidFill>
+            <a:prstDash val="solid"/>
+          </a:ln>
+        </p:spPr>
+      </p:sp>
+      <p:sp>
+        <p:nvSpPr>
+          <p:cNvPr id="6" name="Pilar 1 número"/>
           <p:cNvSpPr txBox="1"/>
           <p:nvPr/>
         </p:nvSpPr>
         <p:spPr>
           <a:xfrm>
-            <a:off x="5715000" y="685800"/>
-            <a:ext cx="5468112" cy="5074920"/>
+            <a:off x="1051560" y="2395728"/>
+            <a:ext cx="457200" cy="457200"/>
           </a:xfrm>
           <a:prstGeom prst="rect">
             <a:avLst/>
@@ -6076,28 +8096,595 @@
               <a:buNone/>
             </a:pPr>
             <a:r>
-              <a:rPr lang="en-US" sz="1300" b="1" spc="200" kern="0" dirty="0">
-                <a:solidFill>
-                  <a:schemeClr val="accent2"/>
-                </a:solidFill>
-              </a:rPr>
-              <a:t>CAPTURA</a:t>
-            </a:r>
-            <a:endParaRPr lang="en-US" sz="1300" dirty="0"/>
-          </a:p>
+              <a:rPr lang="en-US" sz="1600" b="1" dirty="0">
+                <a:solidFill>
+                  <a:schemeClr val="bg1"/>
+                </a:solidFill>
+                <a:latin typeface="Montserrat" pitchFamily="34" charset="0"/>
+                <a:ea typeface="Montserrat" pitchFamily="34" charset="-122"/>
+                <a:cs typeface="Montserrat" pitchFamily="34" charset="-120"/>
+              </a:rPr>
+              <a:t>1</a:t>
+            </a:r>
+            <a:endParaRPr lang="en-US" sz="1600" dirty="0"/>
+          </a:p>
+        </p:txBody>
+      </p:sp>
+      <p:sp>
+        <p:nvSpPr>
+          <p:cNvPr id="7" name="Pilar 1 nombre"/>
+          <p:cNvSpPr txBox="1"/>
+          <p:nvPr/>
+        </p:nvSpPr>
+        <p:spPr>
+          <a:xfrm>
+            <a:off x="1645920" y="2395728"/>
+            <a:ext cx="2174138" cy="457200"/>
+          </a:xfrm>
+          <a:prstGeom prst="rect">
+            <a:avLst/>
+          </a:prstGeom>
+          <a:noFill/>
+          <a:ln/>
+        </p:spPr>
+        <p:txBody>
+          <a:bodyPr wrap="square" lIns="0" tIns="0" rIns="0" bIns="0" rtlCol="0" anchor="ctr"/>
+          <a:lstStyle/>
+          <a:p>
+            <a:pPr indent="0" marL="0">
+              <a:buNone/>
+            </a:pPr>
+            <a:r>
+              <a:rPr lang="en-US" sz="1400" b="1" spc="200" kern="0" dirty="0">
+                <a:solidFill>
+                  <a:schemeClr val="accent1"/>
+                </a:solidFill>
+              </a:rPr>
+              <a:t>LAS BASES</a:t>
+            </a:r>
+            <a:endParaRPr lang="en-US" sz="1400" dirty="0"/>
+          </a:p>
+        </p:txBody>
+      </p:sp>
+      <p:sp>
+        <p:nvSpPr>
+          <p:cNvPr id="8" name="Pilar 1 qué"/>
+          <p:cNvSpPr txBox="1"/>
+          <p:nvPr/>
+        </p:nvSpPr>
+        <p:spPr>
+          <a:xfrm>
+            <a:off x="1051560" y="3063240"/>
+            <a:ext cx="2722778" cy="1097280"/>
+          </a:xfrm>
+          <a:prstGeom prst="rect">
+            <a:avLst/>
+          </a:prstGeom>
+          <a:noFill/>
+          <a:ln/>
+        </p:spPr>
+        <p:txBody>
+          <a:bodyPr wrap="square" lIns="0" tIns="0" rIns="0" bIns="0" rtlCol="0" anchor="t"/>
+          <a:lstStyle/>
+          <a:p>
+            <a:pPr indent="0" marL="0">
+              <a:buNone/>
+            </a:pPr>
+            <a:r>
+              <a:rPr lang="en-US" sz="1900" b="1" dirty="0">
+                <a:solidFill>
+                  <a:schemeClr val="tx1"/>
+                </a:solidFill>
+                <a:latin typeface="Montserrat" pitchFamily="34" charset="0"/>
+                <a:ea typeface="Montserrat" pitchFamily="34" charset="-122"/>
+                <a:cs typeface="Montserrat" pitchFamily="34" charset="-120"/>
+              </a:rPr>
+              <a:t>El conocimiento de cómo funciona tu cerebro, destilado</a:t>
+            </a:r>
+            <a:endParaRPr lang="en-US" sz="1900" dirty="0"/>
+          </a:p>
+        </p:txBody>
+      </p:sp>
+      <p:sp>
+        <p:nvSpPr>
+          <p:cNvPr id="9" name="Pilar 1 para qué"/>
+          <p:cNvSpPr txBox="1"/>
+          <p:nvPr/>
+        </p:nvSpPr>
+        <p:spPr>
+          <a:xfrm>
+            <a:off x="1051560" y="4206240"/>
+            <a:ext cx="2722778" cy="731520"/>
+          </a:xfrm>
+          <a:prstGeom prst="rect">
+            <a:avLst/>
+          </a:prstGeom>
+          <a:noFill/>
+          <a:ln/>
+        </p:spPr>
+        <p:txBody>
+          <a:bodyPr wrap="square" lIns="0" tIns="0" rIns="0" bIns="0" rtlCol="0" anchor="t"/>
+          <a:lstStyle/>
+          <a:p>
+            <a:pPr indent="0" marL="0">
+              <a:buNone/>
+            </a:pPr>
+            <a:r>
+              <a:rPr lang="en-US" sz="1600" dirty="0">
+                <a:solidFill>
+                  <a:schemeClr val="accent3"/>
+                </a:solidFill>
+              </a:rPr>
+              <a:t>Para dejar de pelearte con tu cerebro y entender por qué procrastinás.</a:t>
+            </a:r>
+            <a:endParaRPr lang="en-US" sz="1600" dirty="0"/>
+          </a:p>
+        </p:txBody>
+      </p:sp>
+      <p:sp>
+        <p:nvSpPr>
+          <p:cNvPr id="10" name="Pilar 2"/>
+          <p:cNvSpPr/>
+          <p:nvPr/>
+        </p:nvSpPr>
+        <p:spPr>
+          <a:xfrm>
+            <a:off x="4414418" y="2103120"/>
+            <a:ext cx="3362858" cy="2971800"/>
+          </a:xfrm>
+          <a:prstGeom prst="roundRect">
+            <a:avLst>
+              <a:gd name="adj" fmla="val 5538"/>
+            </a:avLst>
+          </a:prstGeom>
+          <a:solidFill>
+            <a:schemeClr val="bg2"/>
+          </a:solidFill>
+          <a:ln w="12700">
+            <a:solidFill>
+              <a:schemeClr val="bg2"/>
+            </a:solidFill>
+            <a:prstDash val="solid"/>
+          </a:ln>
+        </p:spPr>
+      </p:sp>
+      <p:sp>
+        <p:nvSpPr>
+          <p:cNvPr id="11" name="Pilar 2 círculo"/>
+          <p:cNvSpPr/>
+          <p:nvPr/>
+        </p:nvSpPr>
+        <p:spPr>
+          <a:xfrm>
+            <a:off x="4734458" y="2395728"/>
+            <a:ext cx="457200" cy="457200"/>
+          </a:xfrm>
+          <a:prstGeom prst="ellipse">
+            <a:avLst/>
+          </a:prstGeom>
+          <a:solidFill>
+            <a:schemeClr val="accent1"/>
+          </a:solidFill>
+          <a:ln w="12700">
+            <a:solidFill>
+              <a:schemeClr val="accent1"/>
+            </a:solidFill>
+            <a:prstDash val="solid"/>
+          </a:ln>
+        </p:spPr>
+      </p:sp>
+      <p:sp>
+        <p:nvSpPr>
+          <p:cNvPr id="12" name="Pilar 2 número"/>
+          <p:cNvSpPr txBox="1"/>
+          <p:nvPr/>
+        </p:nvSpPr>
+        <p:spPr>
+          <a:xfrm>
+            <a:off x="4734458" y="2395728"/>
+            <a:ext cx="457200" cy="457200"/>
+          </a:xfrm>
+          <a:prstGeom prst="rect">
+            <a:avLst/>
+          </a:prstGeom>
+          <a:noFill/>
+          <a:ln/>
+        </p:spPr>
+        <p:txBody>
+          <a:bodyPr wrap="square" lIns="0" tIns="0" rIns="0" bIns="0" rtlCol="0" anchor="ctr"/>
+          <a:lstStyle/>
           <a:p>
             <a:pPr algn="ctr" indent="0" marL="0">
               <a:buNone/>
             </a:pPr>
             <a:r>
-              <a:rPr lang="en-US" sz="1300" b="1" spc="200" kern="0" dirty="0">
-                <a:solidFill>
-                  <a:schemeClr val="accent2"/>
-                </a:solidFill>
-              </a:rPr>
-              <a:t>grilla del co-work con las cámaras prendidas</a:t>
-            </a:r>
-            <a:endParaRPr lang="en-US" sz="1300" dirty="0"/>
+              <a:rPr lang="en-US" sz="1600" b="1" dirty="0">
+                <a:solidFill>
+                  <a:schemeClr val="bg1"/>
+                </a:solidFill>
+                <a:latin typeface="Montserrat" pitchFamily="34" charset="0"/>
+                <a:ea typeface="Montserrat" pitchFamily="34" charset="-122"/>
+                <a:cs typeface="Montserrat" pitchFamily="34" charset="-120"/>
+              </a:rPr>
+              <a:t>2</a:t>
+            </a:r>
+            <a:endParaRPr lang="en-US" sz="1600" dirty="0"/>
+          </a:p>
+        </p:txBody>
+      </p:sp>
+      <p:sp>
+        <p:nvSpPr>
+          <p:cNvPr id="13" name="Pilar 2 nombre"/>
+          <p:cNvSpPr txBox="1"/>
+          <p:nvPr/>
+        </p:nvSpPr>
+        <p:spPr>
+          <a:xfrm>
+            <a:off x="5328818" y="2395728"/>
+            <a:ext cx="2174138" cy="457200"/>
+          </a:xfrm>
+          <a:prstGeom prst="rect">
+            <a:avLst/>
+          </a:prstGeom>
+          <a:noFill/>
+          <a:ln/>
+        </p:spPr>
+        <p:txBody>
+          <a:bodyPr wrap="square" lIns="0" tIns="0" rIns="0" bIns="0" rtlCol="0" anchor="ctr"/>
+          <a:lstStyle/>
+          <a:p>
+            <a:pPr indent="0" marL="0">
+              <a:buNone/>
+            </a:pPr>
+            <a:r>
+              <a:rPr lang="en-US" sz="1400" b="1" spc="200" kern="0" dirty="0">
+                <a:solidFill>
+                  <a:schemeClr val="accent1"/>
+                </a:solidFill>
+              </a:rPr>
+              <a:t>LA PLANIFICACIÓN</a:t>
+            </a:r>
+            <a:endParaRPr lang="en-US" sz="1400" dirty="0"/>
+          </a:p>
+        </p:txBody>
+      </p:sp>
+      <p:sp>
+        <p:nvSpPr>
+          <p:cNvPr id="14" name="Pilar 2 qué"/>
+          <p:cNvSpPr txBox="1"/>
+          <p:nvPr/>
+        </p:nvSpPr>
+        <p:spPr>
+          <a:xfrm>
+            <a:off x="4734458" y="3063240"/>
+            <a:ext cx="2722778" cy="1097280"/>
+          </a:xfrm>
+          <a:prstGeom prst="rect">
+            <a:avLst/>
+          </a:prstGeom>
+          <a:noFill/>
+          <a:ln/>
+        </p:spPr>
+        <p:txBody>
+          <a:bodyPr wrap="square" lIns="0" tIns="0" rIns="0" bIns="0" rtlCol="0" anchor="t"/>
+          <a:lstStyle/>
+          <a:p>
+            <a:pPr indent="0" marL="0">
+              <a:buNone/>
+            </a:pPr>
+            <a:r>
+              <a:rPr lang="en-US" sz="1900" b="1" dirty="0">
+                <a:solidFill>
+                  <a:schemeClr val="tx1"/>
+                </a:solidFill>
+                <a:latin typeface="Montserrat" pitchFamily="34" charset="0"/>
+                <a:ea typeface="Montserrat" pitchFamily="34" charset="-122"/>
+                <a:cs typeface="Montserrat" pitchFamily="34" charset="-120"/>
+              </a:rPr>
+              <a:t>Los sábados a la mañana, en vivo, planificás tu semana</a:t>
+            </a:r>
+            <a:endParaRPr lang="en-US" sz="1900" dirty="0"/>
+          </a:p>
+        </p:txBody>
+      </p:sp>
+      <p:sp>
+        <p:nvSpPr>
+          <p:cNvPr id="15" name="Pilar 2 para qué"/>
+          <p:cNvSpPr txBox="1"/>
+          <p:nvPr/>
+        </p:nvSpPr>
+        <p:spPr>
+          <a:xfrm>
+            <a:off x="4734458" y="4206240"/>
+            <a:ext cx="2722778" cy="731520"/>
+          </a:xfrm>
+          <a:prstGeom prst="rect">
+            <a:avLst/>
+          </a:prstGeom>
+          <a:noFill/>
+          <a:ln/>
+        </p:spPr>
+        <p:txBody>
+          <a:bodyPr wrap="square" lIns="0" tIns="0" rIns="0" bIns="0" rtlCol="0" anchor="t"/>
+          <a:lstStyle/>
+          <a:p>
+            <a:pPr indent="0" marL="0">
+              <a:buNone/>
+            </a:pPr>
+            <a:r>
+              <a:rPr lang="en-US" sz="1600" dirty="0">
+                <a:solidFill>
+                  <a:schemeClr val="accent3"/>
+                </a:solidFill>
+              </a:rPr>
+              <a:t>Para arrancar el lunes sabiendo qué hacer y que tus cosas tengan lugar.</a:t>
+            </a:r>
+            <a:endParaRPr lang="en-US" sz="1600" dirty="0"/>
+          </a:p>
+        </p:txBody>
+      </p:sp>
+      <p:sp>
+        <p:nvSpPr>
+          <p:cNvPr id="16" name="Pilar 3"/>
+          <p:cNvSpPr/>
+          <p:nvPr/>
+        </p:nvSpPr>
+        <p:spPr>
+          <a:xfrm>
+            <a:off x="8097317" y="2103120"/>
+            <a:ext cx="3362858" cy="2971800"/>
+          </a:xfrm>
+          <a:prstGeom prst="roundRect">
+            <a:avLst>
+              <a:gd name="adj" fmla="val 5538"/>
+            </a:avLst>
+          </a:prstGeom>
+          <a:solidFill>
+            <a:schemeClr val="bg2"/>
+          </a:solidFill>
+          <a:ln w="12700">
+            <a:solidFill>
+              <a:schemeClr val="bg2"/>
+            </a:solidFill>
+            <a:prstDash val="solid"/>
+          </a:ln>
+        </p:spPr>
+      </p:sp>
+      <p:sp>
+        <p:nvSpPr>
+          <p:cNvPr id="17" name="Pilar 3 círculo"/>
+          <p:cNvSpPr/>
+          <p:nvPr/>
+        </p:nvSpPr>
+        <p:spPr>
+          <a:xfrm>
+            <a:off x="8417357" y="2395728"/>
+            <a:ext cx="457200" cy="457200"/>
+          </a:xfrm>
+          <a:prstGeom prst="ellipse">
+            <a:avLst/>
+          </a:prstGeom>
+          <a:solidFill>
+            <a:schemeClr val="accent1"/>
+          </a:solidFill>
+          <a:ln w="12700">
+            <a:solidFill>
+              <a:schemeClr val="accent1"/>
+            </a:solidFill>
+            <a:prstDash val="solid"/>
+          </a:ln>
+        </p:spPr>
+      </p:sp>
+      <p:sp>
+        <p:nvSpPr>
+          <p:cNvPr id="18" name="Pilar 3 número"/>
+          <p:cNvSpPr txBox="1"/>
+          <p:nvPr/>
+        </p:nvSpPr>
+        <p:spPr>
+          <a:xfrm>
+            <a:off x="8417357" y="2395728"/>
+            <a:ext cx="457200" cy="457200"/>
+          </a:xfrm>
+          <a:prstGeom prst="rect">
+            <a:avLst/>
+          </a:prstGeom>
+          <a:noFill/>
+          <a:ln/>
+        </p:spPr>
+        <p:txBody>
+          <a:bodyPr wrap="square" lIns="0" tIns="0" rIns="0" bIns="0" rtlCol="0" anchor="ctr"/>
+          <a:lstStyle/>
+          <a:p>
+            <a:pPr algn="ctr" indent="0" marL="0">
+              <a:buNone/>
+            </a:pPr>
+            <a:r>
+              <a:rPr lang="en-US" sz="1600" b="1" dirty="0">
+                <a:solidFill>
+                  <a:schemeClr val="bg1"/>
+                </a:solidFill>
+                <a:latin typeface="Montserrat" pitchFamily="34" charset="0"/>
+                <a:ea typeface="Montserrat" pitchFamily="34" charset="-122"/>
+                <a:cs typeface="Montserrat" pitchFamily="34" charset="-120"/>
+              </a:rPr>
+              <a:t>3</a:t>
+            </a:r>
+            <a:endParaRPr lang="en-US" sz="1600" dirty="0"/>
+          </a:p>
+        </p:txBody>
+      </p:sp>
+      <p:sp>
+        <p:nvSpPr>
+          <p:cNvPr id="19" name="Pilar 3 nombre"/>
+          <p:cNvSpPr txBox="1"/>
+          <p:nvPr/>
+        </p:nvSpPr>
+        <p:spPr>
+          <a:xfrm>
+            <a:off x="9011717" y="2395728"/>
+            <a:ext cx="2174138" cy="457200"/>
+          </a:xfrm>
+          <a:prstGeom prst="rect">
+            <a:avLst/>
+          </a:prstGeom>
+          <a:noFill/>
+          <a:ln/>
+        </p:spPr>
+        <p:txBody>
+          <a:bodyPr wrap="square" lIns="0" tIns="0" rIns="0" bIns="0" rtlCol="0" anchor="ctr"/>
+          <a:lstStyle/>
+          <a:p>
+            <a:pPr indent="0" marL="0">
+              <a:buNone/>
+            </a:pPr>
+            <a:r>
+              <a:rPr lang="en-US" sz="1400" b="1" spc="200" kern="0" dirty="0">
+                <a:solidFill>
+                  <a:schemeClr val="accent1"/>
+                </a:solidFill>
+              </a:rPr>
+              <a:t>EL CO-WORK</a:t>
+            </a:r>
+            <a:endParaRPr lang="en-US" sz="1400" dirty="0"/>
+          </a:p>
+        </p:txBody>
+      </p:sp>
+      <p:sp>
+        <p:nvSpPr>
+          <p:cNvPr id="20" name="Pilar 3 qué"/>
+          <p:cNvSpPr txBox="1"/>
+          <p:nvPr/>
+        </p:nvSpPr>
+        <p:spPr>
+          <a:xfrm>
+            <a:off x="8417357" y="3063240"/>
+            <a:ext cx="2722778" cy="1097280"/>
+          </a:xfrm>
+          <a:prstGeom prst="rect">
+            <a:avLst/>
+          </a:prstGeom>
+          <a:noFill/>
+          <a:ln/>
+        </p:spPr>
+        <p:txBody>
+          <a:bodyPr wrap="square" lIns="0" tIns="0" rIns="0" bIns="0" rtlCol="0" anchor="t"/>
+          <a:lstStyle/>
+          <a:p>
+            <a:pPr indent="0" marL="0">
+              <a:buNone/>
+            </a:pPr>
+            <a:r>
+              <a:rPr lang="en-US" sz="1900" b="1" dirty="0">
+                <a:solidFill>
+                  <a:schemeClr val="tx1"/>
+                </a:solidFill>
+                <a:latin typeface="Montserrat" pitchFamily="34" charset="0"/>
+                <a:ea typeface="Montserrat" pitchFamily="34" charset="-122"/>
+                <a:cs typeface="Montserrat" pitchFamily="34" charset="-120"/>
+              </a:rPr>
+              <a:t>Bloques de foco en vivo, de lunes a viernes</a:t>
+            </a:r>
+            <a:endParaRPr lang="en-US" sz="1900" dirty="0"/>
+          </a:p>
+        </p:txBody>
+      </p:sp>
+      <p:sp>
+        <p:nvSpPr>
+          <p:cNvPr id="21" name="Pilar 3 para qué"/>
+          <p:cNvSpPr txBox="1"/>
+          <p:nvPr/>
+        </p:nvSpPr>
+        <p:spPr>
+          <a:xfrm>
+            <a:off x="8417357" y="4206240"/>
+            <a:ext cx="2722778" cy="731520"/>
+          </a:xfrm>
+          <a:prstGeom prst="rect">
+            <a:avLst/>
+          </a:prstGeom>
+          <a:noFill/>
+          <a:ln/>
+        </p:spPr>
+        <p:txBody>
+          <a:bodyPr wrap="square" lIns="0" tIns="0" rIns="0" bIns="0" rtlCol="0" anchor="t"/>
+          <a:lstStyle/>
+          <a:p>
+            <a:pPr indent="0" marL="0">
+              <a:buNone/>
+            </a:pPr>
+            <a:r>
+              <a:rPr lang="en-US" sz="1600" dirty="0">
+                <a:solidFill>
+                  <a:schemeClr val="accent3"/>
+                </a:solidFill>
+              </a:rPr>
+              <a:t>Para hacer lo que venías postergando, al lado de gente en la misma.</a:t>
+            </a:r>
+            <a:endParaRPr lang="en-US" sz="1600" dirty="0"/>
+          </a:p>
+        </p:txBody>
+      </p:sp>
+      <p:sp>
+        <p:nvSpPr>
+          <p:cNvPr id="22" name="La regla"/>
+          <p:cNvSpPr/>
+          <p:nvPr/>
+        </p:nvSpPr>
+        <p:spPr>
+          <a:xfrm>
+            <a:off x="731520" y="5349240"/>
+            <a:ext cx="7040880" cy="566928"/>
+          </a:xfrm>
+          <a:prstGeom prst="roundRect">
+            <a:avLst>
+              <a:gd name="adj" fmla="val 50000"/>
+            </a:avLst>
+          </a:prstGeom>
+          <a:solidFill>
+            <a:schemeClr val="tx1"/>
+          </a:solidFill>
+          <a:ln w="12700">
+            <a:solidFill>
+              <a:schemeClr val="tx1"/>
+            </a:solidFill>
+            <a:prstDash val="solid"/>
+          </a:ln>
+        </p:spPr>
+      </p:sp>
+      <p:sp>
+        <p:nvSpPr>
+          <p:cNvPr id="23" name="La regla (texto)"/>
+          <p:cNvSpPr txBox="1"/>
+          <p:nvPr/>
+        </p:nvSpPr>
+        <p:spPr>
+          <a:xfrm>
+            <a:off x="731520" y="5349240"/>
+            <a:ext cx="7040880" cy="566928"/>
+          </a:xfrm>
+          <a:prstGeom prst="rect">
+            <a:avLst/>
+          </a:prstGeom>
+          <a:noFill/>
+          <a:ln/>
+        </p:spPr>
+        <p:txBody>
+          <a:bodyPr wrap="square" lIns="0" tIns="0" rIns="0" bIns="0" rtlCol="0" anchor="ctr"/>
+          <a:lstStyle/>
+          <a:p>
+            <a:pPr algn="ctr" indent="0" marL="0">
+              <a:buNone/>
+            </a:pPr>
+            <a:r>
+              <a:rPr lang="en-US" sz="1400" b="1" spc="200" kern="0" dirty="0">
+                <a:solidFill>
+                  <a:schemeClr val="bg1"/>
+                </a:solidFill>
+              </a:rPr>
+              <a:t>LA REGLA: PODÉS DESAPARECER UNA SEMANA. DOS, NO.</a:t>
+            </a:r>
+            <a:endParaRPr lang="en-US" sz="1400" dirty="0"/>
           </a:p>
         </p:txBody>
       </p:sp>
@@ -6137,7 +8724,7 @@
         <p:spPr>
           <a:xfrm>
             <a:off x="731520" y="685800"/>
-            <a:ext cx="10728655" cy="365760"/>
+            <a:ext cx="4114800" cy="365760"/>
           </a:xfrm>
           <a:prstGeom prst="rect">
             <a:avLst/>
@@ -6158,7 +8745,7 @@
                   <a:schemeClr val="accent1"/>
                 </a:solidFill>
               </a:rPr>
-              <a:t>Y ENTRÁS CON</a:t>
+              <a:t>ASÍ SE VE POR DENTRO</a:t>
             </a:r>
             <a:endParaRPr lang="en-US" sz="1400" dirty="0"/>
           </a:p>
@@ -6175,7 +8762,7 @@
         <p:spPr>
           <a:xfrm>
             <a:off x="731520" y="1097280"/>
-            <a:ext cx="10728655" cy="1005840"/>
+            <a:ext cx="4114800" cy="2743200"/>
           </a:xfrm>
           <a:prstGeom prst="rect">
             <a:avLst/>
@@ -6191,79 +8778,90 @@
               <a:buNone/>
             </a:pPr>
             <a:r>
-              <a:rPr lang="en-US" sz="4000" b="1" dirty="0">
-                <a:solidFill>
-                  <a:schemeClr val="tx1"/>
-                </a:solidFill>
-              </a:rPr>
-              <a:t>6 bonos para arrancar el primer día</a:t>
-            </a:r>
-            <a:endParaRPr lang="en-US" sz="4000" dirty="0"/>
-          </a:p>
-        </p:txBody>
-      </p:sp>
-      <p:sp>
-        <p:nvSpPr>
-          <p:cNvPr id="4" name="Bono 1"/>
-          <p:cNvSpPr/>
-          <p:nvPr/>
-        </p:nvSpPr>
-        <p:spPr>
-          <a:xfrm>
-            <a:off x="731520" y="2240280"/>
-            <a:ext cx="3393338" cy="1463040"/>
+              <a:rPr lang="en-US" sz="3600" b="1" dirty="0">
+                <a:solidFill>
+                  <a:schemeClr val="bg1"/>
+                </a:solidFill>
+              </a:rPr>
+              <a:t>Son las 9 y un grupo prende la cámara</a:t>
+            </a:r>
+            <a:endParaRPr lang="en-US" sz="3600" dirty="0"/>
+          </a:p>
+        </p:txBody>
+      </p:sp>
+      <p:sp>
+        <p:nvSpPr>
+          <p:cNvPr id="4" name="Texto"/>
+          <p:cNvSpPr txBox="1"/>
+          <p:nvPr/>
+        </p:nvSpPr>
+        <p:spPr>
+          <a:xfrm>
+            <a:off x="731520" y="3429000"/>
+            <a:ext cx="4114800" cy="1280160"/>
+          </a:xfrm>
+          <a:prstGeom prst="rect">
+            <a:avLst/>
+          </a:prstGeom>
+          <a:noFill/>
+          <a:ln/>
+        </p:spPr>
+        <p:txBody>
+          <a:bodyPr wrap="square" lIns="0" tIns="0" rIns="0" bIns="0" rtlCol="0" anchor="t"/>
+          <a:lstStyle/>
+          <a:p>
+            <a:pPr indent="0" marL="0">
+              <a:buNone/>
+            </a:pPr>
+            <a:r>
+              <a:rPr lang="en-US" sz="2000" dirty="0">
+                <a:solidFill>
+                  <a:schemeClr val="accent2"/>
+                </a:solidFill>
+              </a:rPr>
+              <a:t>Para hacer lo que venía postergando, al lado de otros que están en lo mismo.</a:t>
+            </a:r>
+            <a:endParaRPr lang="en-US" sz="2000" dirty="0"/>
+          </a:p>
+        </p:txBody>
+      </p:sp>
+      <p:sp>
+        <p:nvSpPr>
+          <p:cNvPr id="5" name="Espacio captura co-work"/>
+          <p:cNvSpPr/>
+          <p:nvPr/>
+        </p:nvSpPr>
+        <p:spPr>
+          <a:xfrm>
+            <a:off x="5440680" y="685800"/>
+            <a:ext cx="6016752" cy="5074920"/>
           </a:xfrm>
           <a:prstGeom prst="roundRect">
             <a:avLst>
-              <a:gd name="adj" fmla="val 11250"/>
+              <a:gd name="adj" fmla="val 3243"/>
             </a:avLst>
           </a:prstGeom>
           <a:solidFill>
-            <a:schemeClr val="bg2"/>
+            <a:schemeClr val="tx2"/>
           </a:solidFill>
-          <a:ln w="12700">
+          <a:ln w="19050">
             <a:solidFill>
-              <a:schemeClr val="bg2"/>
+              <a:schemeClr val="accent2"/>
             </a:solidFill>
-            <a:prstDash val="solid"/>
+            <a:prstDash val="dash"/>
           </a:ln>
         </p:spPr>
       </p:sp>
       <p:sp>
         <p:nvSpPr>
-          <p:cNvPr id="5" name="Bono 1 círculo"/>
-          <p:cNvSpPr/>
-          <p:nvPr/>
-        </p:nvSpPr>
-        <p:spPr>
-          <a:xfrm>
-            <a:off x="1005840" y="2688336"/>
-            <a:ext cx="566928" cy="566928"/>
-          </a:xfrm>
-          <a:prstGeom prst="ellipse">
-            <a:avLst/>
-          </a:prstGeom>
-          <a:solidFill>
-            <a:schemeClr val="accent1"/>
-          </a:solidFill>
-          <a:ln w="12700">
-            <a:solidFill>
-              <a:schemeClr val="accent1"/>
-            </a:solidFill>
-            <a:prstDash val="solid"/>
-          </a:ln>
-        </p:spPr>
-      </p:sp>
-      <p:sp>
-        <p:nvSpPr>
-          <p:cNvPr id="6" name="Bono 1 número"/>
+          <p:cNvPr id="6" name="Espacio captura co-work (texto)"/>
           <p:cNvSpPr txBox="1"/>
           <p:nvPr/>
         </p:nvSpPr>
         <p:spPr>
           <a:xfrm>
-            <a:off x="1005840" y="2688336"/>
-            <a:ext cx="566928" cy="566928"/>
+            <a:off x="5715000" y="685800"/>
+            <a:ext cx="5468112" cy="5074920"/>
           </a:xfrm>
           <a:prstGeom prst="rect">
             <a:avLst/>
@@ -6279,706 +8877,28 @@
               <a:buNone/>
             </a:pPr>
             <a:r>
-              <a:rPr lang="en-US" sz="2000" b="1" dirty="0">
-                <a:solidFill>
-                  <a:schemeClr val="bg1"/>
-                </a:solidFill>
-                <a:latin typeface="Montserrat" pitchFamily="34" charset="0"/>
-                <a:ea typeface="Montserrat" pitchFamily="34" charset="-122"/>
-                <a:cs typeface="Montserrat" pitchFamily="34" charset="-120"/>
-              </a:rPr>
-              <a:t>1</a:t>
-            </a:r>
-            <a:endParaRPr lang="en-US" sz="2000" dirty="0"/>
-          </a:p>
-        </p:txBody>
-      </p:sp>
-      <p:sp>
-        <p:nvSpPr>
-          <p:cNvPr id="7" name="Bono 1 nombre"/>
-          <p:cNvSpPr txBox="1"/>
-          <p:nvPr/>
-        </p:nvSpPr>
-        <p:spPr>
-          <a:xfrm>
-            <a:off x="1783080" y="2240280"/>
-            <a:ext cx="2113178" cy="1463040"/>
-          </a:xfrm>
-          <a:prstGeom prst="rect">
-            <a:avLst/>
-          </a:prstGeom>
-          <a:noFill/>
-          <a:ln/>
-        </p:spPr>
-        <p:txBody>
-          <a:bodyPr wrap="square" lIns="0" tIns="0" rIns="0" bIns="0" rtlCol="0" anchor="ctr"/>
-          <a:lstStyle/>
-          <a:p>
-            <a:pPr indent="0" marL="0">
-              <a:buNone/>
-            </a:pPr>
-            <a:r>
-              <a:rPr lang="en-US" sz="1800" b="1" dirty="0">
-                <a:solidFill>
-                  <a:schemeClr val="tx1"/>
-                </a:solidFill>
-                <a:latin typeface="Montserrat" pitchFamily="34" charset="0"/>
-                <a:ea typeface="Montserrat" pitchFamily="34" charset="-122"/>
-                <a:cs typeface="Montserrat" pitchFamily="34" charset="-120"/>
-              </a:rPr>
-              <a:t>Reseteo de Dopamina</a:t>
-            </a:r>
-            <a:endParaRPr lang="en-US" sz="1800" dirty="0"/>
-          </a:p>
-        </p:txBody>
-      </p:sp>
-      <p:sp>
-        <p:nvSpPr>
-          <p:cNvPr id="8" name="Bono 2"/>
-          <p:cNvSpPr/>
-          <p:nvPr/>
-        </p:nvSpPr>
-        <p:spPr>
-          <a:xfrm>
-            <a:off x="4399178" y="2240280"/>
-            <a:ext cx="3393338" cy="1463040"/>
-          </a:xfrm>
-          <a:prstGeom prst="roundRect">
-            <a:avLst>
-              <a:gd name="adj" fmla="val 11250"/>
-            </a:avLst>
-          </a:prstGeom>
-          <a:solidFill>
-            <a:schemeClr val="bg2"/>
-          </a:solidFill>
-          <a:ln w="12700">
-            <a:solidFill>
-              <a:schemeClr val="bg2"/>
-            </a:solidFill>
-            <a:prstDash val="solid"/>
-          </a:ln>
-        </p:spPr>
-      </p:sp>
-      <p:sp>
-        <p:nvSpPr>
-          <p:cNvPr id="9" name="Bono 2 círculo"/>
-          <p:cNvSpPr/>
-          <p:nvPr/>
-        </p:nvSpPr>
-        <p:spPr>
-          <a:xfrm>
-            <a:off x="4673498" y="2688336"/>
-            <a:ext cx="566928" cy="566928"/>
-          </a:xfrm>
-          <a:prstGeom prst="ellipse">
-            <a:avLst/>
-          </a:prstGeom>
-          <a:solidFill>
-            <a:schemeClr val="accent1"/>
-          </a:solidFill>
-          <a:ln w="12700">
-            <a:solidFill>
-              <a:schemeClr val="accent1"/>
-            </a:solidFill>
-            <a:prstDash val="solid"/>
-          </a:ln>
-        </p:spPr>
-      </p:sp>
-      <p:sp>
-        <p:nvSpPr>
-          <p:cNvPr id="10" name="Bono 2 número"/>
-          <p:cNvSpPr txBox="1"/>
-          <p:nvPr/>
-        </p:nvSpPr>
-        <p:spPr>
-          <a:xfrm>
-            <a:off x="4673498" y="2688336"/>
-            <a:ext cx="566928" cy="566928"/>
-          </a:xfrm>
-          <a:prstGeom prst="rect">
-            <a:avLst/>
-          </a:prstGeom>
-          <a:noFill/>
-          <a:ln/>
-        </p:spPr>
-        <p:txBody>
-          <a:bodyPr wrap="square" lIns="0" tIns="0" rIns="0" bIns="0" rtlCol="0" anchor="ctr"/>
-          <a:lstStyle/>
+              <a:rPr lang="en-US" sz="1300" b="1" spc="200" kern="0" dirty="0">
+                <a:solidFill>
+                  <a:schemeClr val="accent2"/>
+                </a:solidFill>
+              </a:rPr>
+              <a:t>CAPTURA</a:t>
+            </a:r>
+            <a:endParaRPr lang="en-US" sz="1300" dirty="0"/>
+          </a:p>
           <a:p>
             <a:pPr algn="ctr" indent="0" marL="0">
               <a:buNone/>
             </a:pPr>
             <a:r>
-              <a:rPr lang="en-US" sz="2000" b="1" dirty="0">
-                <a:solidFill>
-                  <a:schemeClr val="bg1"/>
-                </a:solidFill>
-                <a:latin typeface="Montserrat" pitchFamily="34" charset="0"/>
-                <a:ea typeface="Montserrat" pitchFamily="34" charset="-122"/>
-                <a:cs typeface="Montserrat" pitchFamily="34" charset="-120"/>
-              </a:rPr>
-              <a:t>2</a:t>
-            </a:r>
-            <a:endParaRPr lang="en-US" sz="2000" dirty="0"/>
-          </a:p>
-        </p:txBody>
-      </p:sp>
-      <p:sp>
-        <p:nvSpPr>
-          <p:cNvPr id="11" name="Bono 2 nombre"/>
-          <p:cNvSpPr txBox="1"/>
-          <p:nvPr/>
-        </p:nvSpPr>
-        <p:spPr>
-          <a:xfrm>
-            <a:off x="5450738" y="2240280"/>
-            <a:ext cx="2113178" cy="1463040"/>
-          </a:xfrm>
-          <a:prstGeom prst="rect">
-            <a:avLst/>
-          </a:prstGeom>
-          <a:noFill/>
-          <a:ln/>
-        </p:spPr>
-        <p:txBody>
-          <a:bodyPr wrap="square" lIns="0" tIns="0" rIns="0" bIns="0" rtlCol="0" anchor="ctr"/>
-          <a:lstStyle/>
-          <a:p>
-            <a:pPr indent="0" marL="0">
-              <a:buNone/>
-            </a:pPr>
-            <a:r>
-              <a:rPr lang="en-US" sz="1800" b="1" dirty="0">
-                <a:solidFill>
-                  <a:schemeClr val="tx1"/>
-                </a:solidFill>
-                <a:latin typeface="Montserrat" pitchFamily="34" charset="0"/>
-                <a:ea typeface="Montserrat" pitchFamily="34" charset="-122"/>
-                <a:cs typeface="Montserrat" pitchFamily="34" charset="-120"/>
-              </a:rPr>
-              <a:t>Sueño Blindado</a:t>
-            </a:r>
-            <a:endParaRPr lang="en-US" sz="1800" dirty="0"/>
-          </a:p>
-        </p:txBody>
-      </p:sp>
-      <p:sp>
-        <p:nvSpPr>
-          <p:cNvPr id="12" name="Bono 3"/>
-          <p:cNvSpPr/>
-          <p:nvPr/>
-        </p:nvSpPr>
-        <p:spPr>
-          <a:xfrm>
-            <a:off x="8066837" y="2240280"/>
-            <a:ext cx="3393338" cy="1463040"/>
-          </a:xfrm>
-          <a:prstGeom prst="roundRect">
-            <a:avLst>
-              <a:gd name="adj" fmla="val 11250"/>
-            </a:avLst>
-          </a:prstGeom>
-          <a:solidFill>
-            <a:schemeClr val="bg2"/>
-          </a:solidFill>
-          <a:ln w="12700">
-            <a:solidFill>
-              <a:schemeClr val="bg2"/>
-            </a:solidFill>
-            <a:prstDash val="solid"/>
-          </a:ln>
-        </p:spPr>
-      </p:sp>
-      <p:sp>
-        <p:nvSpPr>
-          <p:cNvPr id="13" name="Bono 3 círculo"/>
-          <p:cNvSpPr/>
-          <p:nvPr/>
-        </p:nvSpPr>
-        <p:spPr>
-          <a:xfrm>
-            <a:off x="8341157" y="2688336"/>
-            <a:ext cx="566928" cy="566928"/>
-          </a:xfrm>
-          <a:prstGeom prst="ellipse">
-            <a:avLst/>
-          </a:prstGeom>
-          <a:solidFill>
-            <a:schemeClr val="accent1"/>
-          </a:solidFill>
-          <a:ln w="12700">
-            <a:solidFill>
-              <a:schemeClr val="accent1"/>
-            </a:solidFill>
-            <a:prstDash val="solid"/>
-          </a:ln>
-        </p:spPr>
-      </p:sp>
-      <p:sp>
-        <p:nvSpPr>
-          <p:cNvPr id="14" name="Bono 3 número"/>
-          <p:cNvSpPr txBox="1"/>
-          <p:nvPr/>
-        </p:nvSpPr>
-        <p:spPr>
-          <a:xfrm>
-            <a:off x="8341157" y="2688336"/>
-            <a:ext cx="566928" cy="566928"/>
-          </a:xfrm>
-          <a:prstGeom prst="rect">
-            <a:avLst/>
-          </a:prstGeom>
-          <a:noFill/>
-          <a:ln/>
-        </p:spPr>
-        <p:txBody>
-          <a:bodyPr wrap="square" lIns="0" tIns="0" rIns="0" bIns="0" rtlCol="0" anchor="ctr"/>
-          <a:lstStyle/>
-          <a:p>
-            <a:pPr algn="ctr" indent="0" marL="0">
-              <a:buNone/>
-            </a:pPr>
-            <a:r>
-              <a:rPr lang="en-US" sz="2000" b="1" dirty="0">
-                <a:solidFill>
-                  <a:schemeClr val="bg1"/>
-                </a:solidFill>
-                <a:latin typeface="Montserrat" pitchFamily="34" charset="0"/>
-                <a:ea typeface="Montserrat" pitchFamily="34" charset="-122"/>
-                <a:cs typeface="Montserrat" pitchFamily="34" charset="-120"/>
-              </a:rPr>
-              <a:t>3</a:t>
-            </a:r>
-            <a:endParaRPr lang="en-US" sz="2000" dirty="0"/>
-          </a:p>
-        </p:txBody>
-      </p:sp>
-      <p:sp>
-        <p:nvSpPr>
-          <p:cNvPr id="15" name="Bono 3 nombre"/>
-          <p:cNvSpPr txBox="1"/>
-          <p:nvPr/>
-        </p:nvSpPr>
-        <p:spPr>
-          <a:xfrm>
-            <a:off x="9118397" y="2240280"/>
-            <a:ext cx="2113178" cy="1463040"/>
-          </a:xfrm>
-          <a:prstGeom prst="rect">
-            <a:avLst/>
-          </a:prstGeom>
-          <a:noFill/>
-          <a:ln/>
-        </p:spPr>
-        <p:txBody>
-          <a:bodyPr wrap="square" lIns="0" tIns="0" rIns="0" bIns="0" rtlCol="0" anchor="ctr"/>
-          <a:lstStyle/>
-          <a:p>
-            <a:pPr indent="0" marL="0">
-              <a:buNone/>
-            </a:pPr>
-            <a:r>
-              <a:rPr lang="en-US" sz="1800" b="1" dirty="0">
-                <a:solidFill>
-                  <a:schemeClr val="tx1"/>
-                </a:solidFill>
-                <a:latin typeface="Montserrat" pitchFamily="34" charset="0"/>
-                <a:ea typeface="Montserrat" pitchFamily="34" charset="-122"/>
-                <a:cs typeface="Montserrat" pitchFamily="34" charset="-120"/>
-              </a:rPr>
-              <a:t>Bloque de Foco</a:t>
-            </a:r>
-            <a:endParaRPr lang="en-US" sz="1800" dirty="0"/>
-          </a:p>
-        </p:txBody>
-      </p:sp>
-      <p:sp>
-        <p:nvSpPr>
-          <p:cNvPr id="16" name="Bono 4"/>
-          <p:cNvSpPr/>
-          <p:nvPr/>
-        </p:nvSpPr>
-        <p:spPr>
-          <a:xfrm>
-            <a:off x="731520" y="3977640"/>
-            <a:ext cx="3393338" cy="1463040"/>
-          </a:xfrm>
-          <a:prstGeom prst="roundRect">
-            <a:avLst>
-              <a:gd name="adj" fmla="val 11250"/>
-            </a:avLst>
-          </a:prstGeom>
-          <a:solidFill>
-            <a:schemeClr val="bg2"/>
-          </a:solidFill>
-          <a:ln w="12700">
-            <a:solidFill>
-              <a:schemeClr val="bg2"/>
-            </a:solidFill>
-            <a:prstDash val="solid"/>
-          </a:ln>
-        </p:spPr>
-      </p:sp>
-      <p:sp>
-        <p:nvSpPr>
-          <p:cNvPr id="17" name="Bono 4 círculo"/>
-          <p:cNvSpPr/>
-          <p:nvPr/>
-        </p:nvSpPr>
-        <p:spPr>
-          <a:xfrm>
-            <a:off x="1005840" y="4425696"/>
-            <a:ext cx="566928" cy="566928"/>
-          </a:xfrm>
-          <a:prstGeom prst="ellipse">
-            <a:avLst/>
-          </a:prstGeom>
-          <a:solidFill>
-            <a:schemeClr val="accent1"/>
-          </a:solidFill>
-          <a:ln w="12700">
-            <a:solidFill>
-              <a:schemeClr val="accent1"/>
-            </a:solidFill>
-            <a:prstDash val="solid"/>
-          </a:ln>
-        </p:spPr>
-      </p:sp>
-      <p:sp>
-        <p:nvSpPr>
-          <p:cNvPr id="18" name="Bono 4 número"/>
-          <p:cNvSpPr txBox="1"/>
-          <p:nvPr/>
-        </p:nvSpPr>
-        <p:spPr>
-          <a:xfrm>
-            <a:off x="1005840" y="4425696"/>
-            <a:ext cx="566928" cy="566928"/>
-          </a:xfrm>
-          <a:prstGeom prst="rect">
-            <a:avLst/>
-          </a:prstGeom>
-          <a:noFill/>
-          <a:ln/>
-        </p:spPr>
-        <p:txBody>
-          <a:bodyPr wrap="square" lIns="0" tIns="0" rIns="0" bIns="0" rtlCol="0" anchor="ctr"/>
-          <a:lstStyle/>
-          <a:p>
-            <a:pPr algn="ctr" indent="0" marL="0">
-              <a:buNone/>
-            </a:pPr>
-            <a:r>
-              <a:rPr lang="en-US" sz="2000" b="1" dirty="0">
-                <a:solidFill>
-                  <a:schemeClr val="bg1"/>
-                </a:solidFill>
-                <a:latin typeface="Montserrat" pitchFamily="34" charset="0"/>
-                <a:ea typeface="Montserrat" pitchFamily="34" charset="-122"/>
-                <a:cs typeface="Montserrat" pitchFamily="34" charset="-120"/>
-              </a:rPr>
-              <a:t>4</a:t>
-            </a:r>
-            <a:endParaRPr lang="en-US" sz="2000" dirty="0"/>
-          </a:p>
-        </p:txBody>
-      </p:sp>
-      <p:sp>
-        <p:nvSpPr>
-          <p:cNvPr id="19" name="Bono 4 nombre"/>
-          <p:cNvSpPr txBox="1"/>
-          <p:nvPr/>
-        </p:nvSpPr>
-        <p:spPr>
-          <a:xfrm>
-            <a:off x="1783080" y="3977640"/>
-            <a:ext cx="2113178" cy="1463040"/>
-          </a:xfrm>
-          <a:prstGeom prst="rect">
-            <a:avLst/>
-          </a:prstGeom>
-          <a:noFill/>
-          <a:ln/>
-        </p:spPr>
-        <p:txBody>
-          <a:bodyPr wrap="square" lIns="0" tIns="0" rIns="0" bIns="0" rtlCol="0" anchor="ctr"/>
-          <a:lstStyle/>
-          <a:p>
-            <a:pPr indent="0" marL="0">
-              <a:buNone/>
-            </a:pPr>
-            <a:r>
-              <a:rPr lang="en-US" sz="1800" b="1" dirty="0">
-                <a:solidFill>
-                  <a:schemeClr val="tx1"/>
-                </a:solidFill>
-                <a:latin typeface="Montserrat" pitchFamily="34" charset="0"/>
-                <a:ea typeface="Montserrat" pitchFamily="34" charset="-122"/>
-                <a:cs typeface="Montserrat" pitchFamily="34" charset="-120"/>
-              </a:rPr>
-              <a:t>Masterclass: la neurociencia de la procrastinación</a:t>
-            </a:r>
-            <a:endParaRPr lang="en-US" sz="1800" dirty="0"/>
-          </a:p>
-        </p:txBody>
-      </p:sp>
-      <p:sp>
-        <p:nvSpPr>
-          <p:cNvPr id="20" name="Bono 5"/>
-          <p:cNvSpPr/>
-          <p:nvPr/>
-        </p:nvSpPr>
-        <p:spPr>
-          <a:xfrm>
-            <a:off x="4399178" y="3977640"/>
-            <a:ext cx="3393338" cy="1463040"/>
-          </a:xfrm>
-          <a:prstGeom prst="roundRect">
-            <a:avLst>
-              <a:gd name="adj" fmla="val 11250"/>
-            </a:avLst>
-          </a:prstGeom>
-          <a:solidFill>
-            <a:schemeClr val="bg2"/>
-          </a:solidFill>
-          <a:ln w="12700">
-            <a:solidFill>
-              <a:schemeClr val="bg2"/>
-            </a:solidFill>
-            <a:prstDash val="solid"/>
-          </a:ln>
-        </p:spPr>
-      </p:sp>
-      <p:sp>
-        <p:nvSpPr>
-          <p:cNvPr id="21" name="Bono 5 círculo"/>
-          <p:cNvSpPr/>
-          <p:nvPr/>
-        </p:nvSpPr>
-        <p:spPr>
-          <a:xfrm>
-            <a:off x="4673498" y="4425696"/>
-            <a:ext cx="566928" cy="566928"/>
-          </a:xfrm>
-          <a:prstGeom prst="ellipse">
-            <a:avLst/>
-          </a:prstGeom>
-          <a:solidFill>
-            <a:schemeClr val="accent1"/>
-          </a:solidFill>
-          <a:ln w="12700">
-            <a:solidFill>
-              <a:schemeClr val="accent1"/>
-            </a:solidFill>
-            <a:prstDash val="solid"/>
-          </a:ln>
-        </p:spPr>
-      </p:sp>
-      <p:sp>
-        <p:nvSpPr>
-          <p:cNvPr id="22" name="Bono 5 número"/>
-          <p:cNvSpPr txBox="1"/>
-          <p:nvPr/>
-        </p:nvSpPr>
-        <p:spPr>
-          <a:xfrm>
-            <a:off x="4673498" y="4425696"/>
-            <a:ext cx="566928" cy="566928"/>
-          </a:xfrm>
-          <a:prstGeom prst="rect">
-            <a:avLst/>
-          </a:prstGeom>
-          <a:noFill/>
-          <a:ln/>
-        </p:spPr>
-        <p:txBody>
-          <a:bodyPr wrap="square" lIns="0" tIns="0" rIns="0" bIns="0" rtlCol="0" anchor="ctr"/>
-          <a:lstStyle/>
-          <a:p>
-            <a:pPr algn="ctr" indent="0" marL="0">
-              <a:buNone/>
-            </a:pPr>
-            <a:r>
-              <a:rPr lang="en-US" sz="2000" b="1" dirty="0">
-                <a:solidFill>
-                  <a:schemeClr val="bg1"/>
-                </a:solidFill>
-                <a:latin typeface="Montserrat" pitchFamily="34" charset="0"/>
-                <a:ea typeface="Montserrat" pitchFamily="34" charset="-122"/>
-                <a:cs typeface="Montserrat" pitchFamily="34" charset="-120"/>
-              </a:rPr>
-              <a:t>5</a:t>
-            </a:r>
-            <a:endParaRPr lang="en-US" sz="2000" dirty="0"/>
-          </a:p>
-        </p:txBody>
-      </p:sp>
-      <p:sp>
-        <p:nvSpPr>
-          <p:cNvPr id="23" name="Bono 5 nombre"/>
-          <p:cNvSpPr txBox="1"/>
-          <p:nvPr/>
-        </p:nvSpPr>
-        <p:spPr>
-          <a:xfrm>
-            <a:off x="5450738" y="3977640"/>
-            <a:ext cx="2113178" cy="1463040"/>
-          </a:xfrm>
-          <a:prstGeom prst="rect">
-            <a:avLst/>
-          </a:prstGeom>
-          <a:noFill/>
-          <a:ln/>
-        </p:spPr>
-        <p:txBody>
-          <a:bodyPr wrap="square" lIns="0" tIns="0" rIns="0" bIns="0" rtlCol="0" anchor="ctr"/>
-          <a:lstStyle/>
-          <a:p>
-            <a:pPr indent="0" marL="0">
-              <a:buNone/>
-            </a:pPr>
-            <a:r>
-              <a:rPr lang="en-US" sz="1800" b="1" dirty="0">
-                <a:solidFill>
-                  <a:schemeClr val="tx1"/>
-                </a:solidFill>
-                <a:latin typeface="Montserrat" pitchFamily="34" charset="0"/>
-                <a:ea typeface="Montserrat" pitchFamily="34" charset="-122"/>
-                <a:cs typeface="Montserrat" pitchFamily="34" charset="-120"/>
-              </a:rPr>
-              <a:t>Reto de 7 días</a:t>
-            </a:r>
-            <a:endParaRPr lang="en-US" sz="1800" dirty="0"/>
-          </a:p>
-        </p:txBody>
-      </p:sp>
-      <p:sp>
-        <p:nvSpPr>
-          <p:cNvPr id="24" name="Bono 6"/>
-          <p:cNvSpPr/>
-          <p:nvPr/>
-        </p:nvSpPr>
-        <p:spPr>
-          <a:xfrm>
-            <a:off x="8066837" y="3977640"/>
-            <a:ext cx="3393338" cy="1463040"/>
-          </a:xfrm>
-          <a:prstGeom prst="roundRect">
-            <a:avLst>
-              <a:gd name="adj" fmla="val 11250"/>
-            </a:avLst>
-          </a:prstGeom>
-          <a:solidFill>
-            <a:schemeClr val="bg2"/>
-          </a:solidFill>
-          <a:ln w="12700">
-            <a:solidFill>
-              <a:schemeClr val="bg2"/>
-            </a:solidFill>
-            <a:prstDash val="solid"/>
-          </a:ln>
-        </p:spPr>
-      </p:sp>
-      <p:sp>
-        <p:nvSpPr>
-          <p:cNvPr id="25" name="Bono 6 círculo"/>
-          <p:cNvSpPr/>
-          <p:nvPr/>
-        </p:nvSpPr>
-        <p:spPr>
-          <a:xfrm>
-            <a:off x="8341157" y="4425696"/>
-            <a:ext cx="566928" cy="566928"/>
-          </a:xfrm>
-          <a:prstGeom prst="ellipse">
-            <a:avLst/>
-          </a:prstGeom>
-          <a:solidFill>
-            <a:schemeClr val="accent1"/>
-          </a:solidFill>
-          <a:ln w="12700">
-            <a:solidFill>
-              <a:schemeClr val="accent1"/>
-            </a:solidFill>
-            <a:prstDash val="solid"/>
-          </a:ln>
-        </p:spPr>
-      </p:sp>
-      <p:sp>
-        <p:nvSpPr>
-          <p:cNvPr id="26" name="Bono 6 número"/>
-          <p:cNvSpPr txBox="1"/>
-          <p:nvPr/>
-        </p:nvSpPr>
-        <p:spPr>
-          <a:xfrm>
-            <a:off x="8341157" y="4425696"/>
-            <a:ext cx="566928" cy="566928"/>
-          </a:xfrm>
-          <a:prstGeom prst="rect">
-            <a:avLst/>
-          </a:prstGeom>
-          <a:noFill/>
-          <a:ln/>
-        </p:spPr>
-        <p:txBody>
-          <a:bodyPr wrap="square" lIns="0" tIns="0" rIns="0" bIns="0" rtlCol="0" anchor="ctr"/>
-          <a:lstStyle/>
-          <a:p>
-            <a:pPr algn="ctr" indent="0" marL="0">
-              <a:buNone/>
-            </a:pPr>
-            <a:r>
-              <a:rPr lang="en-US" sz="2000" b="1" dirty="0">
-                <a:solidFill>
-                  <a:schemeClr val="bg1"/>
-                </a:solidFill>
-                <a:latin typeface="Montserrat" pitchFamily="34" charset="0"/>
-                <a:ea typeface="Montserrat" pitchFamily="34" charset="-122"/>
-                <a:cs typeface="Montserrat" pitchFamily="34" charset="-120"/>
-              </a:rPr>
-              <a:t>6</a:t>
-            </a:r>
-            <a:endParaRPr lang="en-US" sz="2000" dirty="0"/>
-          </a:p>
-        </p:txBody>
-      </p:sp>
-      <p:sp>
-        <p:nvSpPr>
-          <p:cNvPr id="27" name="Bono 6 nombre"/>
-          <p:cNvSpPr txBox="1"/>
-          <p:nvPr/>
-        </p:nvSpPr>
-        <p:spPr>
-          <a:xfrm>
-            <a:off x="9118397" y="3977640"/>
-            <a:ext cx="2113178" cy="1463040"/>
-          </a:xfrm>
-          <a:prstGeom prst="rect">
-            <a:avLst/>
-          </a:prstGeom>
-          <a:noFill/>
-          <a:ln/>
-        </p:spPr>
-        <p:txBody>
-          <a:bodyPr wrap="square" lIns="0" tIns="0" rIns="0" bIns="0" rtlCol="0" anchor="ctr"/>
-          <a:lstStyle/>
-          <a:p>
-            <a:pPr indent="0" marL="0">
-              <a:buNone/>
-            </a:pPr>
-            <a:r>
-              <a:rPr lang="en-US" sz="1800" b="1" dirty="0">
-                <a:solidFill>
-                  <a:schemeClr val="tx1"/>
-                </a:solidFill>
-                <a:latin typeface="Montserrat" pitchFamily="34" charset="0"/>
-                <a:ea typeface="Montserrat" pitchFamily="34" charset="-122"/>
-                <a:cs typeface="Montserrat" pitchFamily="34" charset="-120"/>
-              </a:rPr>
-              <a:t>Canal de difusión de WhatsApp</a:t>
-            </a:r>
-            <a:endParaRPr lang="en-US" sz="1800" dirty="0"/>
+              <a:rPr lang="en-US" sz="1300" b="1" spc="200" kern="0" dirty="0">
+                <a:solidFill>
+                  <a:schemeClr val="accent2"/>
+                </a:solidFill>
+              </a:rPr>
+              <a:t>grilla del co-work con las cámaras prendidas</a:t>
+            </a:r>
+            <a:endParaRPr lang="en-US" sz="1300" dirty="0"/>
           </a:p>
         </p:txBody>
       </p:sp>
@@ -7262,14 +9182,214 @@
       </p:grpSpPr>
       <p:sp>
         <p:nvSpPr>
-          <p:cNvPr id="2" name="Kicker"/>
+          <p:cNvPr id="2" name="Text 0"/>
+          <p:cNvSpPr/>
+          <p:nvPr>
+            <p:ph idx="100" type="body" hasCustomPrompt="1"/>
+          </p:nvPr>
+        </p:nvSpPr>
+        <p:spPr>
+          <a:xfrm>
+            <a:off x="731520" y="685800"/>
+            <a:ext cx="10728655" cy="365760"/>
+          </a:xfrm>
+          <a:prstGeom prst="rect">
+            <a:avLst/>
+          </a:prstGeom>
+          <a:noFill/>
+          <a:ln/>
+        </p:spPr>
+        <p:txBody>
+          <a:bodyPr wrap="square" lIns="0" tIns="0" rIns="0" bIns="0" rtlCol="0" anchor="ctr"/>
+          <a:lstStyle/>
+          <a:p>
+            <a:pPr indent="0" marL="0">
+              <a:buNone/>
+            </a:pPr>
+            <a:r>
+              <a:rPr lang="en-US" sz="1400" b="1" spc="300" kern="0" dirty="0">
+                <a:solidFill>
+                  <a:schemeClr val="accent1"/>
+                </a:solidFill>
+              </a:rPr>
+              <a:t>FUNCIONA PARA ALGUIEN COMO VOS</a:t>
+            </a:r>
+            <a:endParaRPr lang="en-US" sz="1400" dirty="0"/>
+          </a:p>
+        </p:txBody>
+      </p:sp>
+      <p:sp>
+        <p:nvSpPr>
+          <p:cNvPr id="3" name="Text 0"/>
+          <p:cNvSpPr/>
+          <p:nvPr>
+            <p:ph idx="101" type="title" hasCustomPrompt="1"/>
+          </p:nvPr>
+        </p:nvSpPr>
+        <p:spPr>
+          <a:xfrm>
+            <a:off x="731520" y="1097280"/>
+            <a:ext cx="10728655" cy="1005840"/>
+          </a:xfrm>
+          <a:prstGeom prst="rect">
+            <a:avLst/>
+          </a:prstGeom>
+          <a:noFill/>
+          <a:ln/>
+        </p:spPr>
+        <p:txBody>
+          <a:bodyPr wrap="square" lIns="0" tIns="0" rIns="0" bIns="0" rtlCol="0" anchor="t"/>
+          <a:lstStyle/>
+          <a:p>
+            <a:pPr algn="l" indent="0" marL="0">
+              <a:buNone/>
+            </a:pPr>
+            <a:r>
+              <a:rPr lang="en-US" sz="4000" b="1" dirty="0">
+                <a:solidFill>
+                  <a:schemeClr val="tx1"/>
+                </a:solidFill>
+              </a:rPr>
+              <a:t>Gente como vos</a:t>
+            </a:r>
+            <a:endParaRPr lang="en-US" sz="4000" dirty="0"/>
+          </a:p>
+        </p:txBody>
+      </p:sp>
+      <p:sp>
+        <p:nvSpPr>
+          <p:cNvPr id="4" name="Caso 1"/>
+          <p:cNvSpPr/>
+          <p:nvPr/>
+        </p:nvSpPr>
+        <p:spPr>
+          <a:xfrm>
+            <a:off x="731520" y="2148840"/>
+            <a:ext cx="2476424" cy="3200400"/>
+          </a:xfrm>
+          <a:prstGeom prst="roundRect">
+            <a:avLst>
+              <a:gd name="adj" fmla="val 6646"/>
+            </a:avLst>
+          </a:prstGeom>
+          <a:solidFill>
+            <a:schemeClr val="bg2"/>
+          </a:solidFill>
+          <a:ln w="12700">
+            <a:solidFill>
+              <a:schemeClr val="bg2"/>
+            </a:solidFill>
+            <a:prstDash val="solid"/>
+          </a:ln>
+        </p:spPr>
+      </p:sp>
+      <p:sp>
+        <p:nvSpPr>
+          <p:cNvPr id="5" name="Caso 1 foto"/>
+          <p:cNvSpPr/>
+          <p:nvPr/>
+        </p:nvSpPr>
+        <p:spPr>
+          <a:xfrm>
+            <a:off x="1421092" y="2468880"/>
+            <a:ext cx="1097280" cy="1097280"/>
+          </a:xfrm>
+          <a:prstGeom prst="ellipse">
+            <a:avLst/>
+          </a:prstGeom>
+          <a:solidFill>
+            <a:schemeClr val="bg1"/>
+          </a:solidFill>
+          <a:ln w="15875">
+            <a:solidFill>
+              <a:schemeClr val="accent3"/>
+            </a:solidFill>
+            <a:prstDash val="dash"/>
+          </a:ln>
+        </p:spPr>
+      </p:sp>
+      <p:sp>
+        <p:nvSpPr>
+          <p:cNvPr id="6" name="Caso 1 foto (texto)"/>
           <p:cNvSpPr txBox="1"/>
           <p:nvPr/>
         </p:nvSpPr>
         <p:spPr>
           <a:xfrm>
-            <a:off x="731520" y="868680"/>
-            <a:ext cx="10728655" cy="365760"/>
+            <a:off x="1421092" y="2468880"/>
+            <a:ext cx="1097280" cy="1097280"/>
+          </a:xfrm>
+          <a:prstGeom prst="rect">
+            <a:avLst/>
+          </a:prstGeom>
+          <a:noFill/>
+          <a:ln/>
+        </p:spPr>
+        <p:txBody>
+          <a:bodyPr wrap="square" lIns="0" tIns="0" rIns="0" bIns="0" rtlCol="0" anchor="ctr"/>
+          <a:lstStyle/>
+          <a:p>
+            <a:pPr algn="ctr" indent="0" marL="0">
+              <a:buNone/>
+            </a:pPr>
+            <a:r>
+              <a:rPr lang="en-US" sz="1100" b="1" spc="200" kern="0" dirty="0">
+                <a:solidFill>
+                  <a:schemeClr val="accent3"/>
+                </a:solidFill>
+              </a:rPr>
+              <a:t>FOTO</a:t>
+            </a:r>
+            <a:endParaRPr lang="en-US" sz="1100" dirty="0"/>
+          </a:p>
+        </p:txBody>
+      </p:sp>
+      <p:sp>
+        <p:nvSpPr>
+          <p:cNvPr id="7" name="Caso 1 perfil"/>
+          <p:cNvSpPr txBox="1"/>
+          <p:nvPr/>
+        </p:nvSpPr>
+        <p:spPr>
+          <a:xfrm>
+            <a:off x="960120" y="3749040"/>
+            <a:ext cx="2019224" cy="548640"/>
+          </a:xfrm>
+          <a:prstGeom prst="rect">
+            <a:avLst/>
+          </a:prstGeom>
+          <a:noFill/>
+          <a:ln/>
+        </p:spPr>
+        <p:txBody>
+          <a:bodyPr wrap="square" lIns="0" tIns="0" rIns="0" bIns="0" rtlCol="0" anchor="ctr"/>
+          <a:lstStyle/>
+          <a:p>
+            <a:pPr algn="ctr" indent="0" marL="0">
+              <a:buNone/>
+            </a:pPr>
+            <a:r>
+              <a:rPr lang="en-US" sz="1300" b="1" spc="100" kern="0" dirty="0">
+                <a:solidFill>
+                  <a:schemeClr val="accent1"/>
+                </a:solidFill>
+              </a:rPr>
+              <a:t>CON EMPLEADOS</a:t>
+            </a:r>
+            <a:endParaRPr lang="en-US" sz="1300" dirty="0"/>
+          </a:p>
+        </p:txBody>
+      </p:sp>
+      <p:sp>
+        <p:nvSpPr>
+          <p:cNvPr id="8" name="Caso 1 historia"/>
+          <p:cNvSpPr txBox="1"/>
+          <p:nvPr/>
+        </p:nvSpPr>
+        <p:spPr>
+          <a:xfrm>
+            <a:off x="960120" y="4389120"/>
+            <a:ext cx="2019224" cy="731520"/>
           </a:xfrm>
           <a:prstGeom prst="rect">
             <a:avLst/>
@@ -7285,27 +9405,239 @@
               <a:buNone/>
             </a:pPr>
             <a:r>
-              <a:rPr lang="en-US" sz="1400" b="1" spc="300" kern="0" dirty="0">
+              <a:rPr lang="en-US" sz="1500" dirty="0">
+                <a:solidFill>
+                  <a:schemeClr val="accent3"/>
+                </a:solidFill>
+              </a:rPr>
+              <a:t>[A CONFIRMAR: caso de Esteban]</a:t>
+            </a:r>
+            <a:endParaRPr lang="en-US" sz="1500" dirty="0"/>
+          </a:p>
+        </p:txBody>
+      </p:sp>
+      <p:sp>
+        <p:nvSpPr>
+          <p:cNvPr id="9" name="Caso 2"/>
+          <p:cNvSpPr/>
+          <p:nvPr/>
+        </p:nvSpPr>
+        <p:spPr>
+          <a:xfrm>
+            <a:off x="3482264" y="2148840"/>
+            <a:ext cx="2476424" cy="3200400"/>
+          </a:xfrm>
+          <a:prstGeom prst="roundRect">
+            <a:avLst>
+              <a:gd name="adj" fmla="val 6646"/>
+            </a:avLst>
+          </a:prstGeom>
+          <a:solidFill>
+            <a:schemeClr val="bg2"/>
+          </a:solidFill>
+          <a:ln w="12700">
+            <a:solidFill>
+              <a:schemeClr val="bg2"/>
+            </a:solidFill>
+            <a:prstDash val="solid"/>
+          </a:ln>
+        </p:spPr>
+      </p:sp>
+      <p:sp>
+        <p:nvSpPr>
+          <p:cNvPr id="10" name="Caso 2 foto"/>
+          <p:cNvSpPr/>
+          <p:nvPr/>
+        </p:nvSpPr>
+        <p:spPr>
+          <a:xfrm>
+            <a:off x="4171836" y="2468880"/>
+            <a:ext cx="1097280" cy="1097280"/>
+          </a:xfrm>
+          <a:prstGeom prst="ellipse">
+            <a:avLst/>
+          </a:prstGeom>
+          <a:solidFill>
+            <a:schemeClr val="bg1"/>
+          </a:solidFill>
+          <a:ln w="15875">
+            <a:solidFill>
+              <a:schemeClr val="accent3"/>
+            </a:solidFill>
+            <a:prstDash val="dash"/>
+          </a:ln>
+        </p:spPr>
+      </p:sp>
+      <p:sp>
+        <p:nvSpPr>
+          <p:cNvPr id="11" name="Caso 2 foto (texto)"/>
+          <p:cNvSpPr txBox="1"/>
+          <p:nvPr/>
+        </p:nvSpPr>
+        <p:spPr>
+          <a:xfrm>
+            <a:off x="4171836" y="2468880"/>
+            <a:ext cx="1097280" cy="1097280"/>
+          </a:xfrm>
+          <a:prstGeom prst="rect">
+            <a:avLst/>
+          </a:prstGeom>
+          <a:noFill/>
+          <a:ln/>
+        </p:spPr>
+        <p:txBody>
+          <a:bodyPr wrap="square" lIns="0" tIns="0" rIns="0" bIns="0" rtlCol="0" anchor="ctr"/>
+          <a:lstStyle/>
+          <a:p>
+            <a:pPr algn="ctr" indent="0" marL="0">
+              <a:buNone/>
+            </a:pPr>
+            <a:r>
+              <a:rPr lang="en-US" sz="1100" b="1" spc="200" kern="0" dirty="0">
+                <a:solidFill>
+                  <a:schemeClr val="accent3"/>
+                </a:solidFill>
+              </a:rPr>
+              <a:t>FOTO</a:t>
+            </a:r>
+            <a:endParaRPr lang="en-US" sz="1100" dirty="0"/>
+          </a:p>
+        </p:txBody>
+      </p:sp>
+      <p:sp>
+        <p:nvSpPr>
+          <p:cNvPr id="12" name="Caso 2 perfil"/>
+          <p:cNvSpPr txBox="1"/>
+          <p:nvPr/>
+        </p:nvSpPr>
+        <p:spPr>
+          <a:xfrm>
+            <a:off x="3710864" y="3749040"/>
+            <a:ext cx="2019224" cy="548640"/>
+          </a:xfrm>
+          <a:prstGeom prst="rect">
+            <a:avLst/>
+          </a:prstGeom>
+          <a:noFill/>
+          <a:ln/>
+        </p:spPr>
+        <p:txBody>
+          <a:bodyPr wrap="square" lIns="0" tIns="0" rIns="0" bIns="0" rtlCol="0" anchor="ctr"/>
+          <a:lstStyle/>
+          <a:p>
+            <a:pPr algn="ctr" indent="0" marL="0">
+              <a:buNone/>
+            </a:pPr>
+            <a:r>
+              <a:rPr lang="en-US" sz="1300" b="1" spc="100" kern="0" dirty="0">
                 <a:solidFill>
                   <a:schemeClr val="accent1"/>
                 </a:solidFill>
               </a:rPr>
-              <a:t>TU LUGAR EN LA COMUNIDAD PRODUCTIVA</a:t>
-            </a:r>
-            <a:endParaRPr lang="en-US" sz="1400" dirty="0"/>
-          </a:p>
-        </p:txBody>
-      </p:sp>
-      <p:sp>
-        <p:nvSpPr>
-          <p:cNvPr id="3" name="Precio anterior"/>
+              <a:t>MAMÁ QUE TRABAJA</a:t>
+            </a:r>
+            <a:endParaRPr lang="en-US" sz="1300" dirty="0"/>
+          </a:p>
+        </p:txBody>
+      </p:sp>
+      <p:sp>
+        <p:nvSpPr>
+          <p:cNvPr id="13" name="Caso 2 historia"/>
           <p:cNvSpPr txBox="1"/>
           <p:nvPr/>
         </p:nvSpPr>
         <p:spPr>
           <a:xfrm>
-            <a:off x="731520" y="1508760"/>
-            <a:ext cx="10728655" cy="822960"/>
+            <a:off x="3710864" y="4389120"/>
+            <a:ext cx="2019224" cy="731520"/>
+          </a:xfrm>
+          <a:prstGeom prst="rect">
+            <a:avLst/>
+          </a:prstGeom>
+          <a:noFill/>
+          <a:ln/>
+        </p:spPr>
+        <p:txBody>
+          <a:bodyPr wrap="square" lIns="0" tIns="0" rIns="0" bIns="0" rtlCol="0" anchor="t"/>
+          <a:lstStyle/>
+          <a:p>
+            <a:pPr algn="ctr" indent="0" marL="0">
+              <a:buNone/>
+            </a:pPr>
+            <a:r>
+              <a:rPr lang="en-US" sz="1500" dirty="0">
+                <a:solidFill>
+                  <a:schemeClr val="accent3"/>
+                </a:solidFill>
+              </a:rPr>
+              <a:t>[A CONFIRMAR: caso de Esteban]</a:t>
+            </a:r>
+            <a:endParaRPr lang="en-US" sz="1500" dirty="0"/>
+          </a:p>
+        </p:txBody>
+      </p:sp>
+      <p:sp>
+        <p:nvSpPr>
+          <p:cNvPr id="14" name="Caso 3"/>
+          <p:cNvSpPr/>
+          <p:nvPr/>
+        </p:nvSpPr>
+        <p:spPr>
+          <a:xfrm>
+            <a:off x="6233008" y="2148840"/>
+            <a:ext cx="2476424" cy="3200400"/>
+          </a:xfrm>
+          <a:prstGeom prst="roundRect">
+            <a:avLst>
+              <a:gd name="adj" fmla="val 6646"/>
+            </a:avLst>
+          </a:prstGeom>
+          <a:solidFill>
+            <a:schemeClr val="bg2"/>
+          </a:solidFill>
+          <a:ln w="12700">
+            <a:solidFill>
+              <a:schemeClr val="bg2"/>
+            </a:solidFill>
+            <a:prstDash val="solid"/>
+          </a:ln>
+        </p:spPr>
+      </p:sp>
+      <p:sp>
+        <p:nvSpPr>
+          <p:cNvPr id="15" name="Caso 3 foto"/>
+          <p:cNvSpPr/>
+          <p:nvPr/>
+        </p:nvSpPr>
+        <p:spPr>
+          <a:xfrm>
+            <a:off x="6922580" y="2468880"/>
+            <a:ext cx="1097280" cy="1097280"/>
+          </a:xfrm>
+          <a:prstGeom prst="ellipse">
+            <a:avLst/>
+          </a:prstGeom>
+          <a:solidFill>
+            <a:schemeClr val="bg1"/>
+          </a:solidFill>
+          <a:ln w="15875">
+            <a:solidFill>
+              <a:schemeClr val="accent3"/>
+            </a:solidFill>
+            <a:prstDash val="dash"/>
+          </a:ln>
+        </p:spPr>
+      </p:sp>
+      <p:sp>
+        <p:nvSpPr>
+          <p:cNvPr id="16" name="Caso 3 foto (texto)"/>
+          <p:cNvSpPr txBox="1"/>
+          <p:nvPr/>
+        </p:nvSpPr>
+        <p:spPr>
+          <a:xfrm>
+            <a:off x="6922580" y="2468880"/>
+            <a:ext cx="1097280" cy="1097280"/>
           </a:xfrm>
           <a:prstGeom prst="rect">
             <a:avLst/>
@@ -7321,30 +9653,27 @@
               <a:buNone/>
             </a:pPr>
             <a:r>
-              <a:rPr lang="en-US" sz="4400" b="1" strike="sngStrike" dirty="0">
-                <a:solidFill>
-                  <a:schemeClr val="accent2"/>
-                </a:solidFill>
-                <a:latin typeface="Montserrat" pitchFamily="34" charset="0"/>
-                <a:ea typeface="Montserrat" pitchFamily="34" charset="-122"/>
-                <a:cs typeface="Montserrat" pitchFamily="34" charset="-120"/>
-              </a:rPr>
-              <a:t>USD 50</a:t>
-            </a:r>
-            <a:endParaRPr lang="en-US" sz="4400" dirty="0"/>
-          </a:p>
-        </p:txBody>
-      </p:sp>
-      <p:sp>
-        <p:nvSpPr>
-          <p:cNvPr id="4" name="Precio"/>
+              <a:rPr lang="en-US" sz="1100" b="1" spc="200" kern="0" dirty="0">
+                <a:solidFill>
+                  <a:schemeClr val="accent3"/>
+                </a:solidFill>
+              </a:rPr>
+              <a:t>FOTO</a:t>
+            </a:r>
+            <a:endParaRPr lang="en-US" sz="1100" dirty="0"/>
+          </a:p>
+        </p:txBody>
+      </p:sp>
+      <p:sp>
+        <p:nvSpPr>
+          <p:cNvPr id="17" name="Caso 3 perfil"/>
           <p:cNvSpPr txBox="1"/>
           <p:nvPr/>
         </p:nvSpPr>
         <p:spPr>
           <a:xfrm>
-            <a:off x="731520" y="2331720"/>
-            <a:ext cx="10728655" cy="1737360"/>
+            <a:off x="6461608" y="3749040"/>
+            <a:ext cx="2019224" cy="548640"/>
           </a:xfrm>
           <a:prstGeom prst="rect">
             <a:avLst/>
@@ -7360,44 +9689,187 @@
               <a:buNone/>
             </a:pPr>
             <a:r>
-              <a:rPr lang="en-US" sz="12000" b="1" dirty="0">
+              <a:rPr lang="en-US" sz="1300" b="1" spc="100" kern="0" dirty="0">
                 <a:solidFill>
                   <a:schemeClr val="accent1"/>
                 </a:solidFill>
-                <a:latin typeface="Montserrat" pitchFamily="34" charset="0"/>
-                <a:ea typeface="Montserrat" pitchFamily="34" charset="-122"/>
-                <a:cs typeface="Montserrat" pitchFamily="34" charset="-120"/>
-              </a:rPr>
-              <a:t>USD 35</a:t>
-            </a:r>
+              </a:rPr>
+              <a:t>ESTUDIA Y TRABAJA</a:t>
+            </a:r>
+            <a:endParaRPr lang="en-US" sz="1300" dirty="0"/>
+          </a:p>
+        </p:txBody>
+      </p:sp>
+      <p:sp>
+        <p:nvSpPr>
+          <p:cNvPr id="18" name="Caso 3 historia"/>
+          <p:cNvSpPr txBox="1"/>
+          <p:nvPr/>
+        </p:nvSpPr>
+        <p:spPr>
+          <a:xfrm>
+            <a:off x="6461608" y="4389120"/>
+            <a:ext cx="2019224" cy="731520"/>
+          </a:xfrm>
+          <a:prstGeom prst="rect">
+            <a:avLst/>
+          </a:prstGeom>
+          <a:noFill/>
+          <a:ln/>
+        </p:spPr>
+        <p:txBody>
+          <a:bodyPr wrap="square" lIns="0" tIns="0" rIns="0" bIns="0" rtlCol="0" anchor="t"/>
+          <a:lstStyle/>
+          <a:p>
             <a:pPr algn="ctr" indent="0" marL="0">
               <a:buNone/>
             </a:pPr>
             <a:r>
-              <a:rPr lang="en-US" sz="3200" b="1" dirty="0">
-                <a:solidFill>
-                  <a:schemeClr val="bg1"/>
-                </a:solidFill>
-                <a:latin typeface="Montserrat" pitchFamily="34" charset="0"/>
-                <a:ea typeface="Montserrat" pitchFamily="34" charset="-122"/>
-                <a:cs typeface="Montserrat" pitchFamily="34" charset="-120"/>
-              </a:rPr>
-              <a:t> por mes</a:t>
-            </a:r>
-            <a:endParaRPr lang="en-US" sz="1800" dirty="0"/>
-          </a:p>
-        </p:txBody>
-      </p:sp>
-      <p:sp>
-        <p:nvSpPr>
-          <p:cNvPr id="5" name="Condición"/>
+              <a:rPr lang="en-US" sz="1500" dirty="0">
+                <a:solidFill>
+                  <a:schemeClr val="accent3"/>
+                </a:solidFill>
+              </a:rPr>
+              <a:t>[A CONFIRMAR: caso de Esteban]</a:t>
+            </a:r>
+            <a:endParaRPr lang="en-US" sz="1500" dirty="0"/>
+          </a:p>
+        </p:txBody>
+      </p:sp>
+      <p:sp>
+        <p:nvSpPr>
+          <p:cNvPr id="19" name="Caso 4"/>
+          <p:cNvSpPr/>
+          <p:nvPr/>
+        </p:nvSpPr>
+        <p:spPr>
+          <a:xfrm>
+            <a:off x="8983751" y="2148840"/>
+            <a:ext cx="2476424" cy="3200400"/>
+          </a:xfrm>
+          <a:prstGeom prst="roundRect">
+            <a:avLst>
+              <a:gd name="adj" fmla="val 6646"/>
+            </a:avLst>
+          </a:prstGeom>
+          <a:solidFill>
+            <a:schemeClr val="bg2"/>
+          </a:solidFill>
+          <a:ln w="12700">
+            <a:solidFill>
+              <a:schemeClr val="bg2"/>
+            </a:solidFill>
+            <a:prstDash val="solid"/>
+          </a:ln>
+        </p:spPr>
+      </p:sp>
+      <p:sp>
+        <p:nvSpPr>
+          <p:cNvPr id="20" name="Caso 4 foto"/>
+          <p:cNvSpPr/>
+          <p:nvPr/>
+        </p:nvSpPr>
+        <p:spPr>
+          <a:xfrm>
+            <a:off x="9673323" y="2468880"/>
+            <a:ext cx="1097280" cy="1097280"/>
+          </a:xfrm>
+          <a:prstGeom prst="ellipse">
+            <a:avLst/>
+          </a:prstGeom>
+          <a:solidFill>
+            <a:schemeClr val="bg1"/>
+          </a:solidFill>
+          <a:ln w="15875">
+            <a:solidFill>
+              <a:schemeClr val="accent3"/>
+            </a:solidFill>
+            <a:prstDash val="dash"/>
+          </a:ln>
+        </p:spPr>
+      </p:sp>
+      <p:sp>
+        <p:nvSpPr>
+          <p:cNvPr id="21" name="Caso 4 foto (texto)"/>
           <p:cNvSpPr txBox="1"/>
           <p:nvPr/>
         </p:nvSpPr>
         <p:spPr>
           <a:xfrm>
-            <a:off x="731520" y="4160520"/>
-            <a:ext cx="10728655" cy="502920"/>
+            <a:off x="9673323" y="2468880"/>
+            <a:ext cx="1097280" cy="1097280"/>
+          </a:xfrm>
+          <a:prstGeom prst="rect">
+            <a:avLst/>
+          </a:prstGeom>
+          <a:noFill/>
+          <a:ln/>
+        </p:spPr>
+        <p:txBody>
+          <a:bodyPr wrap="square" lIns="0" tIns="0" rIns="0" bIns="0" rtlCol="0" anchor="ctr"/>
+          <a:lstStyle/>
+          <a:p>
+            <a:pPr algn="ctr" indent="0" marL="0">
+              <a:buNone/>
+            </a:pPr>
+            <a:r>
+              <a:rPr lang="en-US" sz="1100" b="1" spc="200" kern="0" dirty="0">
+                <a:solidFill>
+                  <a:schemeClr val="accent3"/>
+                </a:solidFill>
+              </a:rPr>
+              <a:t>FOTO</a:t>
+            </a:r>
+            <a:endParaRPr lang="en-US" sz="1100" dirty="0"/>
+          </a:p>
+        </p:txBody>
+      </p:sp>
+      <p:sp>
+        <p:nvSpPr>
+          <p:cNvPr id="22" name="Caso 4 perfil"/>
+          <p:cNvSpPr txBox="1"/>
+          <p:nvPr/>
+        </p:nvSpPr>
+        <p:spPr>
+          <a:xfrm>
+            <a:off x="9212351" y="3749040"/>
+            <a:ext cx="2019224" cy="548640"/>
+          </a:xfrm>
+          <a:prstGeom prst="rect">
+            <a:avLst/>
+          </a:prstGeom>
+          <a:noFill/>
+          <a:ln/>
+        </p:spPr>
+        <p:txBody>
+          <a:bodyPr wrap="square" lIns="0" tIns="0" rIns="0" bIns="0" rtlCol="0" anchor="ctr"/>
+          <a:lstStyle/>
+          <a:p>
+            <a:pPr algn="ctr" indent="0" marL="0">
+              <a:buNone/>
+            </a:pPr>
+            <a:r>
+              <a:rPr lang="en-US" sz="1300" b="1" spc="100" kern="0" dirty="0">
+                <a:solidFill>
+                  <a:schemeClr val="accent1"/>
+                </a:solidFill>
+              </a:rPr>
+              <a:t>CON UN PROYECTO PROPIO</a:t>
+            </a:r>
+            <a:endParaRPr lang="en-US" sz="1300" dirty="0"/>
+          </a:p>
+        </p:txBody>
+      </p:sp>
+      <p:sp>
+        <p:nvSpPr>
+          <p:cNvPr id="23" name="Caso 4 historia"/>
+          <p:cNvSpPr txBox="1"/>
+          <p:nvPr/>
+        </p:nvSpPr>
+        <p:spPr>
+          <a:xfrm>
+            <a:off x="9212351" y="4389120"/>
+            <a:ext cx="2019224" cy="731520"/>
           </a:xfrm>
           <a:prstGeom prst="rect">
             <a:avLst/>
@@ -7413,77 +9885,17 @@
               <a:buNone/>
             </a:pPr>
             <a:r>
-              <a:rPr lang="en-US" sz="2400" dirty="0">
-                <a:solidFill>
-                  <a:schemeClr val="bg1"/>
-                </a:solidFill>
-              </a:rPr>
-              <a:t>Cancelás cuando quieras.</a:t>
-            </a:r>
-            <a:endParaRPr lang="en-US" sz="2400" dirty="0"/>
-          </a:p>
-        </p:txBody>
-      </p:sp>
-      <p:sp>
-        <p:nvSpPr>
-          <p:cNvPr id="6" name="Escasez"/>
-          <p:cNvSpPr txBox="1"/>
-          <p:nvPr/>
-        </p:nvSpPr>
-        <p:spPr>
-          <a:xfrm>
-            <a:off x="731520" y="4983480"/>
-            <a:ext cx="10728655" cy="411480"/>
-          </a:xfrm>
-          <a:prstGeom prst="rect">
-            <a:avLst/>
-          </a:prstGeom>
-          <a:noFill/>
-          <a:ln/>
-        </p:spPr>
-        <p:txBody>
-          <a:bodyPr wrap="square" lIns="0" tIns="0" rIns="0" bIns="0" rtlCol="0" anchor="t"/>
-          <a:lstStyle/>
-          <a:p>
-            <a:pPr algn="ctr" indent="0" marL="0">
-              <a:buNone/>
-            </a:pPr>
-            <a:r>
-              <a:rPr lang="en-US" sz="1800" dirty="0">
-                <a:solidFill>
-                  <a:schemeClr val="accent2"/>
-                </a:solidFill>
-              </a:rPr>
-              <a:t>Precio para las primeras 20 personas. Después, el sistema lo sube a USD 50.</a:t>
-            </a:r>
-            <a:endParaRPr lang="en-US" sz="1800" dirty="0"/>
-          </a:p>
-        </p:txBody>
-      </p:sp>
-      <p:pic>
-        <p:nvPicPr>
-          <p:cNvPr id="7" name="Logo" descr="Instituto de Productividad">    </p:cNvPr>
-          <p:cNvPicPr>
-            <a:picLocks noChangeAspect="1"/>
-          </p:cNvPicPr>
-          <p:nvPr/>
-        </p:nvPicPr>
-        <p:blipFill>
-          <a:blip r:embed="rId1"/>
-          <a:stretch>
-            <a:fillRect/>
-          </a:stretch>
-        </p:blipFill>
-        <p:spPr>
-          <a:xfrm>
-            <a:off x="9722815" y="6093006"/>
-            <a:ext cx="1737360" cy="353514"/>
-          </a:xfrm>
-          <a:prstGeom prst="rect">
-            <a:avLst/>
-          </a:prstGeom>
-        </p:spPr>
-      </p:pic>
+              <a:rPr lang="en-US" sz="1500" dirty="0">
+                <a:solidFill>
+                  <a:schemeClr val="accent3"/>
+                </a:solidFill>
+              </a:rPr>
+              <a:t>[A CONFIRMAR: caso de Esteban]</a:t>
+            </a:r>
+            <a:endParaRPr lang="en-US" sz="1500" dirty="0"/>
+          </a:p>
+        </p:txBody>
+      </p:sp>
     </p:spTree>
   </p:cSld>
   <p:clrMapOvr>
